--- a/claude work/presentation final.pptx
+++ b/claude work/presentation final.pptx
@@ -2295,15 +2295,35 @@
           <a:lstStyle/>
           <a:p>
             <a:r>
+              <a:rPr dirty="0"/>
               <a:t>Ben</a:t>
             </a:r>
           </a:p>
           <a:p>
-            <a:endParaRPr/>
-          </a:p>
-          <a:p>
-            <a:r>
-              <a:t>Kusumegi et al. use diff-in-diff like us and find LLM adopters cite more diversely, but paper quality declines. Our contribution is causal identification of how LLM availability affects cross-field citation entropy specifically, using continuous treatment intensity.</a:t>
+            <a:endParaRPr dirty="0"/>
+          </a:p>
+          <a:p>
+            <a:r>
+              <a:rPr dirty="0" err="1"/>
+              <a:t>Kusumegi</a:t>
+            </a:r>
+            <a:r>
+              <a:rPr dirty="0"/>
+              <a:t> et al. use diff-in-diff like us and find LLM adopters cite more diversely, but paper quality declines. Our contribution is causal identification of how LLM </a:t>
+            </a:r>
+            <a:r>
+              <a:t>a</a:t>
+            </a:r>
+            <a:r>
+              <a:rPr lang="en-US"/>
+              <a:t>doption </a:t>
+            </a:r>
+            <a:r>
+              <a:t>affects </a:t>
+            </a:r>
+            <a:r>
+              <a:rPr dirty="0"/>
+              <a:t>cross-field citation entropy specifically, using continuous treatment intensity.</a:t>
             </a:r>
           </a:p>
         </p:txBody>
@@ -3186,7 +3206,7 @@
     <p:bg>
       <p:bgPr>
         <a:solidFill>
-          <a:srgbClr val="1E2761"/>
+          <a:srgbClr val="212121"/>
         </a:solidFill>
         <a:effectLst/>
       </p:bgPr>
@@ -3314,7 +3334,7 @@
             <a:r>
               <a:rPr lang="en-US" sz="1800" dirty="0">
                 <a:solidFill>
-                  <a:srgbClr val="CADCFC"/>
+                  <a:srgbClr val="C8CDD0"/>
                 </a:solidFill>
                 <a:latin typeface="Calibri" pitchFamily="34" charset="0"/>
                 <a:ea typeface="Calibri" pitchFamily="34" charset="-122"/>
@@ -3353,7 +3373,7 @@
             <a:r>
               <a:rPr lang="en-US" sz="1400" dirty="0">
                 <a:solidFill>
-                  <a:srgbClr val="556688"/>
+                  <a:srgbClr val="7A8084"/>
                 </a:solidFill>
                 <a:latin typeface="Calibri" pitchFamily="34" charset="0"/>
                 <a:ea typeface="Calibri" pitchFamily="34" charset="-122"/>
@@ -3376,6 +3396,12 @@
 <file path=ppt/slides/slide10.xml><?xml version="1.0" encoding="utf-8"?>
 <p:sld xmlns:a="http://schemas.openxmlformats.org/drawingml/2006/main" xmlns:r="http://schemas.openxmlformats.org/officeDocument/2006/relationships" xmlns:p="http://schemas.openxmlformats.org/presentationml/2006/main">
   <p:cSld>
+    <p:bg>
+      <p:bgPr>
+        <a:noFill/>
+        <a:effectLst/>
+      </p:bgPr>
+    </p:bg>
     <p:spTree>
       <p:nvGrpSpPr>
         <p:cNvPr id="1" name="">
@@ -3429,7 +3455,7 @@
             <a:r>
               <a:rPr lang="en-US" sz="2400" b="1" dirty="0">
                 <a:solidFill>
-                  <a:srgbClr val="1E2761"/>
+                  <a:srgbClr val="36454F"/>
                 </a:solidFill>
                 <a:latin typeface="Georgia" pitchFamily="34" charset="0"/>
                 <a:ea typeface="Georgia" pitchFamily="34" charset="-122"/>
@@ -3474,7 +3500,7 @@
             <a:r>
               <a:rPr lang="en-US" sz="1200" dirty="0">
                 <a:solidFill>
-                  <a:srgbClr val="556688"/>
+                  <a:srgbClr val="7A8084"/>
                 </a:solidFill>
                 <a:latin typeface="Calibri" pitchFamily="34" charset="0"/>
                 <a:ea typeface="Calibri" pitchFamily="34" charset="-122"/>
@@ -3507,7 +3533,7 @@
             <a:avLst/>
           </a:prstGeom>
           <a:solidFill>
-            <a:srgbClr val="1E2761"/>
+            <a:srgbClr val="36454F"/>
           </a:solidFill>
           <a:ln/>
           <a:effectLst>
@@ -3547,6 +3573,7 @@
             <a:avLst/>
           </a:prstGeom>
           <a:noFill/>
+          <a:ln/>
         </p:spPr>
         <p:txBody>
           <a:bodyPr wrap="square">
@@ -3627,7 +3654,7 @@
             <a:r>
               <a:rPr lang="en-US" sz="1300" dirty="0">
                 <a:solidFill>
-                  <a:srgbClr val="CADCFC"/>
+                  <a:srgbClr val="C8CDD0"/>
                 </a:solidFill>
                 <a:latin typeface="Calibri" pitchFamily="34" charset="0"/>
                 <a:ea typeface="Calibri" pitchFamily="34" charset="-122"/>
@@ -3660,6 +3687,7 @@
             <a:avLst/>
           </a:prstGeom>
           <a:noFill/>
+          <a:ln/>
         </p:spPr>
         <p:txBody>
           <a:bodyPr wrap="square" rtlCol="0">
@@ -3675,7 +3703,7 @@
             <a:r>
               <a:rPr lang="en-US" b="1" dirty="0">
                 <a:solidFill>
-                  <a:srgbClr val="1E2761"/>
+                  <a:srgbClr val="36454F"/>
                 </a:solidFill>
                 <a:latin typeface="Calibri" pitchFamily="34" charset="0"/>
                 <a:ea typeface="Calibri" pitchFamily="34" charset="-122"/>
@@ -3695,7 +3723,7 @@
             <a:r>
               <a:rPr lang="en-US" sz="1200" dirty="0">
                 <a:solidFill>
-                  <a:srgbClr val="1E2761"/>
+                  <a:srgbClr val="36454F"/>
                 </a:solidFill>
                 <a:latin typeface="Calibri" pitchFamily="34" charset="0"/>
                 <a:cs typeface="Calibri" pitchFamily="34" charset="-120"/>
@@ -3705,7 +3733,7 @@
             <a:r>
               <a:rPr lang="en-US" sz="1200" dirty="0" err="1">
                 <a:solidFill>
-                  <a:srgbClr val="1E2761"/>
+                  <a:srgbClr val="36454F"/>
                 </a:solidFill>
                 <a:latin typeface="Calibri" pitchFamily="34" charset="0"/>
                 <a:cs typeface="Calibri" pitchFamily="34" charset="-120"/>
@@ -3715,7 +3743,7 @@
             <a:r>
               <a:rPr lang="en-US" sz="1200" dirty="0">
                 <a:solidFill>
-                  <a:srgbClr val="1E2761"/>
+                  <a:srgbClr val="36454F"/>
                 </a:solidFill>
                 <a:latin typeface="Calibri" pitchFamily="34" charset="0"/>
                 <a:cs typeface="Calibri" pitchFamily="34" charset="-120"/>
@@ -3734,7 +3762,7 @@
             <a:r>
               <a:rPr lang="en-US" sz="1200" dirty="0">
                 <a:solidFill>
-                  <a:srgbClr val="1E2761"/>
+                  <a:srgbClr val="36454F"/>
                 </a:solidFill>
                 <a:latin typeface="Calibri" pitchFamily="34" charset="0"/>
                 <a:cs typeface="Calibri" pitchFamily="34" charset="-120"/>
@@ -3766,6 +3794,7 @@
             <a:avLst/>
           </a:prstGeom>
           <a:noFill/>
+          <a:ln/>
         </p:spPr>
         <p:txBody>
           <a:bodyPr wrap="square" rtlCol="0">
@@ -3781,7 +3810,7 @@
             <a:r>
               <a:rPr lang="en-US" b="1" dirty="0">
                 <a:solidFill>
-                  <a:srgbClr val="1E2761"/>
+                  <a:srgbClr val="36454F"/>
                 </a:solidFill>
                 <a:latin typeface="Calibri" pitchFamily="34" charset="0"/>
                 <a:ea typeface="Calibri" pitchFamily="34" charset="-122"/>
@@ -3801,7 +3830,7 @@
             <a:r>
               <a:rPr lang="en-US" sz="1200" dirty="0">
                 <a:solidFill>
-                  <a:srgbClr val="1E2761"/>
+                  <a:srgbClr val="36454F"/>
                 </a:solidFill>
                 <a:latin typeface="Calibri" pitchFamily="34" charset="0"/>
                 <a:cs typeface="Calibri" pitchFamily="34" charset="-120"/>
@@ -3820,7 +3849,7 @@
             <a:r>
               <a:rPr lang="en-US" sz="1200" dirty="0">
                 <a:solidFill>
-                  <a:srgbClr val="1E2761"/>
+                  <a:srgbClr val="36454F"/>
                 </a:solidFill>
                 <a:latin typeface="Calibri" pitchFamily="34" charset="0"/>
                 <a:cs typeface="Calibri" pitchFamily="34" charset="-120"/>
@@ -3830,7 +3859,7 @@
             <a:r>
               <a:rPr lang="en-US" sz="1200" dirty="0">
                 <a:solidFill>
-                  <a:srgbClr val="1E2761"/>
+                  <a:srgbClr val="36454F"/>
                 </a:solidFill>
                 <a:latin typeface="Calibri" pitchFamily="34" charset="0"/>
                 <a:ea typeface="Calibri" pitchFamily="34" charset="-122"/>
@@ -3869,7 +3898,7 @@
     <p:bg>
       <p:bgPr>
         <a:solidFill>
-          <a:srgbClr val="F4F6FA"/>
+          <a:srgbClr val="F2F2F2"/>
         </a:solidFill>
         <a:effectLst/>
       </p:bgPr>
@@ -3915,7 +3944,7 @@
             <a:r>
               <a:rPr lang="en-US" sz="2400" b="1" dirty="0">
                 <a:solidFill>
-                  <a:srgbClr val="1E2761"/>
+                  <a:srgbClr val="36454F"/>
                 </a:solidFill>
                 <a:latin typeface="Georgia" pitchFamily="34" charset="0"/>
                 <a:ea typeface="Georgia" pitchFamily="34" charset="-122"/>
@@ -3954,7 +3983,7 @@
             <a:r>
               <a:rPr lang="en-US" sz="1200" dirty="0">
                 <a:solidFill>
-                  <a:srgbClr val="556688"/>
+                  <a:srgbClr val="7A8084"/>
                 </a:solidFill>
                 <a:latin typeface="Calibri" pitchFamily="34" charset="0"/>
                 <a:ea typeface="Calibri" pitchFamily="34" charset="-122"/>
@@ -3994,6 +4023,7 @@
           <a:prstGeom prst="rect">
             <a:avLst/>
           </a:prstGeom>
+          <a:ln/>
         </p:spPr>
       </p:pic>
     </p:spTree>
@@ -4010,7 +4040,7 @@
     <p:bg>
       <p:bgPr>
         <a:solidFill>
-          <a:srgbClr val="F4F6FA"/>
+          <a:srgbClr val="F2F2F2"/>
         </a:solidFill>
         <a:effectLst/>
       </p:bgPr>
@@ -4068,7 +4098,7 @@
             <a:r>
               <a:rPr lang="en-US" sz="2400" b="1" dirty="0">
                 <a:solidFill>
-                  <a:srgbClr val="1E2761"/>
+                  <a:srgbClr val="36454F"/>
                 </a:solidFill>
                 <a:latin typeface="Georgia" pitchFamily="34" charset="0"/>
                 <a:ea typeface="Georgia" pitchFamily="34" charset="-122"/>
@@ -4113,7 +4143,7 @@
             <a:r>
               <a:rPr lang="en-US" sz="1200" dirty="0">
                 <a:solidFill>
-                  <a:srgbClr val="556688"/>
+                  <a:srgbClr val="7A8084"/>
                 </a:solidFill>
                 <a:latin typeface="Calibri" pitchFamily="34" charset="0"/>
                 <a:ea typeface="Calibri" pitchFamily="34" charset="-122"/>
@@ -4153,6 +4183,7 @@
           <a:prstGeom prst="rect">
             <a:avLst/>
           </a:prstGeom>
+          <a:ln/>
         </p:spPr>
       </p:pic>
     </p:spTree>
@@ -4171,6 +4202,12 @@
 <file path=ppt/slides/slide13.xml><?xml version="1.0" encoding="utf-8"?>
 <p:sld xmlns:a="http://schemas.openxmlformats.org/drawingml/2006/main" xmlns:r="http://schemas.openxmlformats.org/officeDocument/2006/relationships" xmlns:p="http://schemas.openxmlformats.org/presentationml/2006/main">
   <p:cSld>
+    <p:bg>
+      <p:bgPr>
+        <a:noFill/>
+        <a:effectLst/>
+      </p:bgPr>
+    </p:bg>
     <p:spTree>
       <p:nvGrpSpPr>
         <p:cNvPr id="1" name="">
@@ -4224,7 +4261,7 @@
             <a:r>
               <a:rPr lang="en-US" sz="2400" b="1" dirty="0">
                 <a:solidFill>
-                  <a:srgbClr val="1E2761"/>
+                  <a:srgbClr val="36454F"/>
                 </a:solidFill>
                 <a:latin typeface="Georgia" pitchFamily="34" charset="0"/>
                 <a:ea typeface="Georgia" pitchFamily="34" charset="-122"/>
@@ -4269,7 +4306,7 @@
             <a:r>
               <a:rPr lang="en-US" sz="1200" dirty="0">
                 <a:solidFill>
-                  <a:srgbClr val="556688"/>
+                  <a:srgbClr val="7A8084"/>
                 </a:solidFill>
                 <a:latin typeface="Calibri" pitchFamily="34" charset="0"/>
                 <a:ea typeface="Calibri" pitchFamily="34" charset="-122"/>
@@ -4386,7 +4423,7 @@
                       <a:tailEnd type="none" w="med" len="med"/>
                     </a:lnB>
                     <a:solidFill>
-                      <a:srgbClr val="1E2761"/>
+                      <a:srgbClr val="36454F"/>
                     </a:solidFill>
                   </a:tcPr>
                 </a:tc>
@@ -4454,7 +4491,7 @@
                       <a:tailEnd type="none" w="med" len="med"/>
                     </a:lnB>
                     <a:solidFill>
-                      <a:srgbClr val="1E2761"/>
+                      <a:srgbClr val="36454F"/>
                     </a:solidFill>
                   </a:tcPr>
                 </a:tc>
@@ -4522,7 +4559,7 @@
                       <a:tailEnd type="none" w="med" len="med"/>
                     </a:lnB>
                     <a:solidFill>
-                      <a:srgbClr val="1E2761"/>
+                      <a:srgbClr val="36454F"/>
                     </a:solidFill>
                   </a:tcPr>
                 </a:tc>
@@ -4800,7 +4837,7 @@
                       <a:r>
                         <a:rPr lang="en-US" sz="1000" dirty="0">
                           <a:solidFill>
-                            <a:srgbClr val="556688"/>
+                            <a:srgbClr val="7A8084"/>
                           </a:solidFill>
                           <a:latin typeface="Calibri" pitchFamily="34" charset="0"/>
                           <a:ea typeface="Calibri" pitchFamily="34" charset="-122"/>
@@ -4865,7 +4902,7 @@
                       <a:r>
                         <a:rPr lang="en-US" sz="1000" dirty="0">
                           <a:solidFill>
-                            <a:srgbClr val="556688"/>
+                            <a:srgbClr val="7A8084"/>
                           </a:solidFill>
                           <a:latin typeface="Calibri" pitchFamily="34" charset="0"/>
                           <a:ea typeface="Calibri" pitchFamily="34" charset="-122"/>
@@ -5239,7 +5276,7 @@
                       <a:r>
                         <a:rPr lang="en-US" sz="1000" dirty="0">
                           <a:solidFill>
-                            <a:srgbClr val="556688"/>
+                            <a:srgbClr val="7A8084"/>
                           </a:solidFill>
                           <a:latin typeface="Calibri" pitchFamily="34" charset="0"/>
                           <a:ea typeface="Calibri" pitchFamily="34" charset="-122"/>
@@ -6919,7 +6956,7 @@
             <a:r>
               <a:rPr lang="en-US" sz="900" dirty="0">
                 <a:solidFill>
-                  <a:srgbClr val="556688"/>
+                  <a:srgbClr val="7A8084"/>
                 </a:solidFill>
                 <a:latin typeface="Calibri" pitchFamily="34" charset="0"/>
                 <a:ea typeface="Calibri" pitchFamily="34" charset="-122"/>
@@ -6952,6 +6989,7 @@
             <a:avLst/>
           </a:prstGeom>
           <a:noFill/>
+          <a:ln/>
         </p:spPr>
         <p:txBody>
           <a:bodyPr wrap="square" rtlCol="0">
@@ -6964,7 +7002,9 @@
               <a:buAutoNum type="arabicPeriod"/>
             </a:pPr>
             <a:r>
-              <a:rPr lang="en-US" sz="1600" dirty="0"/>
+              <a:rPr lang="en-US" sz="1600" dirty="0">
+                <a:solidFill/>
+              </a:rPr>
               <a:t>Both jump gradual trend are separately significant</a:t>
             </a:r>
           </a:p>
@@ -6974,7 +7014,9 @@
               <a:buAutoNum type="arabicPeriod"/>
             </a:pPr>
             <a:r>
-              <a:rPr lang="en-US" sz="1600" dirty="0"/>
+              <a:rPr lang="en-US" sz="1600" dirty="0">
+                <a:solidFill/>
+              </a:rPr>
               <a:t>Gradual trend better describes impact than singular-time jump</a:t>
             </a:r>
           </a:p>
@@ -6984,7 +7026,9 @@
               <a:buAutoNum type="arabicPeriod"/>
             </a:pPr>
             <a:r>
-              <a:rPr lang="en-US" sz="1600" dirty="0"/>
+              <a:rPr lang="en-US" sz="1600" dirty="0">
+                <a:solidFill/>
+              </a:rPr>
               <a:t>This makes sense as it takes time to adopt new models into a workflow</a:t>
             </a:r>
           </a:p>
@@ -7009,7 +7053,7 @@
     <p:bg>
       <p:bgPr>
         <a:solidFill>
-          <a:srgbClr val="F4F6FA"/>
+          <a:srgbClr val="F2F2F2"/>
         </a:solidFill>
         <a:effectLst/>
       </p:bgPr>
@@ -7055,7 +7099,7 @@
             <a:r>
               <a:rPr lang="en-US" sz="2400" b="1" dirty="0">
                 <a:solidFill>
-                  <a:srgbClr val="1E2761"/>
+                  <a:srgbClr val="36454F"/>
                 </a:solidFill>
                 <a:latin typeface="Georgia" pitchFamily="34" charset="0"/>
                 <a:ea typeface="Georgia" pitchFamily="34" charset="-122"/>
@@ -7094,7 +7138,7 @@
             <a:r>
               <a:rPr lang="en-US" sz="1100" dirty="0">
                 <a:solidFill>
-                  <a:srgbClr val="556688"/>
+                  <a:srgbClr val="7A8084"/>
                 </a:solidFill>
                 <a:latin typeface="Calibri" pitchFamily="34" charset="0"/>
                 <a:ea typeface="Calibri" pitchFamily="34" charset="-122"/>
@@ -7111,7 +7155,7 @@
             <a:r>
               <a:rPr lang="en-US" sz="1100" dirty="0">
                 <a:solidFill>
-                  <a:srgbClr val="556688"/>
+                  <a:srgbClr val="7A8084"/>
                 </a:solidFill>
                 <a:latin typeface="Calibri" pitchFamily="34" charset="0"/>
                 <a:ea typeface="Calibri" pitchFamily="34" charset="-122"/>
@@ -7150,7 +7194,7 @@
             <a:r>
               <a:rPr lang="en-US" sz="1100" dirty="0">
                 <a:solidFill>
-                  <a:srgbClr val="556688"/>
+                  <a:srgbClr val="7A8084"/>
                 </a:solidFill>
                 <a:latin typeface="Calibri" pitchFamily="34" charset="0"/>
                 <a:ea typeface="Calibri" pitchFamily="34" charset="-122"/>
@@ -7167,7 +7211,7 @@
             <a:r>
               <a:rPr lang="en-US" sz="1100" dirty="0">
                 <a:solidFill>
-                  <a:srgbClr val="556688"/>
+                  <a:srgbClr val="7A8084"/>
                 </a:solidFill>
                 <a:latin typeface="Calibri" pitchFamily="34" charset="0"/>
                 <a:ea typeface="Calibri" pitchFamily="34" charset="-122"/>
@@ -7207,6 +7251,7 @@
           <a:prstGeom prst="rect">
             <a:avLst/>
           </a:prstGeom>
+          <a:ln/>
         </p:spPr>
       </p:pic>
       <p:pic>
@@ -7237,6 +7282,7 @@
           <a:prstGeom prst="rect">
             <a:avLst/>
           </a:prstGeom>
+          <a:ln/>
         </p:spPr>
       </p:pic>
       <p:sp>
@@ -7260,6 +7306,7 @@
             <a:avLst/>
           </a:prstGeom>
           <a:noFill/>
+          <a:ln/>
         </p:spPr>
         <p:txBody>
           <a:bodyPr wrap="square" rtlCol="0">
@@ -7268,7 +7315,9 @@
           <a:lstStyle/>
           <a:p>
             <a:r>
-              <a:rPr lang="en-US" sz="1400" dirty="0"/>
+              <a:rPr lang="en-US" sz="1400" dirty="0">
+                <a:solidFill/>
+              </a:rPr>
               <a:t>We expect parallel trends for the development of high AI propensity and low AI propensity fields before treatment</a:t>
             </a:r>
           </a:p>
@@ -7295,6 +7344,7 @@
             <a:avLst/>
           </a:prstGeom>
           <a:noFill/>
+          <a:ln/>
         </p:spPr>
         <p:txBody>
           <a:bodyPr wrap="square" rtlCol="0">
@@ -7303,7 +7353,9 @@
           <a:lstStyle/>
           <a:p>
             <a:r>
-              <a:rPr lang="en-US" sz="1400" dirty="0"/>
+              <a:rPr lang="en-US" sz="1400" dirty="0">
+                <a:solidFill/>
+              </a:rPr>
               <a:t>We expect within-field share of citations to drop more in high AI fields than in low AI fields</a:t>
             </a:r>
           </a:p>
@@ -7323,7 +7375,7 @@
     <p:bg>
       <p:bgPr>
         <a:solidFill>
-          <a:srgbClr val="F4F6FA"/>
+          <a:srgbClr val="F2F2F2"/>
         </a:solidFill>
         <a:effectLst/>
       </p:bgPr>
@@ -7381,7 +7433,7 @@
             <a:r>
               <a:rPr lang="en-US" sz="2400" b="1" dirty="0">
                 <a:solidFill>
-                  <a:srgbClr val="1E2761"/>
+                  <a:srgbClr val="36454F"/>
                 </a:solidFill>
                 <a:latin typeface="Georgia" pitchFamily="34" charset="0"/>
                 <a:ea typeface="Georgia" pitchFamily="34" charset="-122"/>
@@ -7426,7 +7478,7 @@
             <a:r>
               <a:rPr lang="en-US" sz="1100" dirty="0">
                 <a:solidFill>
-                  <a:srgbClr val="556688"/>
+                  <a:srgbClr val="7A8084"/>
                 </a:solidFill>
                 <a:latin typeface="Calibri" pitchFamily="34" charset="0"/>
                 <a:ea typeface="Calibri" pitchFamily="34" charset="-122"/>
@@ -7443,7 +7495,7 @@
             <a:r>
               <a:rPr lang="en-US" sz="1100" dirty="0">
                 <a:solidFill>
-                  <a:srgbClr val="556688"/>
+                  <a:srgbClr val="7A8084"/>
                 </a:solidFill>
                 <a:latin typeface="Calibri" pitchFamily="34" charset="0"/>
                 <a:ea typeface="Calibri" pitchFamily="34" charset="-122"/>
@@ -7488,7 +7540,7 @@
             <a:r>
               <a:rPr lang="en-US" sz="1100" dirty="0">
                 <a:solidFill>
-                  <a:srgbClr val="556688"/>
+                  <a:srgbClr val="7A8084"/>
                 </a:solidFill>
                 <a:latin typeface="Calibri" pitchFamily="34" charset="0"/>
                 <a:ea typeface="Calibri" pitchFamily="34" charset="-122"/>
@@ -7505,7 +7557,7 @@
             <a:r>
               <a:rPr lang="en-US" sz="1100" dirty="0">
                 <a:solidFill>
-                  <a:srgbClr val="556688"/>
+                  <a:srgbClr val="7A8084"/>
                 </a:solidFill>
                 <a:latin typeface="Calibri" pitchFamily="34" charset="0"/>
                 <a:ea typeface="Calibri" pitchFamily="34" charset="-122"/>
@@ -7545,6 +7597,7 @@
           <a:prstGeom prst="rect">
             <a:avLst/>
           </a:prstGeom>
+          <a:ln/>
         </p:spPr>
       </p:pic>
       <p:pic>
@@ -7575,6 +7628,7 @@
           <a:prstGeom prst="rect">
             <a:avLst/>
           </a:prstGeom>
+          <a:ln/>
         </p:spPr>
       </p:pic>
       <p:sp>
@@ -7598,6 +7652,7 @@
             <a:avLst/>
           </a:prstGeom>
           <a:noFill/>
+          <a:ln/>
         </p:spPr>
         <p:txBody>
           <a:bodyPr wrap="square" rtlCol="0">
@@ -7606,7 +7661,9 @@
           <a:lstStyle/>
           <a:p>
             <a:r>
-              <a:rPr lang="en-US" sz="1400" dirty="0"/>
+              <a:rPr lang="en-US" sz="1400" dirty="0">
+                <a:solidFill/>
+              </a:rPr>
               <a:t>We expect parallel trends for the development of high AI propensity and low AI propensity fields before treatment</a:t>
             </a:r>
           </a:p>
@@ -7633,6 +7690,7 @@
             <a:avLst/>
           </a:prstGeom>
           <a:noFill/>
+          <a:ln/>
         </p:spPr>
         <p:txBody>
           <a:bodyPr wrap="square" rtlCol="0">
@@ -7641,7 +7699,9 @@
           <a:lstStyle/>
           <a:p>
             <a:r>
-              <a:rPr lang="en-US" sz="1400" dirty="0"/>
+              <a:rPr lang="en-US" sz="1400" dirty="0">
+                <a:solidFill/>
+              </a:rPr>
               <a:t>We expect within-field share of citations to drop more in high AI fields than in low AI fields</a:t>
             </a:r>
           </a:p>
@@ -7666,7 +7726,7 @@
     <p:bg>
       <p:bgPr>
         <a:solidFill>
-          <a:srgbClr val="F4F6FA"/>
+          <a:srgbClr val="F2F2F2"/>
         </a:solidFill>
         <a:effectLst/>
       </p:bgPr>
@@ -7712,7 +7772,7 @@
             <a:r>
               <a:rPr lang="en-US" sz="2400" b="1" dirty="0">
                 <a:solidFill>
-                  <a:srgbClr val="1E2761"/>
+                  <a:srgbClr val="36454F"/>
                 </a:solidFill>
                 <a:latin typeface="Georgia" pitchFamily="34" charset="0"/>
                 <a:ea typeface="Georgia" pitchFamily="34" charset="-122"/>
@@ -7751,7 +7811,7 @@
             <a:r>
               <a:rPr lang="en-US" sz="1200" dirty="0">
                 <a:solidFill>
-                  <a:srgbClr val="556688"/>
+                  <a:srgbClr val="7A8084"/>
                 </a:solidFill>
                 <a:latin typeface="Calibri" pitchFamily="34" charset="0"/>
                 <a:ea typeface="Calibri" pitchFamily="34" charset="-122"/>
@@ -7791,6 +7851,7 @@
           <a:prstGeom prst="rect">
             <a:avLst/>
           </a:prstGeom>
+          <a:ln/>
         </p:spPr>
       </p:pic>
       <p:sp>
@@ -7814,6 +7875,7 @@
             <a:avLst/>
           </a:prstGeom>
           <a:noFill/>
+          <a:ln/>
         </p:spPr>
         <p:txBody>
           <a:bodyPr wrap="square" rtlCol="0">
@@ -7822,7 +7884,9 @@
           <a:lstStyle/>
           <a:p>
             <a:r>
-              <a:rPr lang="en-US" sz="1600" dirty="0"/>
+              <a:rPr lang="en-US" sz="1600" dirty="0">
+                <a:solidFill/>
+              </a:rPr>
               <a:t>Dose-Response: Higher Propensity -&gt; Larger Entropy Gains</a:t>
             </a:r>
           </a:p>
@@ -7835,7 +7899,9 @@
               <a:buChar char="•"/>
             </a:pPr>
             <a:r>
-              <a:rPr lang="en-US" sz="1600" dirty="0"/>
+              <a:rPr lang="en-US" sz="1600" dirty="0">
+                <a:solidFill/>
+              </a:rPr>
               <a:t>While no longer controlling for other variables, this offers a clean visualization of the effect we find in our regression specification</a:t>
             </a:r>
           </a:p>
@@ -7852,6 +7918,12 @@
 <file path=ppt/slides/slide17.xml><?xml version="1.0" encoding="utf-8"?>
 <p:sld xmlns:a="http://schemas.openxmlformats.org/drawingml/2006/main" xmlns:r="http://schemas.openxmlformats.org/officeDocument/2006/relationships" xmlns:p="http://schemas.openxmlformats.org/presentationml/2006/main">
   <p:cSld>
+    <p:bg>
+      <p:bgPr>
+        <a:noFill/>
+        <a:effectLst/>
+      </p:bgPr>
+    </p:bg>
     <p:spTree>
       <p:nvGrpSpPr>
         <p:cNvPr id="1" name=""/>
@@ -7893,7 +7965,7 @@
             <a:r>
               <a:rPr lang="en-US" sz="2800" b="1" dirty="0">
                 <a:solidFill>
-                  <a:srgbClr val="1E2761"/>
+                  <a:srgbClr val="36454F"/>
                 </a:solidFill>
                 <a:latin typeface="Georgia" pitchFamily="34" charset="0"/>
                 <a:ea typeface="Georgia" pitchFamily="34" charset="-122"/>
@@ -7920,7 +7992,7 @@
             <a:avLst/>
           </a:prstGeom>
           <a:solidFill>
-            <a:srgbClr val="3A7BD5"/>
+            <a:srgbClr val="E8963E"/>
           </a:solidFill>
           <a:ln/>
         </p:spPr>
@@ -7998,7 +8070,7 @@
             <a:r>
               <a:rPr lang="en-US" sz="1600" b="1" dirty="0">
                 <a:solidFill>
-                  <a:srgbClr val="1E2761"/>
+                  <a:srgbClr val="36454F"/>
                 </a:solidFill>
                 <a:latin typeface="Calibri" pitchFamily="34" charset="0"/>
                 <a:ea typeface="Calibri" pitchFamily="34" charset="-122"/>
@@ -8037,7 +8109,7 @@
             <a:r>
               <a:rPr lang="en-US" sz="1200" dirty="0">
                 <a:solidFill>
-                  <a:srgbClr val="1E2761"/>
+                  <a:srgbClr val="36454F"/>
                 </a:solidFill>
                 <a:latin typeface="Calibri" pitchFamily="34" charset="0"/>
                 <a:ea typeface="Calibri" pitchFamily="34" charset="-122"/>
@@ -8064,7 +8136,7 @@
             <a:avLst/>
           </a:prstGeom>
           <a:solidFill>
-            <a:srgbClr val="3A7BD5"/>
+            <a:srgbClr val="E8963E"/>
           </a:solidFill>
           <a:ln/>
         </p:spPr>
@@ -8142,7 +8214,7 @@
             <a:r>
               <a:rPr lang="en-US" sz="1600" b="1" dirty="0">
                 <a:solidFill>
-                  <a:srgbClr val="1E2761"/>
+                  <a:srgbClr val="36454F"/>
                 </a:solidFill>
                 <a:latin typeface="Calibri" pitchFamily="34" charset="0"/>
                 <a:ea typeface="Calibri" pitchFamily="34" charset="-122"/>
@@ -8181,7 +8253,7 @@
             <a:r>
               <a:rPr lang="en-US" sz="1200" dirty="0">
                 <a:solidFill>
-                  <a:srgbClr val="1E2761"/>
+                  <a:srgbClr val="36454F"/>
                 </a:solidFill>
                 <a:latin typeface="Calibri" pitchFamily="34" charset="0"/>
                 <a:ea typeface="Calibri" pitchFamily="34" charset="-122"/>
@@ -8208,7 +8280,7 @@
             <a:avLst/>
           </a:prstGeom>
           <a:solidFill>
-            <a:srgbClr val="3A7BD5"/>
+            <a:srgbClr val="E8963E"/>
           </a:solidFill>
           <a:ln/>
         </p:spPr>
@@ -8286,7 +8358,7 @@
             <a:r>
               <a:rPr lang="en-US" sz="1600" b="1" dirty="0">
                 <a:solidFill>
-                  <a:srgbClr val="1E2761"/>
+                  <a:srgbClr val="36454F"/>
                 </a:solidFill>
                 <a:latin typeface="Calibri" pitchFamily="34" charset="0"/>
                 <a:ea typeface="Calibri" pitchFamily="34" charset="-122"/>
@@ -8325,7 +8397,7 @@
             <a:r>
               <a:rPr lang="en-US" sz="1200" dirty="0">
                 <a:solidFill>
-                  <a:srgbClr val="1E2761"/>
+                  <a:srgbClr val="36454F"/>
                 </a:solidFill>
                 <a:latin typeface="Calibri" pitchFamily="34" charset="0"/>
                 <a:ea typeface="Calibri" pitchFamily="34" charset="-122"/>
@@ -8348,6 +8420,12 @@
 <file path=ppt/slides/slide18.xml><?xml version="1.0" encoding="utf-8"?>
 <p:sld xmlns:a="http://schemas.openxmlformats.org/drawingml/2006/main" xmlns:r="http://schemas.openxmlformats.org/officeDocument/2006/relationships" xmlns:p="http://schemas.openxmlformats.org/presentationml/2006/main">
   <p:cSld>
+    <p:bg>
+      <p:bgPr>
+        <a:noFill/>
+        <a:effectLst/>
+      </p:bgPr>
+    </p:bg>
     <p:spTree>
       <p:nvGrpSpPr>
         <p:cNvPr id="1" name="">
@@ -8401,7 +8479,7 @@
             <a:r>
               <a:rPr lang="en-US" sz="2800" b="1" dirty="0">
                 <a:solidFill>
-                  <a:srgbClr val="1E2761"/>
+                  <a:srgbClr val="36454F"/>
                 </a:solidFill>
                 <a:latin typeface="Georgia" pitchFamily="34" charset="0"/>
                 <a:ea typeface="Georgia" pitchFamily="34" charset="-122"/>
@@ -8434,7 +8512,7 @@
             <a:avLst/>
           </a:prstGeom>
           <a:solidFill>
-            <a:srgbClr val="3A7BD5"/>
+            <a:srgbClr val="E8963E"/>
           </a:solidFill>
           <a:ln/>
         </p:spPr>
@@ -8524,7 +8602,7 @@
             <a:r>
               <a:rPr lang="en-US" sz="1600" b="1" dirty="0">
                 <a:solidFill>
-                  <a:srgbClr val="1E2761"/>
+                  <a:srgbClr val="36454F"/>
                 </a:solidFill>
                 <a:latin typeface="Calibri" pitchFamily="34" charset="0"/>
                 <a:ea typeface="Calibri" pitchFamily="34" charset="-122"/>
@@ -8569,7 +8647,7 @@
             <a:r>
               <a:rPr lang="en-US" sz="1200" dirty="0">
                 <a:solidFill>
-                  <a:srgbClr val="1E2761"/>
+                  <a:srgbClr val="36454F"/>
                 </a:solidFill>
                 <a:latin typeface="Calibri" pitchFamily="34" charset="0"/>
                 <a:ea typeface="Calibri" pitchFamily="34" charset="-122"/>
@@ -8602,7 +8680,7 @@
             <a:avLst/>
           </a:prstGeom>
           <a:solidFill>
-            <a:srgbClr val="3A7BD5"/>
+            <a:srgbClr val="E8963E"/>
           </a:solidFill>
           <a:ln/>
         </p:spPr>
@@ -8692,7 +8770,7 @@
             <a:r>
               <a:rPr lang="en-US" sz="1600" b="1" dirty="0">
                 <a:solidFill>
-                  <a:srgbClr val="1E2761"/>
+                  <a:srgbClr val="36454F"/>
                 </a:solidFill>
                 <a:latin typeface="Calibri" pitchFamily="34" charset="0"/>
                 <a:ea typeface="Calibri" pitchFamily="34" charset="-122"/>
@@ -8737,7 +8815,7 @@
             <a:r>
               <a:rPr lang="en-US" sz="1200" dirty="0">
                 <a:solidFill>
-                  <a:srgbClr val="1E2761"/>
+                  <a:srgbClr val="36454F"/>
                 </a:solidFill>
                 <a:latin typeface="Calibri" pitchFamily="34" charset="0"/>
                 <a:ea typeface="Calibri" pitchFamily="34" charset="-122"/>
@@ -8770,7 +8848,7 @@
             <a:avLst/>
           </a:prstGeom>
           <a:solidFill>
-            <a:srgbClr val="3A7BD5"/>
+            <a:srgbClr val="E8963E"/>
           </a:solidFill>
           <a:ln/>
         </p:spPr>
@@ -8860,7 +8938,7 @@
             <a:r>
               <a:rPr lang="en-US" sz="1600" b="1" dirty="0">
                 <a:solidFill>
-                  <a:srgbClr val="1E2761"/>
+                  <a:srgbClr val="36454F"/>
                 </a:solidFill>
                 <a:latin typeface="Calibri" pitchFamily="34" charset="0"/>
                 <a:ea typeface="Calibri" pitchFamily="34" charset="-122"/>
@@ -8905,7 +8983,7 @@
             <a:r>
               <a:rPr lang="en-US" sz="1200" dirty="0">
                 <a:solidFill>
-                  <a:srgbClr val="1E2761"/>
+                  <a:srgbClr val="36454F"/>
                 </a:solidFill>
                 <a:latin typeface="Calibri" pitchFamily="34" charset="0"/>
                 <a:ea typeface="Calibri" pitchFamily="34" charset="-122"/>
@@ -8936,7 +9014,7 @@
     <p:bg>
       <p:bgPr>
         <a:solidFill>
-          <a:srgbClr val="1E2761"/>
+          <a:srgbClr val="212121"/>
         </a:solidFill>
         <a:effectLst/>
       </p:bgPr>
@@ -9009,7 +9087,7 @@
             <a:avLst/>
           </a:prstGeom>
           <a:solidFill>
-            <a:srgbClr val="3A7BD5"/>
+            <a:srgbClr val="E8963E"/>
           </a:solidFill>
           <a:ln/>
         </p:spPr>
@@ -9123,7 +9201,7 @@
             <a:r>
               <a:rPr lang="en-US" sz="1200" dirty="0">
                 <a:solidFill>
-                  <a:srgbClr val="CADCFC"/>
+                  <a:srgbClr val="C8CDD0"/>
                 </a:solidFill>
                 <a:latin typeface="Calibri" pitchFamily="34" charset="0"/>
                 <a:ea typeface="Calibri" pitchFamily="34" charset="-122"/>
@@ -9162,7 +9240,7 @@
             <a:r>
               <a:rPr lang="en-US" sz="1100" dirty="0">
                 <a:solidFill>
-                  <a:srgbClr val="556688"/>
+                  <a:srgbClr val="7A8084"/>
                 </a:solidFill>
                 <a:latin typeface="Calibri" pitchFamily="34" charset="0"/>
                 <a:ea typeface="Calibri" pitchFamily="34" charset="-122"/>
@@ -9188,7 +9266,7 @@
     <p:bg>
       <p:bgPr>
         <a:solidFill>
-          <a:srgbClr val="F4F6FA"/>
+          <a:srgbClr val="F2F2F2"/>
         </a:solidFill>
         <a:effectLst/>
       </p:bgPr>
@@ -9234,7 +9312,7 @@
             <a:r>
               <a:rPr lang="en-US" sz="2800" b="1" dirty="0">
                 <a:solidFill>
-                  <a:srgbClr val="1E2761"/>
+                  <a:srgbClr val="36454F"/>
                 </a:solidFill>
                 <a:latin typeface="Georgia" pitchFamily="34" charset="0"/>
                 <a:ea typeface="Georgia" pitchFamily="34" charset="-122"/>
@@ -9261,7 +9339,7 @@
             <a:avLst/>
           </a:prstGeom>
           <a:solidFill>
-            <a:srgbClr val="1E2761"/>
+            <a:srgbClr val="36454F"/>
           </a:solidFill>
           <a:ln/>
           <a:effectLst>
@@ -9349,7 +9427,7 @@
             <a:r>
               <a:rPr lang="en-US" sz="1800" b="1" dirty="0">
                 <a:solidFill>
-                  <a:srgbClr val="1E2761"/>
+                  <a:srgbClr val="36454F"/>
                 </a:solidFill>
                 <a:latin typeface="Calibri" pitchFamily="34" charset="0"/>
                 <a:ea typeface="Calibri" pitchFamily="34" charset="-122"/>
@@ -9370,7 +9448,7 @@
             <a:r>
               <a:rPr lang="en-US" sz="1400" dirty="0">
                 <a:solidFill>
-                  <a:srgbClr val="1E2761"/>
+                  <a:srgbClr val="36454F"/>
                 </a:solidFill>
                 <a:latin typeface="Calibri" pitchFamily="34" charset="0"/>
                 <a:ea typeface="Calibri" pitchFamily="34" charset="-122"/>
@@ -9391,7 +9469,7 @@
             <a:r>
               <a:rPr lang="en-US" sz="1400" dirty="0">
                 <a:solidFill>
-                  <a:srgbClr val="1E2761"/>
+                  <a:srgbClr val="36454F"/>
                 </a:solidFill>
                 <a:latin typeface="Calibri" pitchFamily="34" charset="0"/>
                 <a:ea typeface="Calibri" pitchFamily="34" charset="-122"/>
@@ -9412,7 +9490,7 @@
             <a:r>
               <a:rPr lang="en-US" sz="1400" dirty="0">
                 <a:solidFill>
-                  <a:srgbClr val="1E2761"/>
+                  <a:srgbClr val="36454F"/>
                 </a:solidFill>
                 <a:latin typeface="Calibri" pitchFamily="34" charset="0"/>
                 <a:ea typeface="Calibri" pitchFamily="34" charset="-122"/>
@@ -9433,7 +9511,7 @@
             <a:r>
               <a:rPr lang="en-US" sz="1400" dirty="0">
                 <a:solidFill>
-                  <a:srgbClr val="1E2761"/>
+                  <a:srgbClr val="36454F"/>
                 </a:solidFill>
                 <a:latin typeface="Calibri" pitchFamily="34" charset="0"/>
                 <a:ea typeface="Calibri" pitchFamily="34" charset="-122"/>
@@ -9454,7 +9532,7 @@
             <a:r>
               <a:rPr lang="en-US" sz="1400" dirty="0">
                 <a:solidFill>
-                  <a:srgbClr val="1E2761"/>
+                  <a:srgbClr val="36454F"/>
                 </a:solidFill>
                 <a:latin typeface="Calibri" pitchFamily="34" charset="0"/>
                 <a:ea typeface="Calibri" pitchFamily="34" charset="-122"/>
@@ -9465,7 +9543,7 @@
             <a:r>
               <a:rPr lang="en-US" sz="1400" dirty="0" err="1">
                 <a:solidFill>
-                  <a:srgbClr val="1E2761"/>
+                  <a:srgbClr val="36454F"/>
                 </a:solidFill>
                 <a:latin typeface="Calibri" pitchFamily="34" charset="0"/>
                 <a:ea typeface="Calibri" pitchFamily="34" charset="-122"/>
@@ -9476,7 +9554,7 @@
             <a:r>
               <a:rPr lang="en-US" sz="1400" dirty="0">
                 <a:solidFill>
-                  <a:srgbClr val="1E2761"/>
+                  <a:srgbClr val="36454F"/>
                 </a:solidFill>
                 <a:latin typeface="Calibri" pitchFamily="34" charset="0"/>
                 <a:ea typeface="Calibri" pitchFamily="34" charset="-122"/>
@@ -9502,7 +9580,7 @@
     <p:bg>
       <p:bgPr>
         <a:solidFill>
-          <a:srgbClr val="1E2761"/>
+          <a:srgbClr val="212121"/>
         </a:solidFill>
         <a:effectLst/>
       </p:bgPr>
@@ -9593,7 +9671,7 @@
             <a:avLst/>
           </a:prstGeom>
           <a:solidFill>
-            <a:srgbClr val="3A7BD5"/>
+            <a:srgbClr val="E8963E"/>
           </a:solidFill>
           <a:ln/>
         </p:spPr>
@@ -9725,7 +9803,7 @@
             <a:r>
               <a:rPr lang="en-US" sz="1200" dirty="0">
                 <a:solidFill>
-                  <a:srgbClr val="CADCFC"/>
+                  <a:srgbClr val="C8CDD0"/>
                 </a:solidFill>
                 <a:latin typeface="Calibri" pitchFamily="34" charset="0"/>
                 <a:ea typeface="Calibri" pitchFamily="34" charset="-122"/>
@@ -9758,7 +9836,7 @@
             <a:avLst/>
           </a:prstGeom>
           <a:solidFill>
-            <a:srgbClr val="3A7BD5"/>
+            <a:srgbClr val="E8963E"/>
           </a:solidFill>
           <a:ln/>
         </p:spPr>
@@ -9893,7 +9971,7 @@
             <a:r>
               <a:rPr lang="en-US" sz="1200" dirty="0">
                 <a:solidFill>
-                  <a:srgbClr val="CADCFC"/>
+                  <a:srgbClr val="C8CDD0"/>
                 </a:solidFill>
                 <a:latin typeface="Calibri" pitchFamily="34" charset="0"/>
                 <a:ea typeface="Calibri" pitchFamily="34" charset="-122"/>
@@ -9938,7 +10016,7 @@
             <a:r>
               <a:rPr lang="en-US" sz="1100" dirty="0">
                 <a:solidFill>
-                  <a:srgbClr val="556688"/>
+                  <a:srgbClr val="7A8084"/>
                 </a:solidFill>
                 <a:latin typeface="Calibri" pitchFamily="34" charset="0"/>
                 <a:ea typeface="Calibri" pitchFamily="34" charset="-122"/>
@@ -9969,7 +10047,7 @@
     <p:bg>
       <p:bgPr>
         <a:solidFill>
-          <a:srgbClr val="1E2761"/>
+          <a:srgbClr val="212121"/>
         </a:solidFill>
         <a:effectLst/>
       </p:bgPr>
@@ -10060,7 +10138,7 @@
             <a:avLst/>
           </a:prstGeom>
           <a:solidFill>
-            <a:srgbClr val="3A7BD5"/>
+            <a:srgbClr val="E8963E"/>
           </a:solidFill>
           <a:ln/>
         </p:spPr>
@@ -10195,7 +10273,7 @@
             <a:r>
               <a:rPr lang="en-US" sz="1200" dirty="0">
                 <a:solidFill>
-                  <a:srgbClr val="CADCFC"/>
+                  <a:srgbClr val="C8CDD0"/>
                 </a:solidFill>
                 <a:latin typeface="Calibri" pitchFamily="34" charset="0"/>
                 <a:ea typeface="Calibri" pitchFamily="34" charset="-122"/>
@@ -10228,7 +10306,7 @@
             <a:avLst/>
           </a:prstGeom>
           <a:solidFill>
-            <a:srgbClr val="3A7BD5"/>
+            <a:srgbClr val="E8963E"/>
           </a:solidFill>
           <a:ln/>
         </p:spPr>
@@ -10363,7 +10441,7 @@
             <a:r>
               <a:rPr lang="en-US" sz="1200" dirty="0">
                 <a:solidFill>
-                  <a:srgbClr val="CADCFC"/>
+                  <a:srgbClr val="C8CDD0"/>
                 </a:solidFill>
                 <a:latin typeface="Calibri" pitchFamily="34" charset="0"/>
                 <a:ea typeface="Calibri" pitchFamily="34" charset="-122"/>
@@ -10396,7 +10474,7 @@
             <a:avLst/>
           </a:prstGeom>
           <a:solidFill>
-            <a:srgbClr val="3A7BD5"/>
+            <a:srgbClr val="E8963E"/>
           </a:solidFill>
           <a:ln/>
         </p:spPr>
@@ -10531,7 +10609,7 @@
             <a:r>
               <a:rPr lang="en-US" sz="1200" dirty="0">
                 <a:solidFill>
-                  <a:srgbClr val="CADCFC"/>
+                  <a:srgbClr val="C8CDD0"/>
                 </a:solidFill>
                 <a:latin typeface="Calibri" pitchFamily="34" charset="0"/>
                 <a:ea typeface="Calibri" pitchFamily="34" charset="-122"/>
@@ -10576,7 +10654,7 @@
             <a:r>
               <a:rPr lang="en-US" sz="1100" dirty="0">
                 <a:solidFill>
-                  <a:srgbClr val="556688"/>
+                  <a:srgbClr val="7A8084"/>
                 </a:solidFill>
                 <a:latin typeface="Calibri" pitchFamily="34" charset="0"/>
                 <a:ea typeface="Calibri" pitchFamily="34" charset="-122"/>
@@ -10607,7 +10685,7 @@
     <p:bg>
       <p:bgPr>
         <a:solidFill>
-          <a:srgbClr val="1E2761"/>
+          <a:srgbClr val="212121"/>
         </a:solidFill>
         <a:effectLst/>
       </p:bgPr>
@@ -10698,7 +10776,7 @@
             <a:avLst/>
           </a:prstGeom>
           <a:solidFill>
-            <a:srgbClr val="3A7BD5"/>
+            <a:srgbClr val="E8963E"/>
           </a:solidFill>
           <a:ln/>
         </p:spPr>
@@ -10833,7 +10911,7 @@
             <a:r>
               <a:rPr lang="en-US" sz="1200" dirty="0">
                 <a:solidFill>
-                  <a:srgbClr val="CADCFC"/>
+                  <a:srgbClr val="C8CDD0"/>
                 </a:solidFill>
                 <a:latin typeface="Calibri" pitchFamily="34" charset="0"/>
                 <a:ea typeface="Calibri" pitchFamily="34" charset="-122"/>
@@ -10866,7 +10944,7 @@
             <a:avLst/>
           </a:prstGeom>
           <a:solidFill>
-            <a:srgbClr val="3A7BD5"/>
+            <a:srgbClr val="E8963E"/>
           </a:solidFill>
           <a:ln/>
         </p:spPr>
@@ -11001,7 +11079,7 @@
             <a:r>
               <a:rPr lang="en-US" sz="1200" dirty="0">
                 <a:solidFill>
-                  <a:srgbClr val="CADCFC"/>
+                  <a:srgbClr val="C8CDD0"/>
                 </a:solidFill>
                 <a:latin typeface="Calibri" pitchFamily="34" charset="0"/>
                 <a:ea typeface="Calibri" pitchFamily="34" charset="-122"/>
@@ -11034,7 +11112,7 @@
             <a:avLst/>
           </a:prstGeom>
           <a:solidFill>
-            <a:srgbClr val="3A7BD5"/>
+            <a:srgbClr val="E8963E"/>
           </a:solidFill>
           <a:ln/>
         </p:spPr>
@@ -11166,7 +11244,7 @@
             <a:r>
               <a:rPr lang="en-US" sz="1200" dirty="0">
                 <a:solidFill>
-                  <a:srgbClr val="CADCFC"/>
+                  <a:srgbClr val="C8CDD0"/>
                 </a:solidFill>
                 <a:latin typeface="Calibri" pitchFamily="34" charset="0"/>
                 <a:ea typeface="Calibri" pitchFamily="34" charset="-122"/>
@@ -11199,7 +11277,7 @@
             <a:avLst/>
           </a:prstGeom>
           <a:solidFill>
-            <a:srgbClr val="3A7BD5"/>
+            <a:srgbClr val="E8963E"/>
           </a:solidFill>
           <a:ln/>
         </p:spPr>
@@ -11334,7 +11412,7 @@
             <a:r>
               <a:rPr lang="en-US" sz="1200" dirty="0">
                 <a:solidFill>
-                  <a:srgbClr val="CADCFC"/>
+                  <a:srgbClr val="C8CDD0"/>
                 </a:solidFill>
                 <a:latin typeface="Calibri" pitchFamily="34" charset="0"/>
                 <a:ea typeface="Calibri" pitchFamily="34" charset="-122"/>
@@ -11379,7 +11457,7 @@
             <a:r>
               <a:rPr lang="en-US" sz="1100" dirty="0">
                 <a:solidFill>
-                  <a:srgbClr val="556688"/>
+                  <a:srgbClr val="7A8084"/>
                 </a:solidFill>
                 <a:latin typeface="Calibri" pitchFamily="34" charset="0"/>
                 <a:ea typeface="Calibri" pitchFamily="34" charset="-122"/>
@@ -11407,6 +11485,12 @@
 <file path=ppt/slides/slide23.xml><?xml version="1.0" encoding="utf-8"?>
 <p:sld xmlns:a="http://schemas.openxmlformats.org/drawingml/2006/main" xmlns:r="http://schemas.openxmlformats.org/officeDocument/2006/relationships" xmlns:p="http://schemas.openxmlformats.org/presentationml/2006/main">
   <p:cSld>
+    <p:bg>
+      <p:bgPr>
+        <a:noFill/>
+        <a:effectLst/>
+      </p:bgPr>
+    </p:bg>
     <p:spTree>
       <p:nvGrpSpPr>
         <p:cNvPr id="1" name=""/>
@@ -11436,6 +11520,7 @@
             <a:avLst/>
           </a:prstGeom>
           <a:noFill/>
+          <a:ln/>
         </p:spPr>
         <p:txBody>
           <a:bodyPr wrap="square" anchor="t">
@@ -11446,12 +11531,15 @@
             <a:pPr algn="l">
               <a:defRPr sz="2800" b="1" i="0">
                 <a:solidFill>
-                  <a:srgbClr val="1E2761"/>
+                  <a:srgbClr val="36454F"/>
                 </a:solidFill>
                 <a:latin typeface="Georgia"/>
               </a:defRPr>
             </a:pPr>
             <a:r>
+              <a:rPr>
+                <a:solidFill/>
+              </a:rPr>
               <a:t>Future Work</a:t>
             </a:r>
           </a:p>
@@ -11472,10 +11560,10 @@
             <a:avLst/>
           </a:prstGeom>
           <a:solidFill>
-            <a:srgbClr val="3A7BD5"/>
+            <a:srgbClr val="E8963E"/>
           </a:solidFill>
           <a:ln>
-            <a:noFill/>
+            <a:solidFill/>
           </a:ln>
         </p:spPr>
         <p:style>
@@ -11505,6 +11593,9 @@
               </a:defRPr>
             </a:pPr>
             <a:r>
+              <a:rPr>
+                <a:solidFill/>
+              </a:rPr>
               <a:t>1</a:t>
             </a:r>
           </a:p>
@@ -11525,6 +11616,7 @@
             <a:avLst/>
           </a:prstGeom>
           <a:noFill/>
+          <a:ln/>
         </p:spPr>
         <p:txBody>
           <a:bodyPr wrap="square" anchor="t">
@@ -11535,12 +11627,15 @@
             <a:pPr algn="l">
               <a:defRPr sz="1600" b="1" i="0">
                 <a:solidFill>
-                  <a:srgbClr val="1E2761"/>
+                  <a:srgbClr val="36454F"/>
                 </a:solidFill>
                 <a:latin typeface="Calibri"/>
               </a:defRPr>
             </a:pPr>
             <a:r>
+              <a:rPr>
+                <a:solidFill/>
+              </a:rPr>
               <a:t>Do cross-disciplinary citations produce lasting impact?</a:t>
             </a:r>
           </a:p>
@@ -11561,6 +11656,7 @@
             <a:avLst/>
           </a:prstGeom>
           <a:noFill/>
+          <a:ln/>
         </p:spPr>
         <p:txBody>
           <a:bodyPr wrap="square" anchor="t">
@@ -11571,12 +11667,15 @@
             <a:pPr algn="l">
               <a:defRPr sz="1200" b="0" i="0">
                 <a:solidFill>
-                  <a:srgbClr val="1E2761"/>
+                  <a:srgbClr val="36454F"/>
                 </a:solidFill>
                 <a:latin typeface="Calibri"/>
               </a:defRPr>
             </a:pPr>
             <a:r>
+              <a:rPr>
+                <a:solidFill/>
+              </a:rPr>
               <a:t>Track forward citations, disruption indices (CD₅), and knowledge persistence of AI-era papers over 3–5 years. Tests whether the entropy increase we document translates into genuine knowledge integration or superficial breadth — directly engaging Hao et al.’s knowledge contraction and Kusumegi et al.’s quality decline findings.</a:t>
             </a:r>
           </a:p>
@@ -11597,10 +11696,10 @@
             <a:avLst/>
           </a:prstGeom>
           <a:solidFill>
-            <a:srgbClr val="3A7BD5"/>
+            <a:srgbClr val="E8963E"/>
           </a:solidFill>
           <a:ln>
-            <a:noFill/>
+            <a:solidFill/>
           </a:ln>
         </p:spPr>
         <p:style>
@@ -11630,7 +11729,9 @@
               </a:defRPr>
             </a:pPr>
             <a:r>
-              <a:rPr lang="en-US" dirty="0"/>
+              <a:rPr lang="en-US" dirty="0">
+                <a:solidFill/>
+              </a:rPr>
               <a:t>2</a:t>
             </a:r>
             <a:endParaRPr dirty="0"/>
@@ -11652,6 +11753,7 @@
             <a:avLst/>
           </a:prstGeom>
           <a:noFill/>
+          <a:ln/>
         </p:spPr>
         <p:txBody>
           <a:bodyPr wrap="square" anchor="t">
@@ -11662,12 +11764,15 @@
             <a:pPr algn="l">
               <a:defRPr sz="1600" b="1" i="0">
                 <a:solidFill>
-                  <a:srgbClr val="1E2761"/>
+                  <a:srgbClr val="36454F"/>
                 </a:solidFill>
                 <a:latin typeface="Calibri"/>
               </a:defRPr>
             </a:pPr>
             <a:r>
+              <a:rPr>
+                <a:solidFill/>
+              </a:rPr>
               <a:t>Disentangle the mechanism</a:t>
             </a:r>
           </a:p>
@@ -11688,6 +11793,7 @@
             <a:avLst/>
           </a:prstGeom>
           <a:noFill/>
+          <a:ln/>
         </p:spPr>
         <p:txBody>
           <a:bodyPr wrap="square" anchor="t">
@@ -11698,21 +11804,27 @@
             <a:pPr algn="l">
               <a:defRPr sz="1200" b="0" i="0">
                 <a:solidFill>
-                  <a:srgbClr val="1E2761"/>
+                  <a:srgbClr val="36454F"/>
                 </a:solidFill>
                 <a:latin typeface="Calibri"/>
               </a:defRPr>
             </a:pPr>
             <a:r>
-              <a:rPr dirty="0"/>
+              <a:rPr dirty="0">
+                <a:solidFill/>
+              </a:rPr>
               <a:t>Are researchers discovering new literatures through LLM suggestions (</a:t>
             </a:r>
             <a:r>
-              <a:rPr dirty="0" err="1"/>
+              <a:rPr dirty="0" err="1">
+                <a:solidFill/>
+              </a:rPr>
               <a:t>Algaba’s</a:t>
             </a:r>
             <a:r>
-              <a:rPr dirty="0"/>
+              <a:rPr dirty="0">
+                <a:solidFill/>
+              </a:rPr>
               <a:t> channel), or does LLM-assisted writing lower the cost of integrating sources they already knew about? Experimental or survey-based designs could separate these pathways.</a:t>
             </a:r>
           </a:p>
@@ -11729,6 +11841,12 @@
 <file path=ppt/slides/slide24.xml><?xml version="1.0" encoding="utf-8"?>
 <p:sld xmlns:a="http://schemas.openxmlformats.org/drawingml/2006/main" xmlns:r="http://schemas.openxmlformats.org/officeDocument/2006/relationships" xmlns:p="http://schemas.openxmlformats.org/presentationml/2006/main">
   <p:cSld>
+    <p:bg>
+      <p:bgPr>
+        <a:noFill/>
+        <a:effectLst/>
+      </p:bgPr>
+    </p:bg>
     <p:spTree>
       <p:nvGrpSpPr>
         <p:cNvPr id="1" name="">
@@ -11770,6 +11888,7 @@
             <a:avLst/>
           </a:prstGeom>
           <a:noFill/>
+          <a:ln/>
         </p:spPr>
         <p:txBody>
           <a:bodyPr wrap="square" anchor="t">
@@ -11780,12 +11899,15 @@
             <a:pPr algn="l">
               <a:defRPr sz="2800" b="1" i="0">
                 <a:solidFill>
-                  <a:srgbClr val="1E2761"/>
+                  <a:srgbClr val="36454F"/>
                 </a:solidFill>
                 <a:latin typeface="Georgia"/>
               </a:defRPr>
             </a:pPr>
             <a:r>
+              <a:rPr>
+                <a:solidFill/>
+              </a:rPr>
               <a:t>Future Work</a:t>
             </a:r>
           </a:p>
@@ -11812,10 +11934,10 @@
             <a:avLst/>
           </a:prstGeom>
           <a:solidFill>
-            <a:srgbClr val="3A7BD5"/>
+            <a:srgbClr val="E8963E"/>
           </a:solidFill>
           <a:ln>
-            <a:noFill/>
+            <a:solidFill/>
           </a:ln>
         </p:spPr>
         <p:style>
@@ -11845,6 +11967,9 @@
               </a:defRPr>
             </a:pPr>
             <a:r>
+              <a:rPr>
+                <a:solidFill/>
+              </a:rPr>
               <a:t>1</a:t>
             </a:r>
           </a:p>
@@ -11871,6 +11996,7 @@
             <a:avLst/>
           </a:prstGeom>
           <a:noFill/>
+          <a:ln/>
         </p:spPr>
         <p:txBody>
           <a:bodyPr wrap="square" anchor="t">
@@ -11881,12 +12007,15 @@
             <a:pPr algn="l">
               <a:defRPr sz="1600" b="1" i="0">
                 <a:solidFill>
-                  <a:srgbClr val="1E2761"/>
+                  <a:srgbClr val="36454F"/>
                 </a:solidFill>
                 <a:latin typeface="Calibri"/>
               </a:defRPr>
             </a:pPr>
             <a:r>
+              <a:rPr>
+                <a:solidFill/>
+              </a:rPr>
               <a:t>Do cross-disciplinary citations produce lasting impact?</a:t>
             </a:r>
           </a:p>
@@ -11913,6 +12042,7 @@
             <a:avLst/>
           </a:prstGeom>
           <a:noFill/>
+          <a:ln/>
         </p:spPr>
         <p:txBody>
           <a:bodyPr wrap="square" anchor="t">
@@ -11923,12 +12053,15 @@
             <a:pPr algn="l">
               <a:defRPr sz="1200" b="0" i="0">
                 <a:solidFill>
-                  <a:srgbClr val="1E2761"/>
+                  <a:srgbClr val="36454F"/>
                 </a:solidFill>
                 <a:latin typeface="Calibri"/>
               </a:defRPr>
             </a:pPr>
             <a:r>
+              <a:rPr>
+                <a:solidFill/>
+              </a:rPr>
               <a:t>Track forward citations, disruption indices (CD₅), and knowledge persistence of AI-era papers over 3–5 years. Tests whether the entropy increase we document translates into genuine knowledge integration or superficial breadth — directly engaging Hao et al.’s knowledge contraction and Kusumegi et al.’s quality decline findings.</a:t>
             </a:r>
           </a:p>
@@ -11955,10 +12088,10 @@
             <a:avLst/>
           </a:prstGeom>
           <a:solidFill>
-            <a:srgbClr val="3A7BD5"/>
+            <a:srgbClr val="E8963E"/>
           </a:solidFill>
           <a:ln>
-            <a:noFill/>
+            <a:solidFill/>
           </a:ln>
         </p:spPr>
         <p:style>
@@ -11988,7 +12121,9 @@
               </a:defRPr>
             </a:pPr>
             <a:r>
-              <a:rPr lang="en-US" dirty="0"/>
+              <a:rPr lang="en-US" dirty="0">
+                <a:solidFill/>
+              </a:rPr>
               <a:t>2</a:t>
             </a:r>
             <a:endParaRPr dirty="0"/>
@@ -12016,6 +12151,7 @@
             <a:avLst/>
           </a:prstGeom>
           <a:noFill/>
+          <a:ln/>
         </p:spPr>
         <p:txBody>
           <a:bodyPr wrap="square" anchor="t">
@@ -12026,12 +12162,15 @@
             <a:pPr algn="l">
               <a:defRPr sz="1600" b="1" i="0">
                 <a:solidFill>
-                  <a:srgbClr val="1E2761"/>
+                  <a:srgbClr val="36454F"/>
                 </a:solidFill>
                 <a:latin typeface="Calibri"/>
               </a:defRPr>
             </a:pPr>
             <a:r>
+              <a:rPr>
+                <a:solidFill/>
+              </a:rPr>
               <a:t>Disentangle the mechanism</a:t>
             </a:r>
           </a:p>
@@ -12058,6 +12197,7 @@
             <a:avLst/>
           </a:prstGeom>
           <a:noFill/>
+          <a:ln/>
         </p:spPr>
         <p:txBody>
           <a:bodyPr wrap="square" anchor="t">
@@ -12068,21 +12208,27 @@
             <a:pPr algn="l">
               <a:defRPr sz="1200" b="0" i="0">
                 <a:solidFill>
-                  <a:srgbClr val="1E2761"/>
+                  <a:srgbClr val="36454F"/>
                 </a:solidFill>
                 <a:latin typeface="Calibri"/>
               </a:defRPr>
             </a:pPr>
             <a:r>
-              <a:rPr dirty="0"/>
+              <a:rPr dirty="0">
+                <a:solidFill/>
+              </a:rPr>
               <a:t>Are researchers discovering new literatures through LLM suggestions (</a:t>
             </a:r>
             <a:r>
-              <a:rPr dirty="0" err="1"/>
+              <a:rPr dirty="0" err="1">
+                <a:solidFill/>
+              </a:rPr>
               <a:t>Algaba’s</a:t>
             </a:r>
             <a:r>
-              <a:rPr dirty="0"/>
+              <a:rPr dirty="0">
+                <a:solidFill/>
+              </a:rPr>
               <a:t> channel), or does LLM-assisted writing lower the cost of integrating sources they already knew about? Experimental or survey-based designs could separate these pathways.</a:t>
             </a:r>
           </a:p>
@@ -12104,6 +12250,12 @@
 <file path=ppt/slides/slide25.xml><?xml version="1.0" encoding="utf-8"?>
 <p:sld xmlns:a="http://schemas.openxmlformats.org/drawingml/2006/main" xmlns:r="http://schemas.openxmlformats.org/officeDocument/2006/relationships" xmlns:p="http://schemas.openxmlformats.org/presentationml/2006/main">
   <p:cSld>
+    <p:bg>
+      <p:bgPr>
+        <a:noFill/>
+        <a:effectLst/>
+      </p:bgPr>
+    </p:bg>
     <p:spTree>
       <p:nvGrpSpPr>
         <p:cNvPr id="1" name="">
@@ -12145,6 +12297,7 @@
             <a:avLst/>
           </a:prstGeom>
           <a:noFill/>
+          <a:ln/>
         </p:spPr>
         <p:txBody>
           <a:bodyPr wrap="square" anchor="t">
@@ -12155,13 +12308,15 @@
             <a:pPr algn="l">
               <a:defRPr sz="2800" b="1" i="0">
                 <a:solidFill>
-                  <a:srgbClr val="1E2761"/>
+                  <a:srgbClr val="36454F"/>
                 </a:solidFill>
                 <a:latin typeface="Georgia"/>
               </a:defRPr>
             </a:pPr>
             <a:r>
-              <a:rPr lang="en-US" dirty="0"/>
+              <a:rPr lang="en-US" dirty="0">
+                <a:solidFill/>
+              </a:rPr>
               <a:t>Policy Implications</a:t>
             </a:r>
             <a:endParaRPr dirty="0"/>
@@ -12184,6 +12339,12 @@
 <file path=ppt/slides/slide3.xml><?xml version="1.0" encoding="utf-8"?>
 <p:sld xmlns:a="http://schemas.openxmlformats.org/drawingml/2006/main" xmlns:r="http://schemas.openxmlformats.org/officeDocument/2006/relationships" xmlns:p="http://schemas.openxmlformats.org/presentationml/2006/main">
   <p:cSld>
+    <p:bg>
+      <p:bgPr>
+        <a:noFill/>
+        <a:effectLst/>
+      </p:bgPr>
+    </p:bg>
     <p:spTree>
       <p:nvGrpSpPr>
         <p:cNvPr id="1" name=""/>
@@ -12225,7 +12386,7 @@
             <a:r>
               <a:rPr lang="en-US" sz="2800" b="1" dirty="0">
                 <a:solidFill>
-                  <a:srgbClr val="1E2761"/>
+                  <a:srgbClr val="36454F"/>
                 </a:solidFill>
                 <a:latin typeface="Georgia" pitchFamily="34" charset="0"/>
                 <a:ea typeface="Georgia" pitchFamily="34" charset="-122"/>
@@ -12298,7 +12459,7 @@
             <a:r>
               <a:rPr lang="en-US" sz="1300" b="1" dirty="0">
                 <a:solidFill>
-                  <a:srgbClr val="1E2761"/>
+                  <a:srgbClr val="36454F"/>
                 </a:solidFill>
                 <a:latin typeface="Calibri" pitchFamily="34" charset="0"/>
                 <a:ea typeface="Calibri" pitchFamily="34" charset="-122"/>
@@ -12337,7 +12498,7 @@
             <a:r>
               <a:rPr lang="en-US" sz="1100" b="1" dirty="0">
                 <a:solidFill>
-                  <a:srgbClr val="3A7BD5"/>
+                  <a:srgbClr val="E8963E"/>
                 </a:solidFill>
                 <a:latin typeface="Calibri" pitchFamily="34" charset="0"/>
                 <a:ea typeface="Calibri" pitchFamily="34" charset="-122"/>
@@ -12376,7 +12537,7 @@
             <a:r>
               <a:rPr lang="en-US" sz="1100" dirty="0">
                 <a:solidFill>
-                  <a:srgbClr val="1E2761"/>
+                  <a:srgbClr val="36454F"/>
                 </a:solidFill>
                 <a:latin typeface="Calibri" pitchFamily="34" charset="0"/>
                 <a:ea typeface="Calibri" pitchFamily="34" charset="-122"/>
@@ -12449,7 +12610,7 @@
             <a:r>
               <a:rPr lang="en-US" sz="1300" b="1" dirty="0">
                 <a:solidFill>
-                  <a:srgbClr val="1E2761"/>
+                  <a:srgbClr val="36454F"/>
                 </a:solidFill>
                 <a:latin typeface="Calibri" pitchFamily="34" charset="0"/>
                 <a:ea typeface="Calibri" pitchFamily="34" charset="-122"/>
@@ -12488,7 +12649,7 @@
             <a:r>
               <a:rPr lang="en-US" sz="1100" b="1" dirty="0">
                 <a:solidFill>
-                  <a:srgbClr val="3A7BD5"/>
+                  <a:srgbClr val="E8963E"/>
                 </a:solidFill>
                 <a:latin typeface="Calibri" pitchFamily="34" charset="0"/>
                 <a:ea typeface="Calibri" pitchFamily="34" charset="-122"/>
@@ -12527,7 +12688,7 @@
             <a:r>
               <a:rPr lang="en-US" sz="1100" dirty="0">
                 <a:solidFill>
-                  <a:srgbClr val="1E2761"/>
+                  <a:srgbClr val="36454F"/>
                 </a:solidFill>
                 <a:latin typeface="Calibri" pitchFamily="34" charset="0"/>
                 <a:ea typeface="Calibri" pitchFamily="34" charset="-122"/>
@@ -12550,6 +12711,12 @@
 <file path=ppt/slides/slide4.xml><?xml version="1.0" encoding="utf-8"?>
 <p:sld xmlns:a="http://schemas.openxmlformats.org/drawingml/2006/main" xmlns:r="http://schemas.openxmlformats.org/officeDocument/2006/relationships" xmlns:p="http://schemas.openxmlformats.org/presentationml/2006/main">
   <p:cSld>
+    <p:bg>
+      <p:bgPr>
+        <a:noFill/>
+        <a:effectLst/>
+      </p:bgPr>
+    </p:bg>
     <p:spTree>
       <p:nvGrpSpPr>
         <p:cNvPr id="1" name="">
@@ -12603,7 +12770,7 @@
             <a:r>
               <a:rPr lang="en-US" sz="2800" b="1" dirty="0">
                 <a:solidFill>
-                  <a:srgbClr val="1E2761"/>
+                  <a:srgbClr val="36454F"/>
                 </a:solidFill>
                 <a:latin typeface="Georgia" pitchFamily="34" charset="0"/>
                 <a:ea typeface="Georgia" pitchFamily="34" charset="-122"/>
@@ -12688,7 +12855,7 @@
             <a:r>
               <a:rPr lang="en-US" sz="1300" b="1" dirty="0">
                 <a:solidFill>
-                  <a:srgbClr val="1E2761"/>
+                  <a:srgbClr val="36454F"/>
                 </a:solidFill>
                 <a:latin typeface="Calibri" pitchFamily="34" charset="0"/>
                 <a:ea typeface="Calibri" pitchFamily="34" charset="-122"/>
@@ -12733,7 +12900,7 @@
             <a:r>
               <a:rPr lang="en-US" sz="1100" b="1" dirty="0">
                 <a:solidFill>
-                  <a:srgbClr val="3A7BD5"/>
+                  <a:srgbClr val="E8963E"/>
                 </a:solidFill>
                 <a:latin typeface="Calibri" pitchFamily="34" charset="0"/>
                 <a:ea typeface="Calibri" pitchFamily="34" charset="-122"/>
@@ -12778,7 +12945,7 @@
             <a:r>
               <a:rPr lang="en-US" sz="1100" dirty="0">
                 <a:solidFill>
-                  <a:srgbClr val="1E2761"/>
+                  <a:srgbClr val="36454F"/>
                 </a:solidFill>
                 <a:latin typeface="Calibri" pitchFamily="34" charset="0"/>
                 <a:ea typeface="Calibri" pitchFamily="34" charset="-122"/>
@@ -12863,7 +13030,7 @@
             <a:r>
               <a:rPr lang="en-US" sz="1300" b="1" dirty="0">
                 <a:solidFill>
-                  <a:srgbClr val="1E2761"/>
+                  <a:srgbClr val="36454F"/>
                 </a:solidFill>
                 <a:latin typeface="Calibri" pitchFamily="34" charset="0"/>
                 <a:ea typeface="Calibri" pitchFamily="34" charset="-122"/>
@@ -12908,7 +13075,7 @@
             <a:r>
               <a:rPr lang="en-US" sz="1100" b="1" dirty="0">
                 <a:solidFill>
-                  <a:srgbClr val="3A7BD5"/>
+                  <a:srgbClr val="E8963E"/>
                 </a:solidFill>
                 <a:latin typeface="Calibri" pitchFamily="34" charset="0"/>
                 <a:ea typeface="Calibri" pitchFamily="34" charset="-122"/>
@@ -12953,7 +13120,7 @@
             <a:r>
               <a:rPr lang="en-US" sz="1100" dirty="0">
                 <a:solidFill>
-                  <a:srgbClr val="1E2761"/>
+                  <a:srgbClr val="36454F"/>
                 </a:solidFill>
                 <a:latin typeface="Calibri" pitchFamily="34" charset="0"/>
                 <a:ea typeface="Calibri" pitchFamily="34" charset="-122"/>
@@ -13038,7 +13205,7 @@
             <a:r>
               <a:rPr lang="en-US" sz="1300" b="1" dirty="0">
                 <a:solidFill>
-                  <a:srgbClr val="1E2761"/>
+                  <a:srgbClr val="36454F"/>
                 </a:solidFill>
                 <a:latin typeface="Calibri" pitchFamily="34" charset="0"/>
                 <a:ea typeface="Calibri" pitchFamily="34" charset="-122"/>
@@ -13083,7 +13250,7 @@
             <a:r>
               <a:rPr lang="en-US" sz="1100" b="1" dirty="0">
                 <a:solidFill>
-                  <a:srgbClr val="3A7BD5"/>
+                  <a:srgbClr val="E8963E"/>
                 </a:solidFill>
                 <a:latin typeface="Calibri" pitchFamily="34" charset="0"/>
                 <a:ea typeface="Calibri" pitchFamily="34" charset="-122"/>
@@ -13128,7 +13295,7 @@
             <a:r>
               <a:rPr lang="en-US" sz="1100" dirty="0">
                 <a:solidFill>
-                  <a:srgbClr val="1E2761"/>
+                  <a:srgbClr val="36454F"/>
                 </a:solidFill>
                 <a:latin typeface="Calibri" pitchFamily="34" charset="0"/>
                 <a:ea typeface="Calibri" pitchFamily="34" charset="-122"/>
@@ -13161,7 +13328,7 @@
             <a:avLst/>
           </a:prstGeom>
           <a:solidFill>
-            <a:srgbClr val="1E2761"/>
+            <a:srgbClr val="36454F"/>
           </a:solidFill>
           <a:ln/>
         </p:spPr>
@@ -13212,7 +13379,7 @@
                 <a:ea typeface="Calibri" pitchFamily="34" charset="-122"/>
                 <a:cs typeface="Calibri" pitchFamily="34" charset="-120"/>
               </a:rPr>
-              <a:t>Our contribution: causal identification of how LLM availability affects cross-field citation entropy using continuous treatment intensity</a:t>
+              <a:t>Our contribution: causal identification of how LLM adoption affects cross-field citation entropy using continuous treatment intensity</a:t>
             </a:r>
             <a:endParaRPr lang="en-US" sz="1200" dirty="0"/>
           </a:p>
@@ -13234,6 +13401,12 @@
 <file path=ppt/slides/slide5.xml><?xml version="1.0" encoding="utf-8"?>
 <p:sld xmlns:a="http://schemas.openxmlformats.org/drawingml/2006/main" xmlns:r="http://schemas.openxmlformats.org/officeDocument/2006/relationships" xmlns:p="http://schemas.openxmlformats.org/presentationml/2006/main">
   <p:cSld>
+    <p:bg>
+      <p:bgPr>
+        <a:noFill/>
+        <a:effectLst/>
+      </p:bgPr>
+    </p:bg>
     <p:spTree>
       <p:nvGrpSpPr>
         <p:cNvPr id="1" name="">
@@ -13287,7 +13460,7 @@
             <a:r>
               <a:rPr lang="en-US" sz="2800" b="1" dirty="0">
                 <a:solidFill>
-                  <a:srgbClr val="1E2761"/>
+                  <a:srgbClr val="36454F"/>
                 </a:solidFill>
                 <a:latin typeface="Georgia" pitchFamily="34" charset="0"/>
                 <a:ea typeface="Georgia" pitchFamily="34" charset="-122"/>
@@ -13372,7 +13545,7 @@
             <a:r>
               <a:rPr lang="en-US" sz="1300" b="1" dirty="0">
                 <a:solidFill>
-                  <a:srgbClr val="1E2761"/>
+                  <a:srgbClr val="36454F"/>
                 </a:solidFill>
                 <a:latin typeface="Calibri" pitchFamily="34" charset="0"/>
                 <a:ea typeface="Calibri" pitchFamily="34" charset="-122"/>
@@ -13417,7 +13590,7 @@
             <a:r>
               <a:rPr lang="en-US" sz="1100" b="1" dirty="0">
                 <a:solidFill>
-                  <a:srgbClr val="3A7BD5"/>
+                  <a:srgbClr val="E8963E"/>
                 </a:solidFill>
                 <a:latin typeface="Calibri" pitchFamily="34" charset="0"/>
                 <a:ea typeface="Calibri" pitchFamily="34" charset="-122"/>
@@ -13462,7 +13635,7 @@
             <a:r>
               <a:rPr lang="en-US" sz="1100" dirty="0">
                 <a:solidFill>
-                  <a:srgbClr val="1E2761"/>
+                  <a:srgbClr val="36454F"/>
                 </a:solidFill>
                 <a:latin typeface="Calibri" pitchFamily="34" charset="0"/>
                 <a:ea typeface="Calibri" pitchFamily="34" charset="-122"/>
@@ -13547,7 +13720,7 @@
             <a:r>
               <a:rPr lang="en-US" sz="1300" b="1" dirty="0">
                 <a:solidFill>
-                  <a:srgbClr val="1E2761"/>
+                  <a:srgbClr val="36454F"/>
                 </a:solidFill>
                 <a:latin typeface="Calibri" pitchFamily="34" charset="0"/>
                 <a:ea typeface="Calibri" pitchFamily="34" charset="-122"/>
@@ -13592,7 +13765,7 @@
             <a:r>
               <a:rPr lang="en-US" sz="1100" b="1" dirty="0">
                 <a:solidFill>
-                  <a:srgbClr val="3A7BD5"/>
+                  <a:srgbClr val="E8963E"/>
                 </a:solidFill>
                 <a:latin typeface="Calibri" pitchFamily="34" charset="0"/>
                 <a:ea typeface="Calibri" pitchFamily="34" charset="-122"/>
@@ -13637,7 +13810,7 @@
             <a:r>
               <a:rPr lang="en-US" sz="1100" dirty="0">
                 <a:solidFill>
-                  <a:srgbClr val="1E2761"/>
+                  <a:srgbClr val="36454F"/>
                 </a:solidFill>
                 <a:latin typeface="Calibri" pitchFamily="34" charset="0"/>
                 <a:ea typeface="Calibri" pitchFamily="34" charset="-122"/>
@@ -13722,7 +13895,7 @@
             <a:r>
               <a:rPr lang="en-US" sz="1300" b="1" dirty="0">
                 <a:solidFill>
-                  <a:srgbClr val="1E2761"/>
+                  <a:srgbClr val="36454F"/>
                 </a:solidFill>
                 <a:latin typeface="Calibri" pitchFamily="34" charset="0"/>
                 <a:ea typeface="Calibri" pitchFamily="34" charset="-122"/>
@@ -13767,7 +13940,7 @@
             <a:r>
               <a:rPr lang="en-US" sz="1100" b="1" dirty="0">
                 <a:solidFill>
-                  <a:srgbClr val="3A7BD5"/>
+                  <a:srgbClr val="E8963E"/>
                 </a:solidFill>
                 <a:latin typeface="Calibri" pitchFamily="34" charset="0"/>
                 <a:ea typeface="Calibri" pitchFamily="34" charset="-122"/>
@@ -13812,7 +13985,7 @@
             <a:r>
               <a:rPr lang="en-US" sz="1100" dirty="0">
                 <a:solidFill>
-                  <a:srgbClr val="1E2761"/>
+                  <a:srgbClr val="36454F"/>
                 </a:solidFill>
                 <a:latin typeface="Calibri" pitchFamily="34" charset="0"/>
                 <a:ea typeface="Calibri" pitchFamily="34" charset="-122"/>
@@ -13845,7 +14018,7 @@
             <a:avLst/>
           </a:prstGeom>
           <a:solidFill>
-            <a:srgbClr val="1E2761"/>
+            <a:srgbClr val="36454F"/>
           </a:solidFill>
           <a:ln/>
         </p:spPr>
@@ -13918,6 +14091,12 @@
 <file path=ppt/slides/slide6.xml><?xml version="1.0" encoding="utf-8"?>
 <p:sld xmlns:a="http://schemas.openxmlformats.org/drawingml/2006/main" xmlns:r="http://schemas.openxmlformats.org/officeDocument/2006/relationships" xmlns:p="http://schemas.openxmlformats.org/presentationml/2006/main">
   <p:cSld>
+    <p:bg>
+      <p:bgPr>
+        <a:noFill/>
+        <a:effectLst/>
+      </p:bgPr>
+    </p:bg>
     <p:spTree>
       <p:nvGrpSpPr>
         <p:cNvPr id="1" name="">
@@ -13971,7 +14150,7 @@
             <a:r>
               <a:rPr lang="en-US" sz="2800" b="1" dirty="0">
                 <a:solidFill>
-                  <a:srgbClr val="1E2761"/>
+                  <a:srgbClr val="36454F"/>
                 </a:solidFill>
                 <a:latin typeface="Georgia" pitchFamily="34" charset="0"/>
               </a:rPr>
@@ -14047,6 +14226,7 @@
             <a:avLst/>
           </a:prstGeom>
           <a:noFill/>
+          <a:ln/>
         </p:spPr>
         <p:txBody>
           <a:bodyPr wrap="square" rtlCol="0">
@@ -14055,7 +14235,9 @@
           <a:lstStyle/>
           <a:p>
             <a:r>
-              <a:rPr lang="en-US" dirty="0"/>
+              <a:rPr lang="en-US" dirty="0">
+                <a:solidFill/>
+              </a:rPr>
               <a:t>First model release where frontier lab multimodal model access was available to any researcher for free.</a:t>
             </a:r>
           </a:p>
@@ -14064,7 +14246,9 @@
           </a:p>
           <a:p>
             <a:r>
-              <a:rPr lang="en-US" dirty="0"/>
+              <a:rPr lang="en-US" dirty="0">
+                <a:solidFill/>
+              </a:rPr>
               <a:t>Not the only model that fits these specifications but is a clean break in accessibility of high-quality models.</a:t>
             </a:r>
           </a:p>
@@ -14106,6 +14290,7 @@
             <a:avLst/>
           </a:prstGeom>
           <a:noFill/>
+          <a:ln/>
           <a:extLst>
             <a:ext uri="{909E8E84-426E-40DD-AFC4-6F175D3DCCD1}">
               <a14:hiddenFill xmlns:a14="http://schemas.microsoft.com/office/drawing/2010/main">
@@ -14136,7 +14321,7 @@
     <p:bg>
       <p:bgPr>
         <a:solidFill>
-          <a:srgbClr val="F4F6FA"/>
+          <a:srgbClr val="F2F2F2"/>
         </a:solidFill>
         <a:effectLst/>
       </p:bgPr>
@@ -14182,7 +14367,7 @@
             <a:r>
               <a:rPr lang="en-US" sz="2400" b="1" dirty="0">
                 <a:solidFill>
-                  <a:srgbClr val="1E2761"/>
+                  <a:srgbClr val="36454F"/>
                 </a:solidFill>
                 <a:latin typeface="Georgia" pitchFamily="34" charset="0"/>
                 <a:ea typeface="Georgia" pitchFamily="34" charset="-122"/>
@@ -14221,7 +14406,7 @@
             <a:r>
               <a:rPr lang="en-US" sz="1200" dirty="0">
                 <a:solidFill>
-                  <a:srgbClr val="556688"/>
+                  <a:srgbClr val="7A8084"/>
                 </a:solidFill>
                 <a:latin typeface="Calibri" pitchFamily="34" charset="0"/>
                 <a:ea typeface="Calibri" pitchFamily="34" charset="-122"/>
@@ -14261,6 +14446,7 @@
           <a:prstGeom prst="rect">
             <a:avLst/>
           </a:prstGeom>
+          <a:ln/>
         </p:spPr>
       </p:pic>
       <p:sp>
@@ -14284,6 +14470,7 @@
             <a:avLst/>
           </a:prstGeom>
           <a:noFill/>
+          <a:ln/>
         </p:spPr>
         <p:txBody>
           <a:bodyPr wrap="square" rtlCol="0">
@@ -14296,7 +14483,9 @@
               <a:buChar char="•"/>
             </a:pPr>
             <a:r>
-              <a:rPr lang="en-US" sz="1400" dirty="0"/>
+              <a:rPr lang="en-US" sz="1400" dirty="0">
+                <a:solidFill/>
+              </a:rPr>
               <a:t>Kobak measure examines frequency of style words commonly associated with LLMs</a:t>
             </a:r>
           </a:p>
@@ -14306,7 +14495,9 @@
               <a:buChar char="•"/>
             </a:pPr>
             <a:r>
-              <a:rPr lang="en-US" sz="1400" dirty="0"/>
+              <a:rPr lang="en-US" sz="1400" dirty="0">
+                <a:solidFill/>
+              </a:rPr>
               <a:t>We measure AI propensity by using (marker words per million 6 months after GPT 3.5 release – marker words per million before GPT 3.5 release)/(marker words per million before GPT 3.5 release)</a:t>
             </a:r>
           </a:p>
@@ -14326,7 +14517,7 @@
     <p:bg>
       <p:bgPr>
         <a:solidFill>
-          <a:srgbClr val="F4F6FA"/>
+          <a:srgbClr val="F2F2F2"/>
         </a:solidFill>
         <a:effectLst/>
       </p:bgPr>
@@ -14372,7 +14563,7 @@
             <a:r>
               <a:rPr lang="en-US" sz="2400" b="1" dirty="0">
                 <a:solidFill>
-                  <a:srgbClr val="1E2761"/>
+                  <a:srgbClr val="36454F"/>
                 </a:solidFill>
                 <a:latin typeface="Georgia" pitchFamily="34" charset="0"/>
                 <a:ea typeface="Georgia" pitchFamily="34" charset="-122"/>
@@ -14411,7 +14602,7 @@
             <a:r>
               <a:rPr lang="en-US" sz="1200" dirty="0">
                 <a:solidFill>
-                  <a:srgbClr val="556688"/>
+                  <a:srgbClr val="7A8084"/>
                 </a:solidFill>
                 <a:latin typeface="Calibri" pitchFamily="34" charset="0"/>
                 <a:ea typeface="Calibri" pitchFamily="34" charset="-122"/>
@@ -14451,6 +14642,7 @@
           <a:prstGeom prst="rect">
             <a:avLst/>
           </a:prstGeom>
+          <a:ln/>
         </p:spPr>
       </p:pic>
       <p:sp>
@@ -14474,6 +14666,7 @@
             <a:avLst/>
           </a:prstGeom>
           <a:noFill/>
+          <a:ln/>
         </p:spPr>
         <p:txBody>
           <a:bodyPr wrap="square" rtlCol="0">
@@ -14486,7 +14679,9 @@
               <a:buChar char="•"/>
             </a:pPr>
             <a:r>
-              <a:rPr lang="en-US" sz="1400" dirty="0"/>
+              <a:rPr lang="en-US" sz="1400" dirty="0">
+                <a:solidFill/>
+              </a:rPr>
               <a:t>All fields see an increase in LLM-associated words between the pre and post period.</a:t>
             </a:r>
           </a:p>
@@ -14496,7 +14691,9 @@
               <a:buChar char="•"/>
             </a:pPr>
             <a:r>
-              <a:rPr lang="en-US" sz="1400" dirty="0"/>
+              <a:rPr lang="en-US" sz="1400" dirty="0">
+                <a:solidFill/>
+              </a:rPr>
               <a:t>NB: we always delay our treatment impact measurement 6 months after a model release – this is due to the period of time it takes between paper submission and publication</a:t>
             </a:r>
           </a:p>
@@ -14513,6 +14710,12 @@
 <file path=ppt/slides/slide9.xml><?xml version="1.0" encoding="utf-8"?>
 <p:sld xmlns:a="http://schemas.openxmlformats.org/drawingml/2006/main" xmlns:r="http://schemas.openxmlformats.org/officeDocument/2006/relationships" xmlns:p="http://schemas.openxmlformats.org/presentationml/2006/main">
   <p:cSld>
+    <p:bg>
+      <p:bgPr>
+        <a:noFill/>
+        <a:effectLst/>
+      </p:bgPr>
+    </p:bg>
     <p:spTree>
       <p:nvGrpSpPr>
         <p:cNvPr id="1" name="">
@@ -14566,7 +14769,7 @@
             <a:r>
               <a:rPr lang="en-US" sz="2800" b="1" dirty="0">
                 <a:solidFill>
-                  <a:srgbClr val="1E2761"/>
+                  <a:srgbClr val="36454F"/>
                 </a:solidFill>
                 <a:latin typeface="Georgia" pitchFamily="34" charset="0"/>
               </a:rPr>
@@ -14591,6 +14794,7 @@
             <a:avLst/>
           </a:prstGeom>
           <a:noFill/>
+          <a:ln/>
         </p:spPr>
         <p:txBody>
           <a:bodyPr wrap="square">
@@ -14601,12 +14805,15 @@
             <a:pPr algn="l">
               <a:defRPr sz="1200" b="0" i="0">
                 <a:solidFill>
-                  <a:srgbClr val="556688"/>
+                  <a:srgbClr val="7A8084"/>
                 </a:solidFill>
                 <a:latin typeface="Calibri"/>
               </a:defRPr>
             </a:pPr>
             <a:r>
+              <a:rPr>
+                <a:solidFill/>
+              </a:rPr>
               <a:t>Diff-in-diff with continuous treatment intensity and monthly trend</a:t>
             </a:r>
           </a:p>
@@ -14629,10 +14836,10 @@
             </a:avLst>
           </a:prstGeom>
           <a:solidFill>
-            <a:srgbClr val="1E2761"/>
+            <a:srgbClr val="36454F"/>
           </a:solidFill>
           <a:ln>
-            <a:noFill/>
+            <a:solidFill/>
           </a:ln>
         </p:spPr>
         <p:style>
@@ -14654,6 +14861,7 @@
           <a:lstStyle/>
           <a:p>
             <a:pPr algn="ctr"/>
+            <a:endParaRPr/>
           </a:p>
         </p:txBody>
       </p:sp>
@@ -14672,6 +14880,7 @@
             <a:avLst/>
           </a:prstGeom>
           <a:noFill/>
+          <a:ln/>
         </p:spPr>
         <p:txBody>
           <a:bodyPr wrap="square" anchor="ctr">
@@ -14692,7 +14901,7 @@
             <a:r>
               <a:rPr sz="1400" b="0" i="1">
                 <a:solidFill>
-                  <a:srgbClr val="CADCFC"/>
+                  <a:srgbClr val="C8CDD0"/>
                 </a:solidFill>
                 <a:latin typeface="Calibri"/>
               </a:rPr>
@@ -14710,7 +14919,7 @@
             <a:r>
               <a:rPr sz="2000" b="1" i="0">
                 <a:solidFill>
-                  <a:srgbClr val="FFD700"/>
+                  <a:srgbClr val="FFB347"/>
                 </a:solidFill>
                 <a:latin typeface="Calibri"/>
               </a:rPr>
@@ -14728,7 +14937,7 @@
             <a:r>
               <a:rPr sz="1400" b="0" i="1">
                 <a:solidFill>
-                  <a:srgbClr val="CADCFC"/>
+                  <a:srgbClr val="C8CDD0"/>
                 </a:solidFill>
                 <a:latin typeface="Calibri"/>
               </a:rPr>
@@ -14746,7 +14955,7 @@
             <a:r>
               <a:rPr sz="1400" b="0" i="1">
                 <a:solidFill>
-                  <a:srgbClr val="CADCFC"/>
+                  <a:srgbClr val="C8CDD0"/>
                 </a:solidFill>
                 <a:latin typeface="Calibri"/>
               </a:rPr>
@@ -14764,7 +14973,7 @@
             <a:r>
               <a:rPr sz="2000" b="1" i="0">
                 <a:solidFill>
-                  <a:srgbClr val="FFD700"/>
+                  <a:srgbClr val="FFB347"/>
                 </a:solidFill>
                 <a:latin typeface="Calibri"/>
               </a:rPr>
@@ -14782,7 +14991,7 @@
             <a:r>
               <a:rPr sz="1400" b="0" i="1">
                 <a:solidFill>
-                  <a:srgbClr val="CADCFC"/>
+                  <a:srgbClr val="C8CDD0"/>
                 </a:solidFill>
                 <a:latin typeface="Calibri"/>
               </a:rPr>
@@ -14800,7 +15009,7 @@
             <a:r>
               <a:rPr sz="1400" b="0" i="1">
                 <a:solidFill>
-                  <a:srgbClr val="CADCFC"/>
+                  <a:srgbClr val="C8CDD0"/>
                 </a:solidFill>
                 <a:latin typeface="Calibri"/>
               </a:rPr>
@@ -14818,7 +15027,7 @@
             <a:r>
               <a:rPr sz="1400" b="0" i="1">
                 <a:solidFill>
-                  <a:srgbClr val="CADCFC"/>
+                  <a:srgbClr val="C8CDD0"/>
                 </a:solidFill>
                 <a:latin typeface="Calibri"/>
               </a:rPr>
@@ -14836,7 +15045,7 @@
             <a:r>
               <a:rPr sz="1400" b="0" i="1">
                 <a:solidFill>
-                  <a:srgbClr val="CADCFC"/>
+                  <a:srgbClr val="C8CDD0"/>
                 </a:solidFill>
                 <a:latin typeface="Calibri"/>
               </a:rPr>
@@ -14854,7 +15063,7 @@
             <a:r>
               <a:rPr sz="1400" b="0" i="1">
                 <a:solidFill>
-                  <a:srgbClr val="CADCFC"/>
+                  <a:srgbClr val="C8CDD0"/>
                 </a:solidFill>
                 <a:latin typeface="Calibri"/>
               </a:rPr>
@@ -14872,7 +15081,7 @@
             <a:r>
               <a:rPr sz="1400" b="0" i="1">
                 <a:solidFill>
-                  <a:srgbClr val="CADCFC"/>
+                  <a:srgbClr val="C8CDD0"/>
                 </a:solidFill>
                 <a:latin typeface="Calibri"/>
               </a:rPr>
@@ -14896,6 +15105,7 @@
             <a:avLst/>
           </a:prstGeom>
           <a:noFill/>
+          <a:ln/>
         </p:spPr>
         <p:txBody>
           <a:bodyPr wrap="square">
@@ -14906,12 +15116,15 @@
             <a:pPr algn="l">
               <a:defRPr sz="1500" b="1" i="0">
                 <a:solidFill>
-                  <a:srgbClr val="1E2761"/>
+                  <a:srgbClr val="36454F"/>
                 </a:solidFill>
                 <a:latin typeface="Calibri"/>
               </a:defRPr>
             </a:pPr>
             <a:r>
+              <a:rPr>
+                <a:solidFill/>
+              </a:rPr>
               <a:t>Key Variables</a:t>
             </a:r>
           </a:p>
@@ -14924,7 +15137,7 @@
             <a:r>
               <a:rPr sz="1200" b="1" i="0">
                 <a:solidFill>
-                  <a:srgbClr val="3A7BD5"/>
+                  <a:srgbClr val="E8963E"/>
                 </a:solidFill>
                 <a:latin typeface="Calibri"/>
               </a:rPr>
@@ -14933,7 +15146,7 @@
             <a:r>
               <a:rPr sz="1200" b="0" i="0">
                 <a:solidFill>
-                  <a:srgbClr val="1E2761"/>
+                  <a:srgbClr val="36454F"/>
                 </a:solidFill>
                 <a:latin typeface="Calibri"/>
               </a:rPr>
@@ -14949,7 +15162,7 @@
             <a:r>
               <a:rPr sz="1200" b="1" i="0">
                 <a:solidFill>
-                  <a:srgbClr val="3A7BD5"/>
+                  <a:srgbClr val="E8963E"/>
                 </a:solidFill>
                 <a:latin typeface="Calibri"/>
               </a:rPr>
@@ -14958,7 +15171,7 @@
             <a:r>
               <a:rPr sz="1200" b="0" i="0">
                 <a:solidFill>
-                  <a:srgbClr val="1E2761"/>
+                  <a:srgbClr val="36454F"/>
                 </a:solidFill>
                 <a:latin typeface="Calibri"/>
               </a:rPr>
@@ -14974,7 +15187,7 @@
             <a:r>
               <a:rPr sz="1200" b="1" i="0">
                 <a:solidFill>
-                  <a:srgbClr val="3A7BD5"/>
+                  <a:srgbClr val="E8963E"/>
                 </a:solidFill>
                 <a:latin typeface="Calibri"/>
               </a:rPr>
@@ -14983,7 +15196,7 @@
             <a:r>
               <a:rPr sz="1200" b="0" i="0">
                 <a:solidFill>
-                  <a:srgbClr val="1E2761"/>
+                  <a:srgbClr val="36454F"/>
                 </a:solidFill>
                 <a:latin typeface="Calibri"/>
               </a:rPr>
@@ -14999,7 +15212,7 @@
             <a:r>
               <a:rPr sz="1200" b="1" i="0">
                 <a:solidFill>
-                  <a:srgbClr val="3A7BD5"/>
+                  <a:srgbClr val="E8963E"/>
                 </a:solidFill>
                 <a:latin typeface="Calibri"/>
               </a:rPr>
@@ -15008,7 +15221,7 @@
             <a:r>
               <a:rPr sz="1200" b="0" i="0">
                 <a:solidFill>
-                  <a:srgbClr val="1E2761"/>
+                  <a:srgbClr val="36454F"/>
                 </a:solidFill>
                 <a:latin typeface="Calibri"/>
               </a:rPr>
@@ -15032,6 +15245,7 @@
             <a:avLst/>
           </a:prstGeom>
           <a:noFill/>
+          <a:ln/>
         </p:spPr>
         <p:txBody>
           <a:bodyPr wrap="square">
@@ -15042,12 +15256,15 @@
             <a:pPr algn="l">
               <a:defRPr sz="1500" b="1" i="0">
                 <a:solidFill>
-                  <a:srgbClr val="1E2761"/>
+                  <a:srgbClr val="36454F"/>
                 </a:solidFill>
                 <a:latin typeface="Calibri"/>
               </a:defRPr>
             </a:pPr>
             <a:r>
+              <a:rPr>
+                <a:solidFill/>
+              </a:rPr>
               <a:t>Controls &amp; Fixed Effects</a:t>
             </a:r>
           </a:p>
@@ -15060,7 +15277,7 @@
             <a:r>
               <a:rPr sz="1200" b="1" i="0">
                 <a:solidFill>
-                  <a:srgbClr val="3A7BD5"/>
+                  <a:srgbClr val="E8963E"/>
                 </a:solidFill>
                 <a:latin typeface="Calibri"/>
               </a:rPr>
@@ -15069,7 +15286,7 @@
             <a:r>
               <a:rPr sz="1200" b="0" i="0">
                 <a:solidFill>
-                  <a:srgbClr val="1E2761"/>
+                  <a:srgbClr val="36454F"/>
                 </a:solidFill>
                 <a:latin typeface="Calibri"/>
               </a:rPr>
@@ -15085,7 +15302,7 @@
             <a:r>
               <a:rPr sz="1200" b="1" i="0">
                 <a:solidFill>
-                  <a:srgbClr val="3A7BD5"/>
+                  <a:srgbClr val="E8963E"/>
                 </a:solidFill>
                 <a:latin typeface="Calibri"/>
               </a:rPr>
@@ -15094,7 +15311,7 @@
             <a:r>
               <a:rPr sz="1200" b="0" i="0">
                 <a:solidFill>
-                  <a:srgbClr val="1E2761"/>
+                  <a:srgbClr val="36454F"/>
                 </a:solidFill>
                 <a:latin typeface="Calibri"/>
               </a:rPr>
@@ -15110,7 +15327,7 @@
             <a:r>
               <a:rPr sz="1200" b="1" i="0">
                 <a:solidFill>
-                  <a:srgbClr val="3A7BD5"/>
+                  <a:srgbClr val="E8963E"/>
                 </a:solidFill>
                 <a:latin typeface="Calibri"/>
               </a:rPr>
@@ -15119,7 +15336,7 @@
             <a:r>
               <a:rPr sz="1200" b="0" i="0">
                 <a:solidFill>
-                  <a:srgbClr val="1E2761"/>
+                  <a:srgbClr val="36454F"/>
                 </a:solidFill>
                 <a:latin typeface="Calibri"/>
               </a:rPr>
@@ -15135,7 +15352,7 @@
             <a:r>
               <a:rPr sz="1200" b="1" i="0">
                 <a:solidFill>
-                  <a:srgbClr val="3A7BD5"/>
+                  <a:srgbClr val="E8963E"/>
                 </a:solidFill>
                 <a:latin typeface="Calibri"/>
               </a:rPr>
@@ -15144,7 +15361,7 @@
             <a:r>
               <a:rPr sz="1200" b="0" i="0">
                 <a:solidFill>
-                  <a:srgbClr val="1E2761"/>
+                  <a:srgbClr val="36454F"/>
                 </a:solidFill>
                 <a:latin typeface="Calibri"/>
               </a:rPr>
@@ -15170,10 +15387,10 @@
             </a:avLst>
           </a:prstGeom>
           <a:solidFill>
-            <a:srgbClr val="1E2761"/>
+            <a:srgbClr val="36454F"/>
           </a:solidFill>
           <a:ln>
-            <a:noFill/>
+            <a:solidFill/>
           </a:ln>
         </p:spPr>
         <p:style>
@@ -15195,6 +15412,7 @@
           <a:lstStyle/>
           <a:p>
             <a:pPr algn="ctr"/>
+            <a:endParaRPr/>
           </a:p>
         </p:txBody>
       </p:sp>
@@ -15213,6 +15431,7 @@
             <a:avLst/>
           </a:prstGeom>
           <a:noFill/>
+          <a:ln/>
         </p:spPr>
         <p:txBody>
           <a:bodyPr wrap="square" anchor="ctr">
@@ -15224,7 +15443,7 @@
             <a:r>
               <a:rPr sz="1300" b="1" i="0">
                 <a:solidFill>
-                  <a:srgbClr val="FFD700"/>
+                  <a:srgbClr val="FFB347"/>
                 </a:solidFill>
                 <a:latin typeface="Calibri"/>
               </a:rPr>
@@ -15242,7 +15461,7 @@
             <a:r>
               <a:rPr sz="1300" b="1" i="0">
                 <a:solidFill>
-                  <a:srgbClr val="FFD700"/>
+                  <a:srgbClr val="FFB347"/>
                 </a:solidFill>
                 <a:latin typeface="Calibri"/>
               </a:rPr>

--- a/claude work/presentation final.pptx
+++ b/claude work/presentation final.pptx
@@ -5,7 +5,7 @@
     <p:sldMasterId id="2147483648" r:id="rId1"/>
   </p:sldMasterIdLst>
   <p:notesMasterIdLst>
-    <p:notesMasterId r:id="rId27"/>
+    <p:notesMasterId r:id="rId28"/>
   </p:notesMasterIdLst>
   <p:sldIdLst>
     <p:sldId id="256" r:id="rId2"/>
@@ -15,24 +15,25 @@
     <p:sldId id="288" r:id="rId6"/>
     <p:sldId id="271" r:id="rId7"/>
     <p:sldId id="258" r:id="rId8"/>
-    <p:sldId id="259" r:id="rId9"/>
-    <p:sldId id="289" r:id="rId10"/>
-    <p:sldId id="266" r:id="rId11"/>
-    <p:sldId id="260" r:id="rId12"/>
-    <p:sldId id="283" r:id="rId13"/>
-    <p:sldId id="268" r:id="rId14"/>
-    <p:sldId id="263" r:id="rId15"/>
-    <p:sldId id="286" r:id="rId16"/>
-    <p:sldId id="264" r:id="rId17"/>
-    <p:sldId id="282" r:id="rId18"/>
-    <p:sldId id="284" r:id="rId19"/>
-    <p:sldId id="265" r:id="rId20"/>
-    <p:sldId id="276" r:id="rId21"/>
-    <p:sldId id="278" r:id="rId22"/>
-    <p:sldId id="277" r:id="rId23"/>
-    <p:sldId id="270" r:id="rId24"/>
-    <p:sldId id="285" r:id="rId25"/>
-    <p:sldId id="287" r:id="rId26"/>
+    <p:sldId id="290" r:id="rId9"/>
+    <p:sldId id="259" r:id="rId10"/>
+    <p:sldId id="289" r:id="rId11"/>
+    <p:sldId id="266" r:id="rId12"/>
+    <p:sldId id="260" r:id="rId13"/>
+    <p:sldId id="283" r:id="rId14"/>
+    <p:sldId id="268" r:id="rId15"/>
+    <p:sldId id="291" r:id="rId16"/>
+    <p:sldId id="263" r:id="rId17"/>
+    <p:sldId id="286" r:id="rId18"/>
+    <p:sldId id="282" r:id="rId19"/>
+    <p:sldId id="284" r:id="rId20"/>
+    <p:sldId id="265" r:id="rId21"/>
+    <p:sldId id="276" r:id="rId22"/>
+    <p:sldId id="278" r:id="rId23"/>
+    <p:sldId id="277" r:id="rId24"/>
+    <p:sldId id="270" r:id="rId25"/>
+    <p:sldId id="285" r:id="rId26"/>
+    <p:sldId id="287" r:id="rId27"/>
   </p:sldIdLst>
   <p:sldSz cx="9144000" cy="5143500" type="screen16x9"/>
   <p:notesSz cx="5143500" cy="9144000"/>
@@ -356,6 +357,118 @@
         <p:cNvPr id="1" name="">
           <a:extLst>
             <a:ext uri="{FF2B5EF4-FFF2-40B4-BE49-F238E27FC236}">
+              <a16:creationId xmlns:a16="http://schemas.microsoft.com/office/drawing/2014/main" id="{D503BB5E-0CF3-B26C-28AB-49CC1E6B1BE7}"/>
+            </a:ext>
+          </a:extLst>
+        </p:cNvPr>
+        <p:cNvGrpSpPr/>
+        <p:nvPr/>
+      </p:nvGrpSpPr>
+      <p:grpSpPr>
+        <a:xfrm>
+          <a:off x="0" y="0"/>
+          <a:ext cx="0" cy="0"/>
+          <a:chOff x="0" y="0"/>
+          <a:chExt cx="0" cy="0"/>
+        </a:xfrm>
+      </p:grpSpPr>
+      <p:sp>
+        <p:nvSpPr>
+          <p:cNvPr id="2" name="Slide Image Placeholder 1">
+            <a:extLst>
+              <a:ext uri="{FF2B5EF4-FFF2-40B4-BE49-F238E27FC236}">
+                <a16:creationId xmlns:a16="http://schemas.microsoft.com/office/drawing/2014/main" id="{5E634897-D438-1B38-FAAB-C3C206B93802}"/>
+              </a:ext>
+            </a:extLst>
+          </p:cNvPr>
+          <p:cNvSpPr>
+            <a:spLocks noGrp="1" noRot="1" noChangeAspect="1"/>
+          </p:cNvSpPr>
+          <p:nvPr>
+            <p:ph type="sldImg"/>
+          </p:nvPr>
+        </p:nvSpPr>
+        <p:spPr/>
+      </p:sp>
+      <p:sp>
+        <p:nvSpPr>
+          <p:cNvPr id="3" name="Notes Placeholder 2">
+            <a:extLst>
+              <a:ext uri="{FF2B5EF4-FFF2-40B4-BE49-F238E27FC236}">
+                <a16:creationId xmlns:a16="http://schemas.microsoft.com/office/drawing/2014/main" id="{E36B35C4-4D0B-65D3-B701-2DC85E30F364}"/>
+              </a:ext>
+            </a:extLst>
+          </p:cNvPr>
+          <p:cNvSpPr>
+            <a:spLocks noGrp="1"/>
+          </p:cNvSpPr>
+          <p:nvPr>
+            <p:ph type="body" idx="1"/>
+          </p:nvPr>
+        </p:nvSpPr>
+        <p:spPr/>
+        <p:txBody>
+          <a:bodyPr/>
+          <a:lstStyle/>
+          <a:p>
+            <a:r>
+              <a:rPr lang="en-US" dirty="0"/>
+              <a:t>Ben</a:t>
+            </a:r>
+            <a:endParaRPr dirty="0"/>
+          </a:p>
+        </p:txBody>
+      </p:sp>
+      <p:sp>
+        <p:nvSpPr>
+          <p:cNvPr id="4" name="Slide Number Placeholder 3">
+            <a:extLst>
+              <a:ext uri="{FF2B5EF4-FFF2-40B4-BE49-F238E27FC236}">
+                <a16:creationId xmlns:a16="http://schemas.microsoft.com/office/drawing/2014/main" id="{1AA5A88A-28EC-8FB5-9569-10A2C99C801E}"/>
+              </a:ext>
+            </a:extLst>
+          </p:cNvPr>
+          <p:cNvSpPr>
+            <a:spLocks noGrp="1"/>
+          </p:cNvSpPr>
+          <p:nvPr>
+            <p:ph type="sldNum" sz="quarter" idx="10"/>
+          </p:nvPr>
+        </p:nvSpPr>
+        <p:spPr/>
+        <p:txBody>
+          <a:bodyPr/>
+          <a:lstStyle/>
+          <a:p>
+            <a:fld id="{F7021451-1387-4CA6-816F-3879F97B5CBC}" type="slidenum">
+              <a:rPr lang="en-US"/>
+              <a:t>10</a:t>
+            </a:fld>
+            <a:endParaRPr lang="en-US"/>
+          </a:p>
+        </p:txBody>
+      </p:sp>
+    </p:spTree>
+    <p:extLst>
+      <p:ext uri="{BB962C8B-B14F-4D97-AF65-F5344CB8AC3E}">
+        <p14:creationId xmlns:p14="http://schemas.microsoft.com/office/powerpoint/2010/main" val="747567677"/>
+      </p:ext>
+    </p:extLst>
+  </p:cSld>
+  <p:clrMapOvr>
+    <a:masterClrMapping/>
+  </p:clrMapOvr>
+</p:notes>
+</file>
+
+<file path=ppt/notesSlides/notesSlide11.xml><?xml version="1.0" encoding="utf-8"?>
+<p:notes xmlns:a="http://schemas.openxmlformats.org/drawingml/2006/main" xmlns:r="http://schemas.openxmlformats.org/officeDocument/2006/relationships" xmlns:p="http://schemas.openxmlformats.org/presentationml/2006/main">
+  <p:cSld>
+    <p:spTree>
+      <p:nvGrpSpPr>
+        <p:cNvPr id="1" name="">
+          <a:extLst>
+            <a:ext uri="{FF2B5EF4-FFF2-40B4-BE49-F238E27FC236}">
               <a16:creationId xmlns:a16="http://schemas.microsoft.com/office/drawing/2014/main" id="{642F913B-F9CF-8391-3DD9-FC3A3A6DE362}"/>
             </a:ext>
           </a:extLst>
@@ -466,7 +579,7 @@
           <a:p>
             <a:fld id="{F7021451-1387-4CA6-816F-3879F97B5CBC}" type="slidenum">
               <a:rPr lang="en-US"/>
-              <a:t>10</a:t>
+              <a:t>11</a:t>
             </a:fld>
             <a:endParaRPr lang="en-US"/>
           </a:p>
@@ -485,7 +598,7 @@
 </p:notes>
 </file>
 
-<file path=ppt/notesSlides/notesSlide11.xml><?xml version="1.0" encoding="utf-8"?>
+<file path=ppt/notesSlides/notesSlide12.xml><?xml version="1.0" encoding="utf-8"?>
 <p:notes xmlns:a="http://schemas.openxmlformats.org/drawingml/2006/main" xmlns:r="http://schemas.openxmlformats.org/officeDocument/2006/relationships" xmlns:p="http://schemas.openxmlformats.org/presentationml/2006/main">
   <p:cSld>
     <p:spTree>
@@ -560,7 +673,7 @@
           <a:p>
             <a:fld id="{F7021451-1387-4CA6-816F-3879F97B5CBC}" type="slidenum">
               <a:rPr lang="en-US"/>
-              <a:t>11</a:t>
+              <a:t>12</a:t>
             </a:fld>
             <a:endParaRPr lang="en-US"/>
           </a:p>
@@ -579,7 +692,7 @@
 </p:notes>
 </file>
 
-<file path=ppt/notesSlides/notesSlide12.xml><?xml version="1.0" encoding="utf-8"?>
+<file path=ppt/notesSlides/notesSlide13.xml><?xml version="1.0" encoding="utf-8"?>
 <p:notes xmlns:a="http://schemas.openxmlformats.org/drawingml/2006/main" xmlns:r="http://schemas.openxmlformats.org/officeDocument/2006/relationships" xmlns:p="http://schemas.openxmlformats.org/presentationml/2006/main">
   <p:cSld>
     <p:spTree>
@@ -685,7 +798,7 @@
           <a:p>
             <a:fld id="{F7021451-1387-4CA6-816F-3879F97B5CBC}" type="slidenum">
               <a:rPr lang="en-US"/>
-              <a:t>12</a:t>
+              <a:t>13</a:t>
             </a:fld>
             <a:endParaRPr lang="en-US"/>
           </a:p>
@@ -704,7 +817,7 @@
 </p:notes>
 </file>
 
-<file path=ppt/notesSlides/notesSlide13.xml><?xml version="1.0" encoding="utf-8"?>
+<file path=ppt/notesSlides/notesSlide14.xml><?xml version="1.0" encoding="utf-8"?>
 <p:notes xmlns:a="http://schemas.openxmlformats.org/drawingml/2006/main" xmlns:r="http://schemas.openxmlformats.org/officeDocument/2006/relationships" xmlns:p="http://schemas.openxmlformats.org/presentationml/2006/main">
   <p:cSld>
     <p:spTree>
@@ -796,7 +909,7 @@
           <a:p>
             <a:fld id="{F7021451-1387-4CA6-816F-3879F97B5CBC}" type="slidenum">
               <a:rPr lang="en-US"/>
-              <a:t>13</a:t>
+              <a:t>14</a:t>
             </a:fld>
             <a:endParaRPr lang="en-US"/>
           </a:p>
@@ -806,93 +919,6 @@
     <p:extLst>
       <p:ext uri="{BB962C8B-B14F-4D97-AF65-F5344CB8AC3E}">
         <p14:creationId xmlns:p14="http://schemas.microsoft.com/office/powerpoint/2010/main" val="3375151872"/>
-      </p:ext>
-    </p:extLst>
-  </p:cSld>
-  <p:clrMapOvr>
-    <a:masterClrMapping/>
-  </p:clrMapOvr>
-</p:notes>
-</file>
-
-<file path=ppt/notesSlides/notesSlide14.xml><?xml version="1.0" encoding="utf-8"?>
-<p:notes xmlns:a="http://schemas.openxmlformats.org/drawingml/2006/main" xmlns:r="http://schemas.openxmlformats.org/officeDocument/2006/relationships" xmlns:p="http://schemas.openxmlformats.org/presentationml/2006/main">
-  <p:cSld>
-    <p:spTree>
-      <p:nvGrpSpPr>
-        <p:cNvPr id="1" name=""/>
-        <p:cNvGrpSpPr/>
-        <p:nvPr/>
-      </p:nvGrpSpPr>
-      <p:grpSpPr>
-        <a:xfrm>
-          <a:off x="0" y="0"/>
-          <a:ext cx="0" cy="0"/>
-          <a:chOff x="0" y="0"/>
-          <a:chExt cx="0" cy="0"/>
-        </a:xfrm>
-      </p:grpSpPr>
-      <p:sp>
-        <p:nvSpPr>
-          <p:cNvPr id="2" name="Slide Image Placeholder 1"/>
-          <p:cNvSpPr>
-            <a:spLocks noGrp="1" noRot="1" noChangeAspect="1"/>
-          </p:cNvSpPr>
-          <p:nvPr>
-            <p:ph type="sldImg"/>
-          </p:nvPr>
-        </p:nvSpPr>
-        <p:spPr/>
-      </p:sp>
-      <p:sp>
-        <p:nvSpPr>
-          <p:cNvPr id="3" name="Notes Placeholder 2"/>
-          <p:cNvSpPr>
-            <a:spLocks noGrp="1"/>
-          </p:cNvSpPr>
-          <p:nvPr>
-            <p:ph type="body" idx="1"/>
-          </p:nvPr>
-        </p:nvSpPr>
-        <p:spPr/>
-        <p:txBody>
-          <a:bodyPr/>
-          <a:lstStyle/>
-          <a:p>
-            <a:r>
-              <a:rPr lang="en-US" dirty="0"/>
-              <a:t>Adam</a:t>
-            </a:r>
-          </a:p>
-        </p:txBody>
-      </p:sp>
-      <p:sp>
-        <p:nvSpPr>
-          <p:cNvPr id="4" name="Slide Number Placeholder 3"/>
-          <p:cNvSpPr>
-            <a:spLocks noGrp="1"/>
-          </p:cNvSpPr>
-          <p:nvPr>
-            <p:ph type="sldNum" sz="quarter" idx="10"/>
-          </p:nvPr>
-        </p:nvSpPr>
-        <p:spPr/>
-        <p:txBody>
-          <a:bodyPr/>
-          <a:lstStyle/>
-          <a:p>
-            <a:fld id="{F7021451-1387-4CA6-816F-3879F97B5CBC}" type="slidenum">
-              <a:rPr lang="en-US"/>
-              <a:t>14</a:t>
-            </a:fld>
-            <a:endParaRPr lang="en-US"/>
-          </a:p>
-        </p:txBody>
-      </p:sp>
-    </p:spTree>
-    <p:extLst>
-      <p:ext uri="{BB962C8B-B14F-4D97-AF65-F5344CB8AC3E}">
-        <p14:creationId xmlns:p14="http://schemas.microsoft.com/office/powerpoint/2010/main" val="1024086991"/>
       </p:ext>
     </p:extLst>
   </p:cSld>
@@ -910,7 +936,7 @@
         <p:cNvPr id="1" name="">
           <a:extLst>
             <a:ext uri="{FF2B5EF4-FFF2-40B4-BE49-F238E27FC236}">
-              <a16:creationId xmlns:a16="http://schemas.microsoft.com/office/drawing/2014/main" id="{0BD92D23-F66A-A10B-6212-B21FCA327FDF}"/>
+              <a16:creationId xmlns:a16="http://schemas.microsoft.com/office/drawing/2014/main" id="{4AD4A424-43C1-A1F7-2BED-53CF8E73CE72}"/>
             </a:ext>
           </a:extLst>
         </p:cNvPr>
@@ -930,7 +956,7 @@
           <p:cNvPr id="2" name="Slide Image Placeholder 1">
             <a:extLst>
               <a:ext uri="{FF2B5EF4-FFF2-40B4-BE49-F238E27FC236}">
-                <a16:creationId xmlns:a16="http://schemas.microsoft.com/office/drawing/2014/main" id="{C0DCC08E-D4D6-3279-7DC0-2FF7A9649AFD}"/>
+                <a16:creationId xmlns:a16="http://schemas.microsoft.com/office/drawing/2014/main" id="{78B18E3A-58BE-5071-4A18-C15EA1E9F8FE}"/>
               </a:ext>
             </a:extLst>
           </p:cNvPr>
@@ -948,7 +974,7 @@
           <p:cNvPr id="3" name="Notes Placeholder 2">
             <a:extLst>
               <a:ext uri="{FF2B5EF4-FFF2-40B4-BE49-F238E27FC236}">
-                <a16:creationId xmlns:a16="http://schemas.microsoft.com/office/drawing/2014/main" id="{3BE724FB-D7AC-8C11-4480-070BCE0F3D9B}"/>
+                <a16:creationId xmlns:a16="http://schemas.microsoft.com/office/drawing/2014/main" id="{8DA64078-6B48-7D13-2A75-BCA1471CD2AD}"/>
               </a:ext>
             </a:extLst>
           </p:cNvPr>
@@ -976,7 +1002,7 @@
           <p:cNvPr id="4" name="Slide Number Placeholder 3">
             <a:extLst>
               <a:ext uri="{FF2B5EF4-FFF2-40B4-BE49-F238E27FC236}">
-                <a16:creationId xmlns:a16="http://schemas.microsoft.com/office/drawing/2014/main" id="{4F51009D-C13C-7EEE-5442-CE78F9E45163}"/>
+                <a16:creationId xmlns:a16="http://schemas.microsoft.com/office/drawing/2014/main" id="{5C08C69E-45B5-C610-BF55-3F17C3C824AE}"/>
               </a:ext>
             </a:extLst>
           </p:cNvPr>
@@ -1003,7 +1029,7 @@
     </p:spTree>
     <p:extLst>
       <p:ext uri="{BB962C8B-B14F-4D97-AF65-F5344CB8AC3E}">
-        <p14:creationId xmlns:p14="http://schemas.microsoft.com/office/powerpoint/2010/main" val="1706925544"/>
+        <p14:creationId xmlns:p14="http://schemas.microsoft.com/office/powerpoint/2010/main" val="3222582864"/>
       </p:ext>
     </p:extLst>
   </p:cSld>
@@ -1057,7 +1083,10 @@
           <a:bodyPr/>
           <a:lstStyle/>
           <a:p>
-            <a:endParaRPr lang="en-US" dirty="0"/>
+            <a:r>
+              <a:rPr lang="en-US" dirty="0"/>
+              <a:t>Adam</a:t>
+            </a:r>
           </a:p>
         </p:txBody>
       </p:sp>
@@ -1102,6 +1131,117 @@
   <p:cSld>
     <p:spTree>
       <p:nvGrpSpPr>
+        <p:cNvPr id="1" name="">
+          <a:extLst>
+            <a:ext uri="{FF2B5EF4-FFF2-40B4-BE49-F238E27FC236}">
+              <a16:creationId xmlns:a16="http://schemas.microsoft.com/office/drawing/2014/main" id="{0BD92D23-F66A-A10B-6212-B21FCA327FDF}"/>
+            </a:ext>
+          </a:extLst>
+        </p:cNvPr>
+        <p:cNvGrpSpPr/>
+        <p:nvPr/>
+      </p:nvGrpSpPr>
+      <p:grpSpPr>
+        <a:xfrm>
+          <a:off x="0" y="0"/>
+          <a:ext cx="0" cy="0"/>
+          <a:chOff x="0" y="0"/>
+          <a:chExt cx="0" cy="0"/>
+        </a:xfrm>
+      </p:grpSpPr>
+      <p:sp>
+        <p:nvSpPr>
+          <p:cNvPr id="2" name="Slide Image Placeholder 1">
+            <a:extLst>
+              <a:ext uri="{FF2B5EF4-FFF2-40B4-BE49-F238E27FC236}">
+                <a16:creationId xmlns:a16="http://schemas.microsoft.com/office/drawing/2014/main" id="{C0DCC08E-D4D6-3279-7DC0-2FF7A9649AFD}"/>
+              </a:ext>
+            </a:extLst>
+          </p:cNvPr>
+          <p:cNvSpPr>
+            <a:spLocks noGrp="1" noRot="1" noChangeAspect="1"/>
+          </p:cNvSpPr>
+          <p:nvPr>
+            <p:ph type="sldImg"/>
+          </p:nvPr>
+        </p:nvSpPr>
+        <p:spPr/>
+      </p:sp>
+      <p:sp>
+        <p:nvSpPr>
+          <p:cNvPr id="3" name="Notes Placeholder 2">
+            <a:extLst>
+              <a:ext uri="{FF2B5EF4-FFF2-40B4-BE49-F238E27FC236}">
+                <a16:creationId xmlns:a16="http://schemas.microsoft.com/office/drawing/2014/main" id="{3BE724FB-D7AC-8C11-4480-070BCE0F3D9B}"/>
+              </a:ext>
+            </a:extLst>
+          </p:cNvPr>
+          <p:cNvSpPr>
+            <a:spLocks noGrp="1"/>
+          </p:cNvSpPr>
+          <p:nvPr>
+            <p:ph type="body" idx="1"/>
+          </p:nvPr>
+        </p:nvSpPr>
+        <p:spPr/>
+        <p:txBody>
+          <a:bodyPr/>
+          <a:lstStyle/>
+          <a:p>
+            <a:r>
+              <a:rPr lang="en-US" dirty="0"/>
+              <a:t>Adam</a:t>
+            </a:r>
+          </a:p>
+        </p:txBody>
+      </p:sp>
+      <p:sp>
+        <p:nvSpPr>
+          <p:cNvPr id="4" name="Slide Number Placeholder 3">
+            <a:extLst>
+              <a:ext uri="{FF2B5EF4-FFF2-40B4-BE49-F238E27FC236}">
+                <a16:creationId xmlns:a16="http://schemas.microsoft.com/office/drawing/2014/main" id="{4F51009D-C13C-7EEE-5442-CE78F9E45163}"/>
+              </a:ext>
+            </a:extLst>
+          </p:cNvPr>
+          <p:cNvSpPr>
+            <a:spLocks noGrp="1"/>
+          </p:cNvSpPr>
+          <p:nvPr>
+            <p:ph type="sldNum" sz="quarter" idx="10"/>
+          </p:nvPr>
+        </p:nvSpPr>
+        <p:spPr/>
+        <p:txBody>
+          <a:bodyPr/>
+          <a:lstStyle/>
+          <a:p>
+            <a:fld id="{F7021451-1387-4CA6-816F-3879F97B5CBC}" type="slidenum">
+              <a:rPr lang="en-US"/>
+              <a:t>17</a:t>
+            </a:fld>
+            <a:endParaRPr lang="en-US"/>
+          </a:p>
+        </p:txBody>
+      </p:sp>
+    </p:spTree>
+    <p:extLst>
+      <p:ext uri="{BB962C8B-B14F-4D97-AF65-F5344CB8AC3E}">
+        <p14:creationId xmlns:p14="http://schemas.microsoft.com/office/powerpoint/2010/main" val="1706925544"/>
+      </p:ext>
+    </p:extLst>
+  </p:cSld>
+  <p:clrMapOvr>
+    <a:masterClrMapping/>
+  </p:clrMapOvr>
+</p:notes>
+</file>
+
+<file path=ppt/notesSlides/notesSlide18.xml><?xml version="1.0" encoding="utf-8"?>
+<p:notes xmlns:a="http://schemas.openxmlformats.org/drawingml/2006/main" xmlns:r="http://schemas.openxmlformats.org/officeDocument/2006/relationships" xmlns:p="http://schemas.openxmlformats.org/presentationml/2006/main">
+  <p:cSld>
+    <p:spTree>
+      <p:nvGrpSpPr>
         <p:cNvPr id="1" name=""/>
         <p:cNvGrpSpPr/>
         <p:nvPr/>
@@ -1165,7 +1305,7 @@
           <a:p>
             <a:fld id="{F7021451-1387-4CA6-816F-3879F97B5CBC}" type="slidenum">
               <a:rPr lang="en-US"/>
-              <a:t>17</a:t>
+              <a:t>18</a:t>
             </a:fld>
             <a:endParaRPr lang="en-US"/>
           </a:p>
@@ -1184,7 +1324,7 @@
 </p:notes>
 </file>
 
-<file path=ppt/notesSlides/notesSlide18.xml><?xml version="1.0" encoding="utf-8"?>
+<file path=ppt/notesSlides/notesSlide19.xml><?xml version="1.0" encoding="utf-8"?>
 <p:notes xmlns:a="http://schemas.openxmlformats.org/drawingml/2006/main" xmlns:r="http://schemas.openxmlformats.org/officeDocument/2006/relationships" xmlns:p="http://schemas.openxmlformats.org/presentationml/2006/main">
   <p:cSld>
     <p:spTree>
@@ -1276,7 +1416,7 @@
           <a:p>
             <a:fld id="{F7021451-1387-4CA6-816F-3879F97B5CBC}" type="slidenum">
               <a:rPr lang="en-US"/>
-              <a:t>18</a:t>
+              <a:t>19</a:t>
             </a:fld>
             <a:endParaRPr lang="en-US"/>
           </a:p>
@@ -1286,100 +1426,6 @@
     <p:extLst>
       <p:ext uri="{BB962C8B-B14F-4D97-AF65-F5344CB8AC3E}">
         <p14:creationId xmlns:p14="http://schemas.microsoft.com/office/powerpoint/2010/main" val="3982917720"/>
-      </p:ext>
-    </p:extLst>
-  </p:cSld>
-  <p:clrMapOvr>
-    <a:masterClrMapping/>
-  </p:clrMapOvr>
-</p:notes>
-</file>
-
-<file path=ppt/notesSlides/notesSlide19.xml><?xml version="1.0" encoding="utf-8"?>
-<p:notes xmlns:a="http://schemas.openxmlformats.org/drawingml/2006/main" xmlns:r="http://schemas.openxmlformats.org/officeDocument/2006/relationships" xmlns:p="http://schemas.openxmlformats.org/presentationml/2006/main">
-  <p:cSld>
-    <p:spTree>
-      <p:nvGrpSpPr>
-        <p:cNvPr id="1" name=""/>
-        <p:cNvGrpSpPr/>
-        <p:nvPr/>
-      </p:nvGrpSpPr>
-      <p:grpSpPr>
-        <a:xfrm>
-          <a:off x="0" y="0"/>
-          <a:ext cx="0" cy="0"/>
-          <a:chOff x="0" y="0"/>
-          <a:chExt cx="0" cy="0"/>
-        </a:xfrm>
-      </p:grpSpPr>
-      <p:sp>
-        <p:nvSpPr>
-          <p:cNvPr id="2" name="Slide Image Placeholder 1"/>
-          <p:cNvSpPr>
-            <a:spLocks noGrp="1" noRot="1" noChangeAspect="1"/>
-          </p:cNvSpPr>
-          <p:nvPr>
-            <p:ph type="sldImg"/>
-          </p:nvPr>
-        </p:nvSpPr>
-        <p:spPr/>
-      </p:sp>
-      <p:sp>
-        <p:nvSpPr>
-          <p:cNvPr id="3" name="Notes Placeholder 2"/>
-          <p:cNvSpPr>
-            <a:spLocks noGrp="1"/>
-          </p:cNvSpPr>
-          <p:nvPr>
-            <p:ph type="body" idx="1"/>
-          </p:nvPr>
-        </p:nvSpPr>
-        <p:spPr/>
-        <p:txBody>
-          <a:bodyPr/>
-          <a:lstStyle/>
-          <a:p>
-            <a:r>
-              <a:t>Ben</a:t>
-            </a:r>
-          </a:p>
-          <a:p>
-            <a:endParaRPr/>
-          </a:p>
-          <a:p>
-            <a:r>
-              <a:t>So to wrap up — our first takeaway: LLM adoption causally increases citation diversity. The Shannon entropy increase post-4o is proportional to each field's AI propensity score.</a:t>
-            </a:r>
-          </a:p>
-        </p:txBody>
-      </p:sp>
-      <p:sp>
-        <p:nvSpPr>
-          <p:cNvPr id="4" name="Slide Number Placeholder 3"/>
-          <p:cNvSpPr>
-            <a:spLocks noGrp="1"/>
-          </p:cNvSpPr>
-          <p:nvPr>
-            <p:ph type="sldNum" sz="quarter" idx="10"/>
-          </p:nvPr>
-        </p:nvSpPr>
-        <p:spPr/>
-        <p:txBody>
-          <a:bodyPr/>
-          <a:lstStyle/>
-          <a:p>
-            <a:fld id="{F7021451-1387-4CA6-816F-3879F97B5CBC}" type="slidenum">
-              <a:rPr lang="en-US"/>
-              <a:t>19</a:t>
-            </a:fld>
-            <a:endParaRPr lang="en-US"/>
-          </a:p>
-        </p:txBody>
-      </p:sp>
-    </p:spTree>
-    <p:extLst>
-      <p:ext uri="{BB962C8B-B14F-4D97-AF65-F5344CB8AC3E}">
-        <p14:creationId xmlns:p14="http://schemas.microsoft.com/office/powerpoint/2010/main" val="1024086991"/>
       </p:ext>
     </p:extLst>
   </p:cSld>
@@ -1481,6 +1527,100 @@
   <p:cSld>
     <p:spTree>
       <p:nvGrpSpPr>
+        <p:cNvPr id="1" name=""/>
+        <p:cNvGrpSpPr/>
+        <p:nvPr/>
+      </p:nvGrpSpPr>
+      <p:grpSpPr>
+        <a:xfrm>
+          <a:off x="0" y="0"/>
+          <a:ext cx="0" cy="0"/>
+          <a:chOff x="0" y="0"/>
+          <a:chExt cx="0" cy="0"/>
+        </a:xfrm>
+      </p:grpSpPr>
+      <p:sp>
+        <p:nvSpPr>
+          <p:cNvPr id="2" name="Slide Image Placeholder 1"/>
+          <p:cNvSpPr>
+            <a:spLocks noGrp="1" noRot="1" noChangeAspect="1"/>
+          </p:cNvSpPr>
+          <p:nvPr>
+            <p:ph type="sldImg"/>
+          </p:nvPr>
+        </p:nvSpPr>
+        <p:spPr/>
+      </p:sp>
+      <p:sp>
+        <p:nvSpPr>
+          <p:cNvPr id="3" name="Notes Placeholder 2"/>
+          <p:cNvSpPr>
+            <a:spLocks noGrp="1"/>
+          </p:cNvSpPr>
+          <p:nvPr>
+            <p:ph type="body" idx="1"/>
+          </p:nvPr>
+        </p:nvSpPr>
+        <p:spPr/>
+        <p:txBody>
+          <a:bodyPr/>
+          <a:lstStyle/>
+          <a:p>
+            <a:r>
+              <a:t>Ben</a:t>
+            </a:r>
+          </a:p>
+          <a:p>
+            <a:endParaRPr/>
+          </a:p>
+          <a:p>
+            <a:r>
+              <a:t>So to wrap up — our first takeaway: LLM adoption causally increases citation diversity. The Shannon entropy increase post-4o is proportional to each field's AI propensity score.</a:t>
+            </a:r>
+          </a:p>
+        </p:txBody>
+      </p:sp>
+      <p:sp>
+        <p:nvSpPr>
+          <p:cNvPr id="4" name="Slide Number Placeholder 3"/>
+          <p:cNvSpPr>
+            <a:spLocks noGrp="1"/>
+          </p:cNvSpPr>
+          <p:nvPr>
+            <p:ph type="sldNum" sz="quarter" idx="10"/>
+          </p:nvPr>
+        </p:nvSpPr>
+        <p:spPr/>
+        <p:txBody>
+          <a:bodyPr/>
+          <a:lstStyle/>
+          <a:p>
+            <a:fld id="{F7021451-1387-4CA6-816F-3879F97B5CBC}" type="slidenum">
+              <a:rPr lang="en-US"/>
+              <a:t>20</a:t>
+            </a:fld>
+            <a:endParaRPr lang="en-US"/>
+          </a:p>
+        </p:txBody>
+      </p:sp>
+    </p:spTree>
+    <p:extLst>
+      <p:ext uri="{BB962C8B-B14F-4D97-AF65-F5344CB8AC3E}">
+        <p14:creationId xmlns:p14="http://schemas.microsoft.com/office/powerpoint/2010/main" val="1024086991"/>
+      </p:ext>
+    </p:extLst>
+  </p:cSld>
+  <p:clrMapOvr>
+    <a:masterClrMapping/>
+  </p:clrMapOvr>
+</p:notes>
+</file>
+
+<file path=ppt/notesSlides/notesSlide21.xml><?xml version="1.0" encoding="utf-8"?>
+<p:notes xmlns:a="http://schemas.openxmlformats.org/drawingml/2006/main" xmlns:r="http://schemas.openxmlformats.org/officeDocument/2006/relationships" xmlns:p="http://schemas.openxmlformats.org/presentationml/2006/main">
+  <p:cSld>
+    <p:spTree>
+      <p:nvGrpSpPr>
         <p:cNvPr id="1" name="">
           <a:extLst>
             <a:ext uri="{FF2B5EF4-FFF2-40B4-BE49-F238E27FC236}">
@@ -1575,7 +1715,7 @@
           <a:p>
             <a:fld id="{F7021451-1387-4CA6-816F-3879F97B5CBC}" type="slidenum">
               <a:rPr lang="en-US"/>
-              <a:t>20</a:t>
+              <a:t>21</a:t>
             </a:fld>
             <a:endParaRPr lang="en-US"/>
           </a:p>
@@ -1594,7 +1734,7 @@
 </p:notes>
 </file>
 
-<file path=ppt/notesSlides/notesSlide21.xml><?xml version="1.0" encoding="utf-8"?>
+<file path=ppt/notesSlides/notesSlide22.xml><?xml version="1.0" encoding="utf-8"?>
 <p:notes xmlns:a="http://schemas.openxmlformats.org/drawingml/2006/main" xmlns:r="http://schemas.openxmlformats.org/officeDocument/2006/relationships" xmlns:p="http://schemas.openxmlformats.org/presentationml/2006/main">
   <p:cSld>
     <p:spTree>
@@ -1695,7 +1835,7 @@
           <a:p>
             <a:fld id="{F7021451-1387-4CA6-816F-3879F97B5CBC}" type="slidenum">
               <a:rPr lang="en-US"/>
-              <a:t>21</a:t>
+              <a:t>22</a:t>
             </a:fld>
             <a:endParaRPr lang="en-US"/>
           </a:p>
@@ -1714,7 +1854,7 @@
 </p:notes>
 </file>
 
-<file path=ppt/notesSlides/notesSlide22.xml><?xml version="1.0" encoding="utf-8"?>
+<file path=ppt/notesSlides/notesSlide23.xml><?xml version="1.0" encoding="utf-8"?>
 <p:notes xmlns:a="http://schemas.openxmlformats.org/drawingml/2006/main" xmlns:r="http://schemas.openxmlformats.org/officeDocument/2006/relationships" xmlns:p="http://schemas.openxmlformats.org/presentationml/2006/main">
   <p:cSld>
     <p:spTree>
@@ -1815,7 +1955,7 @@
           <a:p>
             <a:fld id="{F7021451-1387-4CA6-816F-3879F97B5CBC}" type="slidenum">
               <a:rPr lang="en-US"/>
-              <a:t>22</a:t>
+              <a:t>23</a:t>
             </a:fld>
             <a:endParaRPr lang="en-US"/>
           </a:p>
@@ -1834,7 +1974,7 @@
 </p:notes>
 </file>
 
-<file path=ppt/notesSlides/notesSlide23.xml><?xml version="1.0" encoding="utf-8"?>
+<file path=ppt/notesSlides/notesSlide24.xml><?xml version="1.0" encoding="utf-8"?>
 <p:notes xmlns:a="http://schemas.openxmlformats.org/drawingml/2006/main" xmlns:r="http://schemas.openxmlformats.org/officeDocument/2006/relationships" xmlns:p="http://schemas.openxmlformats.org/presentationml/2006/main">
   <p:cSld>
     <p:spTree>
@@ -1920,7 +2060,7 @@
 </p:notes>
 </file>
 
-<file path=ppt/notesSlides/notesSlide24.xml><?xml version="1.0" encoding="utf-8"?>
+<file path=ppt/notesSlides/notesSlide25.xml><?xml version="1.0" encoding="utf-8"?>
 <p:notes xmlns:a="http://schemas.openxmlformats.org/drawingml/2006/main" xmlns:r="http://schemas.openxmlformats.org/officeDocument/2006/relationships" xmlns:p="http://schemas.openxmlformats.org/presentationml/2006/main">
   <p:cSld>
     <p:spTree>
@@ -2024,7 +2164,7 @@
 </p:notes>
 </file>
 
-<file path=ppt/notesSlides/notesSlide25.xml><?xml version="1.0" encoding="utf-8"?>
+<file path=ppt/notesSlides/notesSlide26.xml><?xml version="1.0" encoding="utf-8"?>
 <p:notes xmlns:a="http://schemas.openxmlformats.org/drawingml/2006/main" xmlns:r="http://schemas.openxmlformats.org/officeDocument/2006/relationships" xmlns:p="http://schemas.openxmlformats.org/presentationml/2006/main">
   <p:cSld>
     <p:spTree>
@@ -2433,15 +2573,21 @@
           <a:lstStyle/>
           <a:p>
             <a:r>
+              <a:rPr dirty="0"/>
               <a:t>Ben</a:t>
             </a:r>
           </a:p>
           <a:p>
-            <a:endParaRPr/>
-          </a:p>
-          <a:p>
-            <a:r>
-              <a:t>Kusumegi et al. use diff-in-diff like us and find LLM adopters cite more diversely, but paper quality declines. Our contribution is causal identification of how LLM availability affects cross-field citation entropy specifically, using continuous treatment intensity.</a:t>
+            <a:endParaRPr dirty="0"/>
+          </a:p>
+          <a:p>
+            <a:r>
+              <a:rPr dirty="0" err="1"/>
+              <a:t>Kusumegi</a:t>
+            </a:r>
+            <a:r>
+              <a:rPr dirty="0"/>
+              <a:t> et al. use diff-in-diff like us and find LLM adopters cite more diversely, but paper quality declines. Our contribution is causal identification of how LLM availability affects cross-field citation entropy specifically, using continuous treatment intensity.</a:t>
             </a:r>
           </a:p>
         </p:txBody>
@@ -2698,7 +2844,13 @@
   <p:cSld>
     <p:spTree>
       <p:nvGrpSpPr>
-        <p:cNvPr id="1" name=""/>
+        <p:cNvPr id="1" name="">
+          <a:extLst>
+            <a:ext uri="{FF2B5EF4-FFF2-40B4-BE49-F238E27FC236}">
+              <a16:creationId xmlns:a16="http://schemas.microsoft.com/office/drawing/2014/main" id="{066A66E7-C60A-579B-43D2-EDF9F4849010}"/>
+            </a:ext>
+          </a:extLst>
+        </p:cNvPr>
         <p:cNvGrpSpPr/>
         <p:nvPr/>
       </p:nvGrpSpPr>
@@ -2712,7 +2864,13 @@
       </p:grpSpPr>
       <p:sp>
         <p:nvSpPr>
-          <p:cNvPr id="2" name="Slide Image Placeholder 1"/>
+          <p:cNvPr id="2" name="Slide Image Placeholder 1">
+            <a:extLst>
+              <a:ext uri="{FF2B5EF4-FFF2-40B4-BE49-F238E27FC236}">
+                <a16:creationId xmlns:a16="http://schemas.microsoft.com/office/drawing/2014/main" id="{655CE094-1D4D-5500-FFBA-9997E298CBF5}"/>
+              </a:ext>
+            </a:extLst>
+          </p:cNvPr>
           <p:cNvSpPr>
             <a:spLocks noGrp="1" noRot="1" noChangeAspect="1"/>
           </p:cNvSpPr>
@@ -2724,7 +2882,13 @@
       </p:sp>
       <p:sp>
         <p:nvSpPr>
-          <p:cNvPr id="3" name="Notes Placeholder 2"/>
+          <p:cNvPr id="3" name="Notes Placeholder 2">
+            <a:extLst>
+              <a:ext uri="{FF2B5EF4-FFF2-40B4-BE49-F238E27FC236}">
+                <a16:creationId xmlns:a16="http://schemas.microsoft.com/office/drawing/2014/main" id="{A899A4C4-48E3-8224-5A5F-9D653B7DB437}"/>
+              </a:ext>
+            </a:extLst>
+          </p:cNvPr>
           <p:cNvSpPr>
             <a:spLocks noGrp="1"/>
           </p:cNvSpPr>
@@ -2746,7 +2910,13 @@
       </p:sp>
       <p:sp>
         <p:nvSpPr>
-          <p:cNvPr id="4" name="Slide Number Placeholder 3"/>
+          <p:cNvPr id="4" name="Slide Number Placeholder 3">
+            <a:extLst>
+              <a:ext uri="{FF2B5EF4-FFF2-40B4-BE49-F238E27FC236}">
+                <a16:creationId xmlns:a16="http://schemas.microsoft.com/office/drawing/2014/main" id="{EB052BE4-F17B-BB96-BA2D-D89EBA880A6E}"/>
+              </a:ext>
+            </a:extLst>
+          </p:cNvPr>
           <p:cNvSpPr>
             <a:spLocks noGrp="1"/>
           </p:cNvSpPr>
@@ -2770,7 +2940,7 @@
     </p:spTree>
     <p:extLst>
       <p:ext uri="{BB962C8B-B14F-4D97-AF65-F5344CB8AC3E}">
-        <p14:creationId xmlns:p14="http://schemas.microsoft.com/office/powerpoint/2010/main" val="1024086991"/>
+        <p14:creationId xmlns:p14="http://schemas.microsoft.com/office/powerpoint/2010/main" val="1254196742"/>
       </p:ext>
     </p:extLst>
   </p:cSld>
@@ -2785,13 +2955,7 @@
   <p:cSld>
     <p:spTree>
       <p:nvGrpSpPr>
-        <p:cNvPr id="1" name="">
-          <a:extLst>
-            <a:ext uri="{FF2B5EF4-FFF2-40B4-BE49-F238E27FC236}">
-              <a16:creationId xmlns:a16="http://schemas.microsoft.com/office/drawing/2014/main" id="{D503BB5E-0CF3-B26C-28AB-49CC1E6B1BE7}"/>
-            </a:ext>
-          </a:extLst>
-        </p:cNvPr>
+        <p:cNvPr id="1" name=""/>
         <p:cNvGrpSpPr/>
         <p:nvPr/>
       </p:nvGrpSpPr>
@@ -2805,13 +2969,7 @@
       </p:grpSpPr>
       <p:sp>
         <p:nvSpPr>
-          <p:cNvPr id="2" name="Slide Image Placeholder 1">
-            <a:extLst>
-              <a:ext uri="{FF2B5EF4-FFF2-40B4-BE49-F238E27FC236}">
-                <a16:creationId xmlns:a16="http://schemas.microsoft.com/office/drawing/2014/main" id="{5E634897-D438-1B38-FAAB-C3C206B93802}"/>
-              </a:ext>
-            </a:extLst>
-          </p:cNvPr>
+          <p:cNvPr id="2" name="Slide Image Placeholder 1"/>
           <p:cNvSpPr>
             <a:spLocks noGrp="1" noRot="1" noChangeAspect="1"/>
           </p:cNvSpPr>
@@ -2823,13 +2981,7 @@
       </p:sp>
       <p:sp>
         <p:nvSpPr>
-          <p:cNvPr id="3" name="Notes Placeholder 2">
-            <a:extLst>
-              <a:ext uri="{FF2B5EF4-FFF2-40B4-BE49-F238E27FC236}">
-                <a16:creationId xmlns:a16="http://schemas.microsoft.com/office/drawing/2014/main" id="{E36B35C4-4D0B-65D3-B701-2DC85E30F364}"/>
-              </a:ext>
-            </a:extLst>
-          </p:cNvPr>
+          <p:cNvPr id="3" name="Notes Placeholder 2"/>
           <p:cNvSpPr>
             <a:spLocks noGrp="1"/>
           </p:cNvSpPr>
@@ -2842,19 +2994,16 @@
           <a:bodyPr/>
           <a:lstStyle/>
           <a:p>
-            <a:endParaRPr dirty="0"/>
-          </a:p>
-        </p:txBody>
-      </p:sp>
-      <p:sp>
-        <p:nvSpPr>
-          <p:cNvPr id="4" name="Slide Number Placeholder 3">
-            <a:extLst>
-              <a:ext uri="{FF2B5EF4-FFF2-40B4-BE49-F238E27FC236}">
-                <a16:creationId xmlns:a16="http://schemas.microsoft.com/office/drawing/2014/main" id="{1AA5A88A-28EC-8FB5-9569-10A2C99C801E}"/>
-              </a:ext>
-            </a:extLst>
-          </p:cNvPr>
+            <a:r>
+              <a:rPr lang="en-US" dirty="0"/>
+              <a:t>Adam</a:t>
+            </a:r>
+          </a:p>
+        </p:txBody>
+      </p:sp>
+      <p:sp>
+        <p:nvSpPr>
+          <p:cNvPr id="4" name="Slide Number Placeholder 3"/>
           <p:cNvSpPr>
             <a:spLocks noGrp="1"/>
           </p:cNvSpPr>
@@ -2878,7 +3027,7 @@
     </p:spTree>
     <p:extLst>
       <p:ext uri="{BB962C8B-B14F-4D97-AF65-F5344CB8AC3E}">
-        <p14:creationId xmlns:p14="http://schemas.microsoft.com/office/powerpoint/2010/main" val="747567677"/>
+        <p14:creationId xmlns:p14="http://schemas.microsoft.com/office/powerpoint/2010/main" val="1024086991"/>
       </p:ext>
     </p:extLst>
   </p:cSld>
@@ -3407,6 +3556,791 @@
         <p:cNvPr id="1" name="">
           <a:extLst>
             <a:ext uri="{FF2B5EF4-FFF2-40B4-BE49-F238E27FC236}">
+              <a16:creationId xmlns:a16="http://schemas.microsoft.com/office/drawing/2014/main" id="{69D567DB-FE2E-9260-4B18-1BB3FF3D7F08}"/>
+            </a:ext>
+          </a:extLst>
+        </p:cNvPr>
+        <p:cNvGrpSpPr/>
+        <p:nvPr/>
+      </p:nvGrpSpPr>
+      <p:grpSpPr>
+        <a:xfrm>
+          <a:off x="0" y="0"/>
+          <a:ext cx="0" cy="0"/>
+          <a:chOff x="0" y="0"/>
+          <a:chExt cx="0" cy="0"/>
+        </a:xfrm>
+      </p:grpSpPr>
+      <p:sp>
+        <p:nvSpPr>
+          <p:cNvPr id="2" name="Text 0">
+            <a:extLst>
+              <a:ext uri="{FF2B5EF4-FFF2-40B4-BE49-F238E27FC236}">
+                <a16:creationId xmlns:a16="http://schemas.microsoft.com/office/drawing/2014/main" id="{2CAF07AD-2908-26FD-6630-9C5F694A37DF}"/>
+              </a:ext>
+            </a:extLst>
+          </p:cNvPr>
+          <p:cNvSpPr/>
+          <p:nvPr/>
+        </p:nvSpPr>
+        <p:spPr>
+          <a:xfrm>
+            <a:off x="548640" y="274320"/>
+            <a:ext cx="8046720" cy="548640"/>
+          </a:xfrm>
+          <a:prstGeom prst="rect">
+            <a:avLst/>
+          </a:prstGeom>
+          <a:noFill/>
+          <a:ln/>
+        </p:spPr>
+        <p:txBody>
+          <a:bodyPr wrap="square" lIns="0" tIns="0" rIns="0" bIns="0" rtlCol="0" anchor="ctr"/>
+          <a:lstStyle/>
+          <a:p>
+            <a:pPr marL="0" indent="0">
+              <a:buNone/>
+            </a:pPr>
+            <a:r>
+              <a:rPr lang="en-US" sz="2800" b="1" dirty="0">
+                <a:solidFill>
+                  <a:srgbClr val="36454F"/>
+                </a:solidFill>
+                <a:latin typeface="Georgia" pitchFamily="34" charset="0"/>
+              </a:rPr>
+              <a:t>Regression Specification</a:t>
+            </a:r>
+            <a:endParaRPr lang="en-US" sz="2800" dirty="0"/>
+          </a:p>
+        </p:txBody>
+      </p:sp>
+      <p:sp>
+        <p:nvSpPr>
+          <p:cNvPr id="3" name="TextBox 2"/>
+          <p:cNvSpPr txBox="1"/>
+          <p:nvPr/>
+        </p:nvSpPr>
+        <p:spPr>
+          <a:xfrm>
+            <a:off x="548640" y="777240"/>
+            <a:ext cx="8046720" cy="365760"/>
+          </a:xfrm>
+          <a:prstGeom prst="rect">
+            <a:avLst/>
+          </a:prstGeom>
+          <a:noFill/>
+          <a:ln/>
+        </p:spPr>
+        <p:txBody>
+          <a:bodyPr wrap="square">
+            <a:spAutoFit/>
+          </a:bodyPr>
+          <a:lstStyle/>
+          <a:p>
+            <a:pPr algn="l">
+              <a:defRPr sz="1200" b="0" i="0">
+                <a:solidFill>
+                  <a:srgbClr val="7A8084"/>
+                </a:solidFill>
+                <a:latin typeface="Calibri"/>
+              </a:defRPr>
+            </a:pPr>
+            <a:r>
+              <a:rPr>
+                <a:solidFill/>
+              </a:rPr>
+              <a:t>Diff-in-diff with continuous treatment intensity and monthly trend</a:t>
+            </a:r>
+          </a:p>
+        </p:txBody>
+      </p:sp>
+      <p:sp>
+        <p:nvSpPr>
+          <p:cNvPr id="4" name="Rounded Rectangle 3"/>
+          <p:cNvSpPr/>
+          <p:nvPr/>
+        </p:nvSpPr>
+        <p:spPr>
+          <a:xfrm>
+            <a:off x="731520" y="1325880"/>
+            <a:ext cx="7680960" cy="777240"/>
+          </a:xfrm>
+          <a:prstGeom prst="roundRect">
+            <a:avLst>
+              <a:gd name="adj" fmla="val 2000"/>
+            </a:avLst>
+          </a:prstGeom>
+          <a:solidFill>
+            <a:srgbClr val="36454F"/>
+          </a:solidFill>
+          <a:ln>
+            <a:solidFill/>
+          </a:ln>
+        </p:spPr>
+        <p:style>
+          <a:lnRef idx="1">
+            <a:schemeClr val="accent1"/>
+          </a:lnRef>
+          <a:fillRef idx="3">
+            <a:schemeClr val="accent1"/>
+          </a:fillRef>
+          <a:effectRef idx="2">
+            <a:schemeClr val="accent1"/>
+          </a:effectRef>
+          <a:fontRef idx="minor">
+            <a:schemeClr val="lt1"/>
+          </a:fontRef>
+        </p:style>
+        <p:txBody>
+          <a:bodyPr rtlCol="0" anchor="ctr"/>
+          <a:lstStyle/>
+          <a:p>
+            <a:pPr algn="ctr"/>
+            <a:endParaRPr/>
+          </a:p>
+        </p:txBody>
+      </p:sp>
+      <p:sp>
+        <p:nvSpPr>
+          <p:cNvPr id="5" name="TextBox 4"/>
+          <p:cNvSpPr txBox="1"/>
+          <p:nvPr/>
+        </p:nvSpPr>
+        <p:spPr>
+          <a:xfrm>
+            <a:off x="731520" y="1325880"/>
+            <a:ext cx="7680960" cy="777240"/>
+          </a:xfrm>
+          <a:prstGeom prst="rect">
+            <a:avLst/>
+          </a:prstGeom>
+          <a:noFill/>
+          <a:ln/>
+        </p:spPr>
+        <p:txBody>
+          <a:bodyPr wrap="square" anchor="ctr">
+            <a:spAutoFit/>
+          </a:bodyPr>
+          <a:lstStyle/>
+          <a:p>
+            <a:pPr algn="ctr"/>
+            <a:r>
+              <a:rPr sz="2000" b="1" i="0">
+                <a:solidFill>
+                  <a:srgbClr val="FFFFFF"/>
+                </a:solidFill>
+                <a:latin typeface="Calibri"/>
+              </a:rPr>
+              <a:t>Y</a:t>
+            </a:r>
+            <a:r>
+              <a:rPr sz="1400" b="0" i="1">
+                <a:solidFill>
+                  <a:srgbClr val="C8CDD0"/>
+                </a:solidFill>
+                <a:latin typeface="Calibri"/>
+              </a:rPr>
+              <a:t>ᵢft</a:t>
+            </a:r>
+            <a:r>
+              <a:rPr sz="2000" b="1" i="0">
+                <a:solidFill>
+                  <a:srgbClr val="FFFFFF"/>
+                </a:solidFill>
+                <a:latin typeface="Calibri"/>
+              </a:rPr>
+              <a:t>  =  α  +  </a:t>
+            </a:r>
+            <a:r>
+              <a:rPr sz="2000" b="1" i="0">
+                <a:solidFill>
+                  <a:srgbClr val="FFB347"/>
+                </a:solidFill>
+                <a:latin typeface="Calibri"/>
+              </a:rPr>
+              <a:t>β₁</a:t>
+            </a:r>
+            <a:r>
+              <a:rPr sz="2000" b="1" i="0">
+                <a:solidFill>
+                  <a:srgbClr val="FFFFFF"/>
+                </a:solidFill>
+                <a:latin typeface="Calibri"/>
+              </a:rPr>
+              <a:t>(A</a:t>
+            </a:r>
+            <a:r>
+              <a:rPr sz="1400" b="0" i="1">
+                <a:solidFill>
+                  <a:srgbClr val="C8CDD0"/>
+                </a:solidFill>
+                <a:latin typeface="Calibri"/>
+              </a:rPr>
+              <a:t>f</a:t>
+            </a:r>
+            <a:r>
+              <a:rPr sz="2000" b="1" i="0">
+                <a:solidFill>
+                  <a:srgbClr val="FFFFFF"/>
+                </a:solidFill>
+                <a:latin typeface="Calibri"/>
+              </a:rPr>
+              <a:t> × D</a:t>
+            </a:r>
+            <a:r>
+              <a:rPr sz="1400" b="0" i="1">
+                <a:solidFill>
+                  <a:srgbClr val="C8CDD0"/>
+                </a:solidFill>
+                <a:latin typeface="Calibri"/>
+              </a:rPr>
+              <a:t>t</a:t>
+            </a:r>
+            <a:r>
+              <a:rPr sz="2000" b="1" i="0">
+                <a:solidFill>
+                  <a:srgbClr val="FFFFFF"/>
+                </a:solidFill>
+                <a:latin typeface="Calibri"/>
+              </a:rPr>
+              <a:t>)  +  </a:t>
+            </a:r>
+            <a:r>
+              <a:rPr sz="2000" b="1" i="0">
+                <a:solidFill>
+                  <a:srgbClr val="FFB347"/>
+                </a:solidFill>
+                <a:latin typeface="Calibri"/>
+              </a:rPr>
+              <a:t>β₂</a:t>
+            </a:r>
+            <a:r>
+              <a:rPr sz="2000" b="1" i="0">
+                <a:solidFill>
+                  <a:srgbClr val="FFFFFF"/>
+                </a:solidFill>
+                <a:latin typeface="Calibri"/>
+              </a:rPr>
+              <a:t>(A</a:t>
+            </a:r>
+            <a:r>
+              <a:rPr sz="1400" b="0" i="1">
+                <a:solidFill>
+                  <a:srgbClr val="C8CDD0"/>
+                </a:solidFill>
+                <a:latin typeface="Calibri"/>
+              </a:rPr>
+              <a:t>f</a:t>
+            </a:r>
+            <a:r>
+              <a:rPr sz="2000" b="1" i="0">
+                <a:solidFill>
+                  <a:srgbClr val="FFFFFF"/>
+                </a:solidFill>
+                <a:latin typeface="Calibri"/>
+              </a:rPr>
+              <a:t> × T</a:t>
+            </a:r>
+            <a:r>
+              <a:rPr sz="1400" b="0" i="1">
+                <a:solidFill>
+                  <a:srgbClr val="C8CDD0"/>
+                </a:solidFill>
+                <a:latin typeface="Calibri"/>
+              </a:rPr>
+              <a:t>t</a:t>
+            </a:r>
+            <a:r>
+              <a:rPr sz="2000" b="1" i="0">
+                <a:solidFill>
+                  <a:srgbClr val="FFFFFF"/>
+                </a:solidFill>
+                <a:latin typeface="Calibri"/>
+              </a:rPr>
+              <a:t>)  +  γ′X</a:t>
+            </a:r>
+            <a:r>
+              <a:rPr sz="1400" b="0" i="1">
+                <a:solidFill>
+                  <a:srgbClr val="C8CDD0"/>
+                </a:solidFill>
+                <a:latin typeface="Calibri"/>
+              </a:rPr>
+              <a:t>ᵢft</a:t>
+            </a:r>
+            <a:r>
+              <a:rPr sz="2000" b="1" i="0">
+                <a:solidFill>
+                  <a:srgbClr val="FFFFFF"/>
+                </a:solidFill>
+                <a:latin typeface="Calibri"/>
+              </a:rPr>
+              <a:t>  +  δ</a:t>
+            </a:r>
+            <a:r>
+              <a:rPr sz="1400" b="0" i="1">
+                <a:solidFill>
+                  <a:srgbClr val="C8CDD0"/>
+                </a:solidFill>
+                <a:latin typeface="Calibri"/>
+              </a:rPr>
+              <a:t>f</a:t>
+            </a:r>
+            <a:r>
+              <a:rPr sz="2000" b="1" i="0">
+                <a:solidFill>
+                  <a:srgbClr val="FFFFFF"/>
+                </a:solidFill>
+                <a:latin typeface="Calibri"/>
+              </a:rPr>
+              <a:t>  +  θ</a:t>
+            </a:r>
+            <a:r>
+              <a:rPr sz="1400" b="0" i="1">
+                <a:solidFill>
+                  <a:srgbClr val="C8CDD0"/>
+                </a:solidFill>
+                <a:latin typeface="Calibri"/>
+              </a:rPr>
+              <a:t>t</a:t>
+            </a:r>
+            <a:r>
+              <a:rPr sz="2000" b="1" i="0">
+                <a:solidFill>
+                  <a:srgbClr val="FFFFFF"/>
+                </a:solidFill>
+                <a:latin typeface="Calibri"/>
+              </a:rPr>
+              <a:t>  +  ε</a:t>
+            </a:r>
+            <a:r>
+              <a:rPr sz="1400" b="0" i="1">
+                <a:solidFill>
+                  <a:srgbClr val="C8CDD0"/>
+                </a:solidFill>
+                <a:latin typeface="Calibri"/>
+              </a:rPr>
+              <a:t>ᵢft</a:t>
+            </a:r>
+          </a:p>
+        </p:txBody>
+      </p:sp>
+      <p:sp>
+        <p:nvSpPr>
+          <p:cNvPr id="6" name="TextBox 5"/>
+          <p:cNvSpPr txBox="1"/>
+          <p:nvPr/>
+        </p:nvSpPr>
+        <p:spPr>
+          <a:xfrm>
+            <a:off x="731520" y="2377440"/>
+            <a:ext cx="3657600" cy="2377440"/>
+          </a:xfrm>
+          <a:prstGeom prst="rect">
+            <a:avLst/>
+          </a:prstGeom>
+          <a:noFill/>
+          <a:ln/>
+        </p:spPr>
+        <p:txBody>
+          <a:bodyPr wrap="square">
+            <a:spAutoFit/>
+          </a:bodyPr>
+          <a:lstStyle/>
+          <a:p>
+            <a:pPr algn="l">
+              <a:defRPr sz="1500" b="1" i="0">
+                <a:solidFill>
+                  <a:srgbClr val="36454F"/>
+                </a:solidFill>
+                <a:latin typeface="Calibri"/>
+              </a:defRPr>
+            </a:pPr>
+            <a:r>
+              <a:rPr>
+                <a:solidFill/>
+              </a:rPr>
+              <a:t>Key Variables</a:t>
+            </a:r>
+          </a:p>
+          <a:p>
+            <a:pPr>
+              <a:spcBef>
+                <a:spcPts val="600"/>
+              </a:spcBef>
+            </a:pPr>
+            <a:r>
+              <a:rPr sz="1200" b="1" i="0">
+                <a:solidFill>
+                  <a:srgbClr val="E8963E"/>
+                </a:solidFill>
+                <a:latin typeface="Calibri"/>
+              </a:rPr>
+              <a:t>Yᵢft</a:t>
+            </a:r>
+            <a:r>
+              <a:rPr sz="1200" b="0" i="0">
+                <a:solidFill>
+                  <a:srgbClr val="36454F"/>
+                </a:solidFill>
+                <a:latin typeface="Calibri"/>
+              </a:rPr>
+              <a:t>  Shannon entropy of paper i in field f at time t</a:t>
+            </a:r>
+          </a:p>
+          <a:p>
+            <a:pPr>
+              <a:spcBef>
+                <a:spcPts val="600"/>
+              </a:spcBef>
+            </a:pPr>
+            <a:r>
+              <a:rPr sz="1200" b="1" i="0">
+                <a:solidFill>
+                  <a:srgbClr val="E8963E"/>
+                </a:solidFill>
+                <a:latin typeface="Calibri"/>
+              </a:rPr>
+              <a:t>Af</a:t>
+            </a:r>
+            <a:r>
+              <a:rPr sz="1200" b="0" i="0">
+                <a:solidFill>
+                  <a:srgbClr val="36454F"/>
+                </a:solidFill>
+                <a:latin typeface="Calibri"/>
+              </a:rPr>
+              <a:t>  AI propensity score (Kobak marker word increase, field f)</a:t>
+            </a:r>
+          </a:p>
+          <a:p>
+            <a:pPr>
+              <a:spcBef>
+                <a:spcPts val="600"/>
+              </a:spcBef>
+            </a:pPr>
+            <a:r>
+              <a:rPr sz="1200" b="1" i="0">
+                <a:solidFill>
+                  <a:srgbClr val="E8963E"/>
+                </a:solidFill>
+                <a:latin typeface="Calibri"/>
+              </a:rPr>
+              <a:t>Dt</a:t>
+            </a:r>
+            <a:r>
+              <a:rPr sz="1200" b="0" i="0">
+                <a:solidFill>
+                  <a:srgbClr val="36454F"/>
+                </a:solidFill>
+                <a:latin typeface="Calibri"/>
+              </a:rPr>
+              <a:t>  = 1 if post-GPT-4o (Nov 2024+)</a:t>
+            </a:r>
+          </a:p>
+          <a:p>
+            <a:pPr>
+              <a:spcBef>
+                <a:spcPts val="600"/>
+              </a:spcBef>
+            </a:pPr>
+            <a:r>
+              <a:rPr sz="1200" b="1" i="0">
+                <a:solidFill>
+                  <a:srgbClr val="E8963E"/>
+                </a:solidFill>
+                <a:latin typeface="Calibri"/>
+              </a:rPr>
+              <a:t>Tt</a:t>
+            </a:r>
+            <a:r>
+              <a:rPr sz="1200" b="0" i="0">
+                <a:solidFill>
+                  <a:srgbClr val="36454F"/>
+                </a:solidFill>
+                <a:latin typeface="Calibri"/>
+              </a:rPr>
+              <a:t>  = max(0, months since Nov 2024)</a:t>
+            </a:r>
+          </a:p>
+        </p:txBody>
+      </p:sp>
+      <p:sp>
+        <p:nvSpPr>
+          <p:cNvPr id="7" name="TextBox 6"/>
+          <p:cNvSpPr txBox="1"/>
+          <p:nvPr/>
+        </p:nvSpPr>
+        <p:spPr>
+          <a:xfrm>
+            <a:off x="4754880" y="2377440"/>
+            <a:ext cx="3657600" cy="2377440"/>
+          </a:xfrm>
+          <a:prstGeom prst="rect">
+            <a:avLst/>
+          </a:prstGeom>
+          <a:noFill/>
+          <a:ln/>
+        </p:spPr>
+        <p:txBody>
+          <a:bodyPr wrap="square">
+            <a:spAutoFit/>
+          </a:bodyPr>
+          <a:lstStyle/>
+          <a:p>
+            <a:pPr algn="l">
+              <a:defRPr sz="1500" b="1" i="0">
+                <a:solidFill>
+                  <a:srgbClr val="36454F"/>
+                </a:solidFill>
+                <a:latin typeface="Calibri"/>
+              </a:defRPr>
+            </a:pPr>
+            <a:r>
+              <a:rPr>
+                <a:solidFill/>
+              </a:rPr>
+              <a:t>Controls &amp; Fixed Effects</a:t>
+            </a:r>
+          </a:p>
+          <a:p>
+            <a:pPr>
+              <a:spcBef>
+                <a:spcPts val="600"/>
+              </a:spcBef>
+            </a:pPr>
+            <a:r>
+              <a:rPr sz="1200" b="1" i="0">
+                <a:solidFill>
+                  <a:srgbClr val="E8963E"/>
+                </a:solidFill>
+                <a:latin typeface="Calibri"/>
+              </a:rPr>
+              <a:t>Xᵢft</a:t>
+            </a:r>
+            <a:r>
+              <a:rPr sz="1200" b="0" i="0">
+                <a:solidFill>
+                  <a:srgbClr val="36454F"/>
+                </a:solidFill>
+                <a:latin typeface="Calibri"/>
+              </a:rPr>
+              <a:t>  Num. authors, institutions, countries</a:t>
+            </a:r>
+          </a:p>
+          <a:p>
+            <a:pPr>
+              <a:spcBef>
+                <a:spcPts val="600"/>
+              </a:spcBef>
+            </a:pPr>
+            <a:r>
+              <a:rPr sz="1200" b="1" i="0">
+                <a:solidFill>
+                  <a:srgbClr val="E8963E"/>
+                </a:solidFill>
+                <a:latin typeface="Calibri"/>
+              </a:rPr>
+              <a:t>δf</a:t>
+            </a:r>
+            <a:r>
+              <a:rPr sz="1200" b="0" i="0">
+                <a:solidFill>
+                  <a:srgbClr val="36454F"/>
+                </a:solidFill>
+                <a:latin typeface="Calibri"/>
+              </a:rPr>
+              <a:t>  Field fixed effects (16 fields)</a:t>
+            </a:r>
+          </a:p>
+          <a:p>
+            <a:pPr>
+              <a:spcBef>
+                <a:spcPts val="600"/>
+              </a:spcBef>
+            </a:pPr>
+            <a:r>
+              <a:rPr sz="1200" b="1" i="0">
+                <a:solidFill>
+                  <a:srgbClr val="E8963E"/>
+                </a:solidFill>
+                <a:latin typeface="Calibri"/>
+              </a:rPr>
+              <a:t>θt</a:t>
+            </a:r>
+            <a:r>
+              <a:rPr sz="1200" b="0" i="0">
+                <a:solidFill>
+                  <a:srgbClr val="36454F"/>
+                </a:solidFill>
+                <a:latin typeface="Calibri"/>
+              </a:rPr>
+              <a:t>  Year-month fixed effects</a:t>
+            </a:r>
+          </a:p>
+          <a:p>
+            <a:pPr>
+              <a:spcBef>
+                <a:spcPts val="600"/>
+              </a:spcBef>
+            </a:pPr>
+            <a:r>
+              <a:rPr sz="1200" b="1" i="0">
+                <a:solidFill>
+                  <a:srgbClr val="E8963E"/>
+                </a:solidFill>
+                <a:latin typeface="Calibri"/>
+              </a:rPr>
+              <a:t>εᵢft</a:t>
+            </a:r>
+            <a:r>
+              <a:rPr sz="1200" b="0" i="0">
+                <a:solidFill>
+                  <a:srgbClr val="36454F"/>
+                </a:solidFill>
+                <a:latin typeface="Calibri"/>
+              </a:rPr>
+              <a:t>  HC1 robust standard errors</a:t>
+            </a:r>
+          </a:p>
+        </p:txBody>
+      </p:sp>
+      <p:sp>
+        <p:nvSpPr>
+          <p:cNvPr id="8" name="Rounded Rectangle 7"/>
+          <p:cNvSpPr/>
+          <p:nvPr/>
+        </p:nvSpPr>
+        <p:spPr>
+          <a:xfrm>
+            <a:off x="731520" y="4206240"/>
+            <a:ext cx="7680960" cy="594360"/>
+          </a:xfrm>
+          <a:prstGeom prst="roundRect">
+            <a:avLst>
+              <a:gd name="adj" fmla="val 2000"/>
+            </a:avLst>
+          </a:prstGeom>
+          <a:solidFill>
+            <a:srgbClr val="36454F"/>
+          </a:solidFill>
+          <a:ln>
+            <a:solidFill/>
+          </a:ln>
+        </p:spPr>
+        <p:style>
+          <a:lnRef idx="1">
+            <a:schemeClr val="accent1"/>
+          </a:lnRef>
+          <a:fillRef idx="3">
+            <a:schemeClr val="accent1"/>
+          </a:fillRef>
+          <a:effectRef idx="2">
+            <a:schemeClr val="accent1"/>
+          </a:effectRef>
+          <a:fontRef idx="minor">
+            <a:schemeClr val="lt1"/>
+          </a:fontRef>
+        </p:style>
+        <p:txBody>
+          <a:bodyPr rtlCol="0" anchor="ctr"/>
+          <a:lstStyle/>
+          <a:p>
+            <a:pPr algn="ctr"/>
+            <a:endParaRPr/>
+          </a:p>
+        </p:txBody>
+      </p:sp>
+      <p:sp>
+        <p:nvSpPr>
+          <p:cNvPr id="9" name="TextBox 8"/>
+          <p:cNvSpPr txBox="1"/>
+          <p:nvPr/>
+        </p:nvSpPr>
+        <p:spPr>
+          <a:xfrm>
+            <a:off x="731520" y="4206240"/>
+            <a:ext cx="7680960" cy="594360"/>
+          </a:xfrm>
+          <a:prstGeom prst="rect">
+            <a:avLst/>
+          </a:prstGeom>
+          <a:noFill/>
+          <a:ln/>
+        </p:spPr>
+        <p:txBody>
+          <a:bodyPr wrap="square" anchor="ctr">
+            <a:spAutoFit/>
+          </a:bodyPr>
+          <a:lstStyle/>
+          <a:p>
+            <a:pPr algn="ctr"/>
+            <a:r>
+              <a:rPr sz="1300" b="1" i="0">
+                <a:solidFill>
+                  <a:srgbClr val="FFB347"/>
+                </a:solidFill>
+                <a:latin typeface="Calibri"/>
+              </a:rPr>
+              <a:t>β₁</a:t>
+            </a:r>
+            <a:r>
+              <a:rPr sz="1300" b="0" i="0">
+                <a:solidFill>
+                  <a:srgbClr val="FFFFFF"/>
+                </a:solidFill>
+                <a:latin typeface="Calibri"/>
+              </a:rPr>
+              <a:t> captures the level shift at treatment.  </a:t>
+            </a:r>
+            <a:r>
+              <a:rPr sz="1300" b="1" i="0">
+                <a:solidFill>
+                  <a:srgbClr val="FFB347"/>
+                </a:solidFill>
+                <a:latin typeface="Calibri"/>
+              </a:rPr>
+              <a:t>β₂</a:t>
+            </a:r>
+            <a:r>
+              <a:rPr sz="1300" b="0" i="0">
+                <a:solidFill>
+                  <a:srgbClr val="FFFFFF"/>
+                </a:solidFill>
+                <a:latin typeface="Calibri"/>
+              </a:rPr>
+              <a:t> captures the monthly trend post-treatment — consistent with gradual LLM diffusion.</a:t>
+            </a:r>
+          </a:p>
+        </p:txBody>
+      </p:sp>
+    </p:spTree>
+    <p:extLst>
+      <p:ext uri="{BB962C8B-B14F-4D97-AF65-F5344CB8AC3E}">
+        <p14:creationId xmlns:p14="http://schemas.microsoft.com/office/powerpoint/2010/main" val="2065123730"/>
+      </p:ext>
+    </p:extLst>
+  </p:cSld>
+  <p:clrMapOvr>
+    <a:masterClrMapping/>
+  </p:clrMapOvr>
+</p:sld>
+</file>
+
+<file path=ppt/slides/slide11.xml><?xml version="1.0" encoding="utf-8"?>
+<p:sld xmlns:a="http://schemas.openxmlformats.org/drawingml/2006/main" xmlns:r="http://schemas.openxmlformats.org/officeDocument/2006/relationships" xmlns:p="http://schemas.openxmlformats.org/presentationml/2006/main">
+  <p:cSld>
+    <p:bg>
+      <p:bgPr>
+        <a:noFill/>
+        <a:effectLst/>
+      </p:bgPr>
+    </p:bg>
+    <p:spTree>
+      <p:nvGrpSpPr>
+        <p:cNvPr id="1" name="">
+          <a:extLst>
+            <a:ext uri="{FF2B5EF4-FFF2-40B4-BE49-F238E27FC236}">
               <a16:creationId xmlns:a16="http://schemas.microsoft.com/office/drawing/2014/main" id="{D68DA11F-8AF2-7B5C-D937-AF3C3715F204}"/>
             </a:ext>
           </a:extLst>
@@ -3892,7 +4826,7 @@
 </p:sld>
 </file>
 
-<file path=ppt/slides/slide11.xml><?xml version="1.0" encoding="utf-8"?>
+<file path=ppt/slides/slide12.xml><?xml version="1.0" encoding="utf-8"?>
 <p:sld xmlns:a="http://schemas.openxmlformats.org/drawingml/2006/main" xmlns:r="http://schemas.openxmlformats.org/officeDocument/2006/relationships" xmlns:p="http://schemas.openxmlformats.org/presentationml/2006/main">
   <p:cSld name="Slide 5">
     <p:bg>
@@ -4034,7 +4968,7 @@
 </p:sld>
 </file>
 
-<file path=ppt/slides/slide12.xml><?xml version="1.0" encoding="utf-8"?>
+<file path=ppt/slides/slide13.xml><?xml version="1.0" encoding="utf-8"?>
 <p:sld xmlns:a="http://schemas.openxmlformats.org/drawingml/2006/main" xmlns:r="http://schemas.openxmlformats.org/officeDocument/2006/relationships" xmlns:p="http://schemas.openxmlformats.org/presentationml/2006/main">
   <p:cSld>
     <p:bg>
@@ -4199,7 +5133,7 @@
 </p:sld>
 </file>
 
-<file path=ppt/slides/slide13.xml><?xml version="1.0" encoding="utf-8"?>
+<file path=ppt/slides/slide14.xml><?xml version="1.0" encoding="utf-8"?>
 <p:sld xmlns:a="http://schemas.openxmlformats.org/drawingml/2006/main" xmlns:r="http://schemas.openxmlformats.org/officeDocument/2006/relationships" xmlns:p="http://schemas.openxmlformats.org/presentationml/2006/main">
   <p:cSld>
     <p:bg>
@@ -7047,7 +7981,2849 @@
 </p:sld>
 </file>
 
-<file path=ppt/slides/slide14.xml><?xml version="1.0" encoding="utf-8"?>
+<file path=ppt/slides/slide15.xml><?xml version="1.0" encoding="utf-8"?>
+<p:sld xmlns:a="http://schemas.openxmlformats.org/drawingml/2006/main" xmlns:r="http://schemas.openxmlformats.org/officeDocument/2006/relationships" xmlns:p="http://schemas.openxmlformats.org/presentationml/2006/main">
+  <p:cSld>
+    <p:bg>
+      <p:bgPr>
+        <a:noFill/>
+        <a:effectLst/>
+      </p:bgPr>
+    </p:bg>
+    <p:spTree>
+      <p:nvGrpSpPr>
+        <p:cNvPr id="1" name="">
+          <a:extLst>
+            <a:ext uri="{FF2B5EF4-FFF2-40B4-BE49-F238E27FC236}">
+              <a16:creationId xmlns:a16="http://schemas.microsoft.com/office/drawing/2014/main" id="{26AED52D-9D4D-2517-124C-89DE4D8DF18E}"/>
+            </a:ext>
+          </a:extLst>
+        </p:cNvPr>
+        <p:cNvGrpSpPr/>
+        <p:nvPr/>
+      </p:nvGrpSpPr>
+      <p:grpSpPr>
+        <a:xfrm>
+          <a:off x="0" y="0"/>
+          <a:ext cx="0" cy="0"/>
+          <a:chOff x="0" y="0"/>
+          <a:chExt cx="0" cy="0"/>
+        </a:xfrm>
+      </p:grpSpPr>
+      <p:sp>
+        <p:nvSpPr>
+          <p:cNvPr id="2" name="Text 0">
+            <a:extLst>
+              <a:ext uri="{FF2B5EF4-FFF2-40B4-BE49-F238E27FC236}">
+                <a16:creationId xmlns:a16="http://schemas.microsoft.com/office/drawing/2014/main" id="{6F2E13D7-FE87-D738-811A-4084C15D6390}"/>
+              </a:ext>
+            </a:extLst>
+          </p:cNvPr>
+          <p:cNvSpPr/>
+          <p:nvPr/>
+        </p:nvSpPr>
+        <p:spPr>
+          <a:xfrm>
+            <a:off x="548640" y="274320"/>
+            <a:ext cx="8046720" cy="548640"/>
+          </a:xfrm>
+          <a:prstGeom prst="rect">
+            <a:avLst/>
+          </a:prstGeom>
+          <a:noFill/>
+          <a:ln/>
+        </p:spPr>
+        <p:txBody>
+          <a:bodyPr wrap="square" lIns="0" tIns="0" rIns="0" bIns="0" rtlCol="0" anchor="ctr"/>
+          <a:lstStyle/>
+          <a:p>
+            <a:pPr marL="0" indent="0">
+              <a:buNone/>
+            </a:pPr>
+            <a:r>
+              <a:rPr lang="en-US" sz="2400" b="1" dirty="0">
+                <a:solidFill>
+                  <a:srgbClr val="36454F"/>
+                </a:solidFill>
+                <a:latin typeface="Georgia" pitchFamily="34" charset="0"/>
+                <a:ea typeface="Georgia" pitchFamily="34" charset="-122"/>
+                <a:cs typeface="Georgia" pitchFamily="34" charset="-120"/>
+              </a:rPr>
+              <a:t>Main Result: Citation Entropy Diverges Post-4o</a:t>
+            </a:r>
+            <a:endParaRPr lang="en-US" sz="2400" dirty="0"/>
+          </a:p>
+        </p:txBody>
+      </p:sp>
+      <p:sp>
+        <p:nvSpPr>
+          <p:cNvPr id="3" name="Text 1">
+            <a:extLst>
+              <a:ext uri="{FF2B5EF4-FFF2-40B4-BE49-F238E27FC236}">
+                <a16:creationId xmlns:a16="http://schemas.microsoft.com/office/drawing/2014/main" id="{EBEA801E-04EE-6228-D022-F8ECBA2C7BDD}"/>
+              </a:ext>
+            </a:extLst>
+          </p:cNvPr>
+          <p:cNvSpPr/>
+          <p:nvPr/>
+        </p:nvSpPr>
+        <p:spPr>
+          <a:xfrm>
+            <a:off x="548640" y="777240"/>
+            <a:ext cx="8046720" cy="365760"/>
+          </a:xfrm>
+          <a:prstGeom prst="rect">
+            <a:avLst/>
+          </a:prstGeom>
+          <a:noFill/>
+          <a:ln/>
+        </p:spPr>
+        <p:txBody>
+          <a:bodyPr wrap="square" rtlCol="0" anchor="ctr"/>
+          <a:lstStyle/>
+          <a:p>
+            <a:pPr marL="0" indent="0">
+              <a:buNone/>
+            </a:pPr>
+            <a:r>
+              <a:rPr lang="en-US" sz="1200" dirty="0">
+                <a:solidFill>
+                  <a:srgbClr val="7A8084"/>
+                </a:solidFill>
+                <a:latin typeface="Calibri" pitchFamily="34" charset="0"/>
+                <a:ea typeface="Calibri" pitchFamily="34" charset="-122"/>
+                <a:cs typeface="Calibri" pitchFamily="34" charset="-120"/>
+              </a:rPr>
+              <a:t>High-propensity fields show steeper entropy increase after GPT-4o release</a:t>
+            </a:r>
+            <a:endParaRPr lang="en-US" sz="1200" dirty="0"/>
+          </a:p>
+        </p:txBody>
+      </p:sp>
+      <p:graphicFrame>
+        <p:nvGraphicFramePr>
+          <p:cNvPr id="4" name="Table 0">
+            <a:extLst>
+              <a:ext uri="{FF2B5EF4-FFF2-40B4-BE49-F238E27FC236}">
+                <a16:creationId xmlns:a16="http://schemas.microsoft.com/office/drawing/2014/main" id="{36155988-2A2F-5237-BF19-B1C528749A87}"/>
+              </a:ext>
+            </a:extLst>
+          </p:cNvPr>
+          <p:cNvGraphicFramePr>
+            <a:graphicFrameLocks noGrp="1"/>
+          </p:cNvGraphicFramePr>
+          <p:nvPr/>
+        </p:nvGraphicFramePr>
+        <p:xfrm>
+          <a:off x="548640" y="1143000"/>
+          <a:ext cx="4603431" cy="3741908"/>
+        </p:xfrm>
+        <a:graphic>
+          <a:graphicData uri="http://schemas.openxmlformats.org/drawingml/2006/table">
+            <a:tbl>
+              <a:tblPr/>
+              <a:tblGrid>
+                <a:gridCol w="1938287">
+                  <a:extLst>
+                    <a:ext uri="{9D8B030D-6E8A-4147-A177-3AD203B41FA5}">
+                      <a16:colId xmlns:a16="http://schemas.microsoft.com/office/drawing/2014/main" val="20000"/>
+                    </a:ext>
+                  </a:extLst>
+                </a:gridCol>
+                <a:gridCol w="1332572">
+                  <a:extLst>
+                    <a:ext uri="{9D8B030D-6E8A-4147-A177-3AD203B41FA5}">
+                      <a16:colId xmlns:a16="http://schemas.microsoft.com/office/drawing/2014/main" val="20001"/>
+                    </a:ext>
+                  </a:extLst>
+                </a:gridCol>
+                <a:gridCol w="1332572">
+                  <a:extLst>
+                    <a:ext uri="{9D8B030D-6E8A-4147-A177-3AD203B41FA5}">
+                      <a16:colId xmlns:a16="http://schemas.microsoft.com/office/drawing/2014/main" val="20002"/>
+                    </a:ext>
+                  </a:extLst>
+                </a:gridCol>
+              </a:tblGrid>
+              <a:tr h="275419">
+                <a:tc>
+                  <a:txBody>
+                    <a:bodyPr/>
+                    <a:lstStyle/>
+                    <a:p>
+                      <a:pPr marL="0" indent="0" algn="l">
+                        <a:buNone/>
+                      </a:pPr>
+                      <a:endParaRPr lang="en-US" sz="1100" dirty="0">
+                        <a:latin typeface="Calibri" charset="0"/>
+                        <a:ea typeface="Calibri" charset="0"/>
+                        <a:cs typeface="Calibri" charset="0"/>
+                      </a:endParaRPr>
+                    </a:p>
+                  </a:txBody>
+                  <a:tcPr marL="101600" marR="101600" marT="50800" marB="50800">
+                    <a:lnL w="6350" cap="flat" cmpd="sng" algn="ctr">
+                      <a:solidFill>
+                        <a:srgbClr val="CCCCCC"/>
+                      </a:solidFill>
+                      <a:prstDash val="solid"/>
+                      <a:round/>
+                      <a:headEnd type="none" w="med" len="med"/>
+                      <a:tailEnd type="none" w="med" len="med"/>
+                    </a:lnL>
+                    <a:lnR w="6350" cap="flat" cmpd="sng" algn="ctr">
+                      <a:solidFill>
+                        <a:srgbClr val="CCCCCC"/>
+                      </a:solidFill>
+                      <a:prstDash val="solid"/>
+                      <a:round/>
+                      <a:headEnd type="none" w="med" len="med"/>
+                      <a:tailEnd type="none" w="med" len="med"/>
+                    </a:lnR>
+                    <a:lnT w="6350" cap="flat" cmpd="sng" algn="ctr">
+                      <a:solidFill>
+                        <a:srgbClr val="CCCCCC"/>
+                      </a:solidFill>
+                      <a:prstDash val="solid"/>
+                      <a:round/>
+                      <a:headEnd type="none" w="med" len="med"/>
+                      <a:tailEnd type="none" w="med" len="med"/>
+                    </a:lnT>
+                    <a:lnB w="6350" cap="flat" cmpd="sng" algn="ctr">
+                      <a:solidFill>
+                        <a:srgbClr val="CCCCCC"/>
+                      </a:solidFill>
+                      <a:prstDash val="solid"/>
+                      <a:round/>
+                      <a:headEnd type="none" w="med" len="med"/>
+                      <a:tailEnd type="none" w="med" len="med"/>
+                    </a:lnB>
+                    <a:solidFill>
+                      <a:srgbClr val="36454F"/>
+                    </a:solidFill>
+                  </a:tcPr>
+                </a:tc>
+                <a:tc>
+                  <a:txBody>
+                    <a:bodyPr/>
+                    <a:lstStyle/>
+                    <a:p>
+                      <a:pPr marL="0" indent="0" algn="ctr">
+                        <a:buNone/>
+                      </a:pPr>
+                      <a:r>
+                        <a:rPr lang="en-US" sz="1100" b="1" dirty="0">
+                          <a:solidFill>
+                            <a:srgbClr val="FFFFFF"/>
+                          </a:solidFill>
+                          <a:latin typeface="Calibri" pitchFamily="34" charset="0"/>
+                          <a:ea typeface="Calibri" pitchFamily="34" charset="-122"/>
+                          <a:cs typeface="Calibri" pitchFamily="34" charset="-120"/>
+                        </a:rPr>
+                        <a:t>(1) Level</a:t>
+                      </a:r>
+                      <a:endParaRPr lang="en-US" sz="1100" dirty="0">
+                        <a:latin typeface="Calibri" charset="0"/>
+                        <a:ea typeface="Calibri" charset="0"/>
+                        <a:cs typeface="Calibri" charset="0"/>
+                      </a:endParaRPr>
+                    </a:p>
+                  </a:txBody>
+                  <a:tcPr marL="101600" marR="101600" marT="50800" marB="50800">
+                    <a:lnL w="6350" cap="flat" cmpd="sng" algn="ctr">
+                      <a:solidFill>
+                        <a:srgbClr val="CCCCCC"/>
+                      </a:solidFill>
+                      <a:prstDash val="solid"/>
+                      <a:round/>
+                      <a:headEnd type="none" w="med" len="med"/>
+                      <a:tailEnd type="none" w="med" len="med"/>
+                    </a:lnL>
+                    <a:lnR w="6350" cap="flat" cmpd="sng" algn="ctr">
+                      <a:solidFill>
+                        <a:srgbClr val="CCCCCC"/>
+                      </a:solidFill>
+                      <a:prstDash val="solid"/>
+                      <a:round/>
+                      <a:headEnd type="none" w="med" len="med"/>
+                      <a:tailEnd type="none" w="med" len="med"/>
+                    </a:lnR>
+                    <a:lnT w="6350" cap="flat" cmpd="sng" algn="ctr">
+                      <a:solidFill>
+                        <a:srgbClr val="CCCCCC"/>
+                      </a:solidFill>
+                      <a:prstDash val="solid"/>
+                      <a:round/>
+                      <a:headEnd type="none" w="med" len="med"/>
+                      <a:tailEnd type="none" w="med" len="med"/>
+                    </a:lnT>
+                    <a:lnB w="6350" cap="flat" cmpd="sng" algn="ctr">
+                      <a:solidFill>
+                        <a:srgbClr val="CCCCCC"/>
+                      </a:solidFill>
+                      <a:prstDash val="solid"/>
+                      <a:round/>
+                      <a:headEnd type="none" w="med" len="med"/>
+                      <a:tailEnd type="none" w="med" len="med"/>
+                    </a:lnB>
+                    <a:solidFill>
+                      <a:srgbClr val="36454F"/>
+                    </a:solidFill>
+                  </a:tcPr>
+                </a:tc>
+                <a:tc>
+                  <a:txBody>
+                    <a:bodyPr/>
+                    <a:lstStyle/>
+                    <a:p>
+                      <a:pPr marL="0" indent="0" algn="ctr">
+                        <a:buNone/>
+                      </a:pPr>
+                      <a:r>
+                        <a:rPr lang="en-US" sz="1100" b="1" dirty="0">
+                          <a:solidFill>
+                            <a:srgbClr val="FFFFFF"/>
+                          </a:solidFill>
+                          <a:latin typeface="Calibri" pitchFamily="34" charset="0"/>
+                          <a:ea typeface="Calibri" pitchFamily="34" charset="-122"/>
+                          <a:cs typeface="Calibri" pitchFamily="34" charset="-120"/>
+                        </a:rPr>
+                        <a:t>(2) Trend</a:t>
+                      </a:r>
+                      <a:endParaRPr lang="en-US" sz="1100" dirty="0">
+                        <a:latin typeface="Calibri" charset="0"/>
+                        <a:ea typeface="Calibri" charset="0"/>
+                        <a:cs typeface="Calibri" charset="0"/>
+                      </a:endParaRPr>
+                    </a:p>
+                  </a:txBody>
+                  <a:tcPr marL="101600" marR="101600" marT="50800" marB="50800">
+                    <a:lnL w="6350" cap="flat" cmpd="sng" algn="ctr">
+                      <a:solidFill>
+                        <a:srgbClr val="CCCCCC"/>
+                      </a:solidFill>
+                      <a:prstDash val="solid"/>
+                      <a:round/>
+                      <a:headEnd type="none" w="med" len="med"/>
+                      <a:tailEnd type="none" w="med" len="med"/>
+                    </a:lnL>
+                    <a:lnR w="6350" cap="flat" cmpd="sng" algn="ctr">
+                      <a:solidFill>
+                        <a:srgbClr val="CCCCCC"/>
+                      </a:solidFill>
+                      <a:prstDash val="solid"/>
+                      <a:round/>
+                      <a:headEnd type="none" w="med" len="med"/>
+                      <a:tailEnd type="none" w="med" len="med"/>
+                    </a:lnR>
+                    <a:lnT w="6350" cap="flat" cmpd="sng" algn="ctr">
+                      <a:solidFill>
+                        <a:srgbClr val="CCCCCC"/>
+                      </a:solidFill>
+                      <a:prstDash val="solid"/>
+                      <a:round/>
+                      <a:headEnd type="none" w="med" len="med"/>
+                      <a:tailEnd type="none" w="med" len="med"/>
+                    </a:lnT>
+                    <a:lnB w="6350" cap="flat" cmpd="sng" algn="ctr">
+                      <a:solidFill>
+                        <a:srgbClr val="CCCCCC"/>
+                      </a:solidFill>
+                      <a:prstDash val="solid"/>
+                      <a:round/>
+                      <a:headEnd type="none" w="med" len="med"/>
+                      <a:tailEnd type="none" w="med" len="med"/>
+                    </a:lnB>
+                    <a:solidFill>
+                      <a:srgbClr val="36454F"/>
+                    </a:solidFill>
+                  </a:tcPr>
+                </a:tc>
+                <a:extLst>
+                  <a:ext uri="{0D108BD9-81ED-4DB2-BD59-A6C34878D82A}">
+                    <a16:rowId xmlns:a16="http://schemas.microsoft.com/office/drawing/2014/main" val="10000"/>
+                  </a:ext>
+                </a:extLst>
+              </a:tr>
+              <a:tr h="275419">
+                <a:tc>
+                  <a:txBody>
+                    <a:bodyPr/>
+                    <a:lstStyle/>
+                    <a:p>
+                      <a:pPr marL="0" indent="0">
+                        <a:buNone/>
+                      </a:pPr>
+                      <a:r>
+                        <a:rPr lang="en-US" sz="1100" b="1" dirty="0">
+                          <a:solidFill>
+                            <a:srgbClr val="000000"/>
+                          </a:solidFill>
+                          <a:latin typeface="Calibri" pitchFamily="34" charset="0"/>
+                          <a:ea typeface="Calibri" pitchFamily="34" charset="-122"/>
+                          <a:cs typeface="Calibri" pitchFamily="34" charset="-120"/>
+                        </a:rPr>
+                        <a:t>Propensity Jump  (β₁)</a:t>
+                      </a:r>
+                      <a:endParaRPr lang="en-US" sz="1100" dirty="0">
+                        <a:latin typeface="Calibri" charset="0"/>
+                        <a:ea typeface="Calibri" charset="0"/>
+                        <a:cs typeface="Calibri" charset="0"/>
+                      </a:endParaRPr>
+                    </a:p>
+                  </a:txBody>
+                  <a:tcPr marL="101600" marR="101600" marT="50800" marB="50800">
+                    <a:lnL w="6350" cap="flat" cmpd="sng" algn="ctr">
+                      <a:solidFill>
+                        <a:srgbClr val="CCCCCC"/>
+                      </a:solidFill>
+                      <a:prstDash val="solid"/>
+                      <a:round/>
+                      <a:headEnd type="none" w="med" len="med"/>
+                      <a:tailEnd type="none" w="med" len="med"/>
+                    </a:lnL>
+                    <a:lnR w="6350" cap="flat" cmpd="sng" algn="ctr">
+                      <a:solidFill>
+                        <a:srgbClr val="CCCCCC"/>
+                      </a:solidFill>
+                      <a:prstDash val="solid"/>
+                      <a:round/>
+                      <a:headEnd type="none" w="med" len="med"/>
+                      <a:tailEnd type="none" w="med" len="med"/>
+                    </a:lnR>
+                    <a:lnT w="6350" cap="flat" cmpd="sng" algn="ctr">
+                      <a:solidFill>
+                        <a:srgbClr val="CCCCCC"/>
+                      </a:solidFill>
+                      <a:prstDash val="solid"/>
+                      <a:round/>
+                      <a:headEnd type="none" w="med" len="med"/>
+                      <a:tailEnd type="none" w="med" len="med"/>
+                    </a:lnT>
+                    <a:lnB w="6350" cap="flat" cmpd="sng" algn="ctr">
+                      <a:solidFill>
+                        <a:srgbClr val="CCCCCC"/>
+                      </a:solidFill>
+                      <a:prstDash val="solid"/>
+                      <a:round/>
+                      <a:headEnd type="none" w="med" len="med"/>
+                      <a:tailEnd type="none" w="med" len="med"/>
+                    </a:lnB>
+                  </a:tcPr>
+                </a:tc>
+                <a:tc>
+                  <a:txBody>
+                    <a:bodyPr/>
+                    <a:lstStyle/>
+                    <a:p>
+                      <a:pPr marL="0" indent="0" algn="ctr">
+                        <a:buNone/>
+                      </a:pPr>
+                      <a:r>
+                        <a:rPr lang="en-US" sz="1100" dirty="0">
+                          <a:solidFill>
+                            <a:srgbClr val="000000"/>
+                          </a:solidFill>
+                          <a:latin typeface="Calibri" pitchFamily="34" charset="0"/>
+                          <a:ea typeface="Calibri" pitchFamily="34" charset="-122"/>
+                          <a:cs typeface="Calibri" pitchFamily="34" charset="-120"/>
+                        </a:rPr>
+                        <a:t>0.170***</a:t>
+                      </a:r>
+                      <a:endParaRPr lang="en-US" sz="1100" dirty="0">
+                        <a:latin typeface="Calibri" charset="0"/>
+                        <a:ea typeface="Calibri" charset="0"/>
+                        <a:cs typeface="Calibri" charset="0"/>
+                      </a:endParaRPr>
+                    </a:p>
+                  </a:txBody>
+                  <a:tcPr marL="101600" marR="101600" marT="50800" marB="50800">
+                    <a:lnL w="6350" cap="flat" cmpd="sng" algn="ctr">
+                      <a:solidFill>
+                        <a:srgbClr val="CCCCCC"/>
+                      </a:solidFill>
+                      <a:prstDash val="solid"/>
+                      <a:round/>
+                      <a:headEnd type="none" w="med" len="med"/>
+                      <a:tailEnd type="none" w="med" len="med"/>
+                    </a:lnL>
+                    <a:lnR w="6350" cap="flat" cmpd="sng" algn="ctr">
+                      <a:solidFill>
+                        <a:srgbClr val="CCCCCC"/>
+                      </a:solidFill>
+                      <a:prstDash val="solid"/>
+                      <a:round/>
+                      <a:headEnd type="none" w="med" len="med"/>
+                      <a:tailEnd type="none" w="med" len="med"/>
+                    </a:lnR>
+                    <a:lnT w="6350" cap="flat" cmpd="sng" algn="ctr">
+                      <a:solidFill>
+                        <a:srgbClr val="CCCCCC"/>
+                      </a:solidFill>
+                      <a:prstDash val="solid"/>
+                      <a:round/>
+                      <a:headEnd type="none" w="med" len="med"/>
+                      <a:tailEnd type="none" w="med" len="med"/>
+                    </a:lnT>
+                    <a:lnB w="6350" cap="flat" cmpd="sng" algn="ctr">
+                      <a:solidFill>
+                        <a:srgbClr val="CCCCCC"/>
+                      </a:solidFill>
+                      <a:prstDash val="solid"/>
+                      <a:round/>
+                      <a:headEnd type="none" w="med" len="med"/>
+                      <a:tailEnd type="none" w="med" len="med"/>
+                    </a:lnB>
+                  </a:tcPr>
+                </a:tc>
+                <a:tc>
+                  <a:txBody>
+                    <a:bodyPr/>
+                    <a:lstStyle/>
+                    <a:p>
+                      <a:pPr marL="0" indent="0" algn="ctr">
+                        <a:buNone/>
+                      </a:pPr>
+                      <a:r>
+                        <a:rPr lang="en-US" sz="1100" dirty="0">
+                          <a:solidFill>
+                            <a:srgbClr val="000000"/>
+                          </a:solidFill>
+                          <a:latin typeface="Calibri" pitchFamily="34" charset="0"/>
+                          <a:ea typeface="Calibri" pitchFamily="34" charset="-122"/>
+                          <a:cs typeface="Calibri" pitchFamily="34" charset="-120"/>
+                        </a:rPr>
+                        <a:t>–0.044</a:t>
+                      </a:r>
+                      <a:endParaRPr lang="en-US" sz="1100" dirty="0">
+                        <a:latin typeface="Calibri" charset="0"/>
+                        <a:ea typeface="Calibri" charset="0"/>
+                        <a:cs typeface="Calibri" charset="0"/>
+                      </a:endParaRPr>
+                    </a:p>
+                  </a:txBody>
+                  <a:tcPr marL="101600" marR="101600" marT="50800" marB="50800">
+                    <a:lnL w="6350" cap="flat" cmpd="sng" algn="ctr">
+                      <a:solidFill>
+                        <a:srgbClr val="CCCCCC"/>
+                      </a:solidFill>
+                      <a:prstDash val="solid"/>
+                      <a:round/>
+                      <a:headEnd type="none" w="med" len="med"/>
+                      <a:tailEnd type="none" w="med" len="med"/>
+                    </a:lnL>
+                    <a:lnR w="6350" cap="flat" cmpd="sng" algn="ctr">
+                      <a:solidFill>
+                        <a:srgbClr val="CCCCCC"/>
+                      </a:solidFill>
+                      <a:prstDash val="solid"/>
+                      <a:round/>
+                      <a:headEnd type="none" w="med" len="med"/>
+                      <a:tailEnd type="none" w="med" len="med"/>
+                    </a:lnR>
+                    <a:lnT w="6350" cap="flat" cmpd="sng" algn="ctr">
+                      <a:solidFill>
+                        <a:srgbClr val="CCCCCC"/>
+                      </a:solidFill>
+                      <a:prstDash val="solid"/>
+                      <a:round/>
+                      <a:headEnd type="none" w="med" len="med"/>
+                      <a:tailEnd type="none" w="med" len="med"/>
+                    </a:lnT>
+                    <a:lnB w="6350" cap="flat" cmpd="sng" algn="ctr">
+                      <a:solidFill>
+                        <a:srgbClr val="CCCCCC"/>
+                      </a:solidFill>
+                      <a:prstDash val="solid"/>
+                      <a:round/>
+                      <a:headEnd type="none" w="med" len="med"/>
+                      <a:tailEnd type="none" w="med" len="med"/>
+                    </a:lnB>
+                  </a:tcPr>
+                </a:tc>
+                <a:extLst>
+                  <a:ext uri="{0D108BD9-81ED-4DB2-BD59-A6C34878D82A}">
+                    <a16:rowId xmlns:a16="http://schemas.microsoft.com/office/drawing/2014/main" val="10001"/>
+                  </a:ext>
+                </a:extLst>
+              </a:tr>
+              <a:tr h="275419">
+                <a:tc>
+                  <a:txBody>
+                    <a:bodyPr/>
+                    <a:lstStyle/>
+                    <a:p>
+                      <a:pPr marL="0" indent="0">
+                        <a:buNone/>
+                      </a:pPr>
+                      <a:endParaRPr lang="en-US" sz="1000" dirty="0">
+                        <a:latin typeface="Calibri" charset="0"/>
+                        <a:ea typeface="Calibri" charset="0"/>
+                        <a:cs typeface="Calibri" charset="0"/>
+                      </a:endParaRPr>
+                    </a:p>
+                  </a:txBody>
+                  <a:tcPr marL="101600" marR="101600" marT="50800" marB="50800">
+                    <a:lnL w="6350" cap="flat" cmpd="sng" algn="ctr">
+                      <a:solidFill>
+                        <a:srgbClr val="CCCCCC"/>
+                      </a:solidFill>
+                      <a:prstDash val="solid"/>
+                      <a:round/>
+                      <a:headEnd type="none" w="med" len="med"/>
+                      <a:tailEnd type="none" w="med" len="med"/>
+                    </a:lnL>
+                    <a:lnR w="6350" cap="flat" cmpd="sng" algn="ctr">
+                      <a:solidFill>
+                        <a:srgbClr val="CCCCCC"/>
+                      </a:solidFill>
+                      <a:prstDash val="solid"/>
+                      <a:round/>
+                      <a:headEnd type="none" w="med" len="med"/>
+                      <a:tailEnd type="none" w="med" len="med"/>
+                    </a:lnR>
+                    <a:lnT w="6350" cap="flat" cmpd="sng" algn="ctr">
+                      <a:solidFill>
+                        <a:srgbClr val="CCCCCC"/>
+                      </a:solidFill>
+                      <a:prstDash val="solid"/>
+                      <a:round/>
+                      <a:headEnd type="none" w="med" len="med"/>
+                      <a:tailEnd type="none" w="med" len="med"/>
+                    </a:lnT>
+                    <a:lnB w="6350" cap="flat" cmpd="sng" algn="ctr">
+                      <a:solidFill>
+                        <a:srgbClr val="CCCCCC"/>
+                      </a:solidFill>
+                      <a:prstDash val="solid"/>
+                      <a:round/>
+                      <a:headEnd type="none" w="med" len="med"/>
+                      <a:tailEnd type="none" w="med" len="med"/>
+                    </a:lnB>
+                  </a:tcPr>
+                </a:tc>
+                <a:tc>
+                  <a:txBody>
+                    <a:bodyPr/>
+                    <a:lstStyle/>
+                    <a:p>
+                      <a:pPr marL="0" indent="0" algn="ctr">
+                        <a:buNone/>
+                      </a:pPr>
+                      <a:r>
+                        <a:rPr lang="en-US" sz="1000" dirty="0">
+                          <a:solidFill>
+                            <a:srgbClr val="7A8084"/>
+                          </a:solidFill>
+                          <a:latin typeface="Calibri" pitchFamily="34" charset="0"/>
+                          <a:ea typeface="Calibri" pitchFamily="34" charset="-122"/>
+                          <a:cs typeface="Calibri" pitchFamily="34" charset="-120"/>
+                        </a:rPr>
+                        <a:t>(0.068)</a:t>
+                      </a:r>
+                      <a:endParaRPr lang="en-US" sz="1000" dirty="0">
+                        <a:latin typeface="Calibri" charset="0"/>
+                        <a:ea typeface="Calibri" charset="0"/>
+                        <a:cs typeface="Calibri" charset="0"/>
+                      </a:endParaRPr>
+                    </a:p>
+                  </a:txBody>
+                  <a:tcPr marL="101600" marR="101600" marT="50800" marB="50800">
+                    <a:lnL w="6350" cap="flat" cmpd="sng" algn="ctr">
+                      <a:solidFill>
+                        <a:srgbClr val="CCCCCC"/>
+                      </a:solidFill>
+                      <a:prstDash val="solid"/>
+                      <a:round/>
+                      <a:headEnd type="none" w="med" len="med"/>
+                      <a:tailEnd type="none" w="med" len="med"/>
+                    </a:lnL>
+                    <a:lnR w="6350" cap="flat" cmpd="sng" algn="ctr">
+                      <a:solidFill>
+                        <a:srgbClr val="CCCCCC"/>
+                      </a:solidFill>
+                      <a:prstDash val="solid"/>
+                      <a:round/>
+                      <a:headEnd type="none" w="med" len="med"/>
+                      <a:tailEnd type="none" w="med" len="med"/>
+                    </a:lnR>
+                    <a:lnT w="6350" cap="flat" cmpd="sng" algn="ctr">
+                      <a:solidFill>
+                        <a:srgbClr val="CCCCCC"/>
+                      </a:solidFill>
+                      <a:prstDash val="solid"/>
+                      <a:round/>
+                      <a:headEnd type="none" w="med" len="med"/>
+                      <a:tailEnd type="none" w="med" len="med"/>
+                    </a:lnT>
+                    <a:lnB w="6350" cap="flat" cmpd="sng" algn="ctr">
+                      <a:solidFill>
+                        <a:srgbClr val="CCCCCC"/>
+                      </a:solidFill>
+                      <a:prstDash val="solid"/>
+                      <a:round/>
+                      <a:headEnd type="none" w="med" len="med"/>
+                      <a:tailEnd type="none" w="med" len="med"/>
+                    </a:lnB>
+                  </a:tcPr>
+                </a:tc>
+                <a:tc>
+                  <a:txBody>
+                    <a:bodyPr/>
+                    <a:lstStyle/>
+                    <a:p>
+                      <a:pPr marL="0" indent="0" algn="ctr">
+                        <a:buNone/>
+                      </a:pPr>
+                      <a:r>
+                        <a:rPr lang="en-US" sz="1000" dirty="0">
+                          <a:solidFill>
+                            <a:srgbClr val="7A8084"/>
+                          </a:solidFill>
+                          <a:latin typeface="Calibri" pitchFamily="34" charset="0"/>
+                          <a:ea typeface="Calibri" pitchFamily="34" charset="-122"/>
+                          <a:cs typeface="Calibri" pitchFamily="34" charset="-120"/>
+                        </a:rPr>
+                        <a:t>(0.106)</a:t>
+                      </a:r>
+                      <a:endParaRPr lang="en-US" sz="1000" dirty="0">
+                        <a:latin typeface="Calibri" charset="0"/>
+                        <a:ea typeface="Calibri" charset="0"/>
+                        <a:cs typeface="Calibri" charset="0"/>
+                      </a:endParaRPr>
+                    </a:p>
+                  </a:txBody>
+                  <a:tcPr marL="101600" marR="101600" marT="50800" marB="50800">
+                    <a:lnL w="6350" cap="flat" cmpd="sng" algn="ctr">
+                      <a:solidFill>
+                        <a:srgbClr val="CCCCCC"/>
+                      </a:solidFill>
+                      <a:prstDash val="solid"/>
+                      <a:round/>
+                      <a:headEnd type="none" w="med" len="med"/>
+                      <a:tailEnd type="none" w="med" len="med"/>
+                    </a:lnL>
+                    <a:lnR w="6350" cap="flat" cmpd="sng" algn="ctr">
+                      <a:solidFill>
+                        <a:srgbClr val="CCCCCC"/>
+                      </a:solidFill>
+                      <a:prstDash val="solid"/>
+                      <a:round/>
+                      <a:headEnd type="none" w="med" len="med"/>
+                      <a:tailEnd type="none" w="med" len="med"/>
+                    </a:lnR>
+                    <a:lnT w="6350" cap="flat" cmpd="sng" algn="ctr">
+                      <a:solidFill>
+                        <a:srgbClr val="CCCCCC"/>
+                      </a:solidFill>
+                      <a:prstDash val="solid"/>
+                      <a:round/>
+                      <a:headEnd type="none" w="med" len="med"/>
+                      <a:tailEnd type="none" w="med" len="med"/>
+                    </a:lnT>
+                    <a:lnB w="6350" cap="flat" cmpd="sng" algn="ctr">
+                      <a:solidFill>
+                        <a:srgbClr val="CCCCCC"/>
+                      </a:solidFill>
+                      <a:prstDash val="solid"/>
+                      <a:round/>
+                      <a:headEnd type="none" w="med" len="med"/>
+                      <a:tailEnd type="none" w="med" len="med"/>
+                    </a:lnB>
+                  </a:tcPr>
+                </a:tc>
+                <a:extLst>
+                  <a:ext uri="{0D108BD9-81ED-4DB2-BD59-A6C34878D82A}">
+                    <a16:rowId xmlns:a16="http://schemas.microsoft.com/office/drawing/2014/main" val="10002"/>
+                  </a:ext>
+                </a:extLst>
+              </a:tr>
+              <a:tr h="275419">
+                <a:tc>
+                  <a:txBody>
+                    <a:bodyPr/>
+                    <a:lstStyle/>
+                    <a:p>
+                      <a:pPr marL="0" indent="0">
+                        <a:buNone/>
+                      </a:pPr>
+                      <a:r>
+                        <a:rPr lang="en-US" sz="1100" b="1" dirty="0">
+                          <a:solidFill>
+                            <a:srgbClr val="000000"/>
+                          </a:solidFill>
+                          <a:latin typeface="Calibri" pitchFamily="34" charset="0"/>
+                          <a:ea typeface="Calibri" pitchFamily="34" charset="-122"/>
+                          <a:cs typeface="Calibri" pitchFamily="34" charset="-120"/>
+                        </a:rPr>
+                        <a:t>Propensity Trend (Monthly)  (β₂)</a:t>
+                      </a:r>
+                      <a:endParaRPr lang="en-US" sz="1100" dirty="0">
+                        <a:latin typeface="Calibri" charset="0"/>
+                        <a:ea typeface="Calibri" charset="0"/>
+                        <a:cs typeface="Calibri" charset="0"/>
+                      </a:endParaRPr>
+                    </a:p>
+                  </a:txBody>
+                  <a:tcPr marL="101600" marR="101600" marT="50800" marB="50800">
+                    <a:lnL w="6350" cap="flat" cmpd="sng" algn="ctr">
+                      <a:solidFill>
+                        <a:srgbClr val="CCCCCC"/>
+                      </a:solidFill>
+                      <a:prstDash val="solid"/>
+                      <a:round/>
+                      <a:headEnd type="none" w="med" len="med"/>
+                      <a:tailEnd type="none" w="med" len="med"/>
+                    </a:lnL>
+                    <a:lnR w="6350" cap="flat" cmpd="sng" algn="ctr">
+                      <a:solidFill>
+                        <a:srgbClr val="CCCCCC"/>
+                      </a:solidFill>
+                      <a:prstDash val="solid"/>
+                      <a:round/>
+                      <a:headEnd type="none" w="med" len="med"/>
+                      <a:tailEnd type="none" w="med" len="med"/>
+                    </a:lnR>
+                    <a:lnT w="6350" cap="flat" cmpd="sng" algn="ctr">
+                      <a:solidFill>
+                        <a:srgbClr val="CCCCCC"/>
+                      </a:solidFill>
+                      <a:prstDash val="solid"/>
+                      <a:round/>
+                      <a:headEnd type="none" w="med" len="med"/>
+                      <a:tailEnd type="none" w="med" len="med"/>
+                    </a:lnT>
+                    <a:lnB w="6350" cap="flat" cmpd="sng" algn="ctr">
+                      <a:solidFill>
+                        <a:srgbClr val="CCCCCC"/>
+                      </a:solidFill>
+                      <a:prstDash val="solid"/>
+                      <a:round/>
+                      <a:headEnd type="none" w="med" len="med"/>
+                      <a:tailEnd type="none" w="med" len="med"/>
+                    </a:lnB>
+                  </a:tcPr>
+                </a:tc>
+                <a:tc>
+                  <a:txBody>
+                    <a:bodyPr/>
+                    <a:lstStyle/>
+                    <a:p>
+                      <a:pPr marL="0" indent="0" algn="ctr">
+                        <a:buNone/>
+                      </a:pPr>
+                      <a:endParaRPr lang="en-US" sz="1100" dirty="0">
+                        <a:latin typeface="Calibri" charset="0"/>
+                        <a:ea typeface="Calibri" charset="0"/>
+                        <a:cs typeface="Calibri" charset="0"/>
+                      </a:endParaRPr>
+                    </a:p>
+                  </a:txBody>
+                  <a:tcPr marL="101600" marR="101600" marT="50800" marB="50800">
+                    <a:lnL w="6350" cap="flat" cmpd="sng" algn="ctr">
+                      <a:solidFill>
+                        <a:srgbClr val="CCCCCC"/>
+                      </a:solidFill>
+                      <a:prstDash val="solid"/>
+                      <a:round/>
+                      <a:headEnd type="none" w="med" len="med"/>
+                      <a:tailEnd type="none" w="med" len="med"/>
+                    </a:lnL>
+                    <a:lnR w="6350" cap="flat" cmpd="sng" algn="ctr">
+                      <a:solidFill>
+                        <a:srgbClr val="CCCCCC"/>
+                      </a:solidFill>
+                      <a:prstDash val="solid"/>
+                      <a:round/>
+                      <a:headEnd type="none" w="med" len="med"/>
+                      <a:tailEnd type="none" w="med" len="med"/>
+                    </a:lnR>
+                    <a:lnT w="6350" cap="flat" cmpd="sng" algn="ctr">
+                      <a:solidFill>
+                        <a:srgbClr val="CCCCCC"/>
+                      </a:solidFill>
+                      <a:prstDash val="solid"/>
+                      <a:round/>
+                      <a:headEnd type="none" w="med" len="med"/>
+                      <a:tailEnd type="none" w="med" len="med"/>
+                    </a:lnT>
+                    <a:lnB w="6350" cap="flat" cmpd="sng" algn="ctr">
+                      <a:solidFill>
+                        <a:srgbClr val="CCCCCC"/>
+                      </a:solidFill>
+                      <a:prstDash val="solid"/>
+                      <a:round/>
+                      <a:headEnd type="none" w="med" len="med"/>
+                      <a:tailEnd type="none" w="med" len="med"/>
+                    </a:lnB>
+                  </a:tcPr>
+                </a:tc>
+                <a:tc>
+                  <a:txBody>
+                    <a:bodyPr/>
+                    <a:lstStyle/>
+                    <a:p>
+                      <a:pPr marL="0" indent="0" algn="ctr">
+                        <a:buNone/>
+                      </a:pPr>
+                      <a:r>
+                        <a:rPr lang="en-US" sz="1100" dirty="0">
+                          <a:solidFill>
+                            <a:srgbClr val="000000"/>
+                          </a:solidFill>
+                          <a:latin typeface="Calibri" pitchFamily="34" charset="0"/>
+                          <a:ea typeface="Calibri" pitchFamily="34" charset="-122"/>
+                          <a:cs typeface="Calibri" pitchFamily="34" charset="-120"/>
+                        </a:rPr>
+                        <a:t>0.031***</a:t>
+                      </a:r>
+                      <a:endParaRPr lang="en-US" sz="1100" dirty="0">
+                        <a:latin typeface="Calibri" charset="0"/>
+                        <a:ea typeface="Calibri" charset="0"/>
+                        <a:cs typeface="Calibri" charset="0"/>
+                      </a:endParaRPr>
+                    </a:p>
+                  </a:txBody>
+                  <a:tcPr marL="101600" marR="101600" marT="50800" marB="50800">
+                    <a:lnL w="6350" cap="flat" cmpd="sng" algn="ctr">
+                      <a:solidFill>
+                        <a:srgbClr val="CCCCCC"/>
+                      </a:solidFill>
+                      <a:prstDash val="solid"/>
+                      <a:round/>
+                      <a:headEnd type="none" w="med" len="med"/>
+                      <a:tailEnd type="none" w="med" len="med"/>
+                    </a:lnL>
+                    <a:lnR w="6350" cap="flat" cmpd="sng" algn="ctr">
+                      <a:solidFill>
+                        <a:srgbClr val="CCCCCC"/>
+                      </a:solidFill>
+                      <a:prstDash val="solid"/>
+                      <a:round/>
+                      <a:headEnd type="none" w="med" len="med"/>
+                      <a:tailEnd type="none" w="med" len="med"/>
+                    </a:lnR>
+                    <a:lnT w="6350" cap="flat" cmpd="sng" algn="ctr">
+                      <a:solidFill>
+                        <a:srgbClr val="CCCCCC"/>
+                      </a:solidFill>
+                      <a:prstDash val="solid"/>
+                      <a:round/>
+                      <a:headEnd type="none" w="med" len="med"/>
+                      <a:tailEnd type="none" w="med" len="med"/>
+                    </a:lnT>
+                    <a:lnB w="6350" cap="flat" cmpd="sng" algn="ctr">
+                      <a:solidFill>
+                        <a:srgbClr val="CCCCCC"/>
+                      </a:solidFill>
+                      <a:prstDash val="solid"/>
+                      <a:round/>
+                      <a:headEnd type="none" w="med" len="med"/>
+                      <a:tailEnd type="none" w="med" len="med"/>
+                    </a:lnB>
+                  </a:tcPr>
+                </a:tc>
+                <a:extLst>
+                  <a:ext uri="{0D108BD9-81ED-4DB2-BD59-A6C34878D82A}">
+                    <a16:rowId xmlns:a16="http://schemas.microsoft.com/office/drawing/2014/main" val="10003"/>
+                  </a:ext>
+                </a:extLst>
+              </a:tr>
+              <a:tr h="275419">
+                <a:tc>
+                  <a:txBody>
+                    <a:bodyPr/>
+                    <a:lstStyle/>
+                    <a:p>
+                      <a:pPr marL="0" indent="0">
+                        <a:buNone/>
+                      </a:pPr>
+                      <a:r>
+                        <a:rPr lang="en-US" sz="1000" b="1" dirty="0">
+                          <a:latin typeface="Calibri" charset="0"/>
+                          <a:ea typeface="Calibri" charset="0"/>
+                          <a:cs typeface="Calibri" charset="0"/>
+                        </a:rPr>
+                        <a:t>Controls:</a:t>
+                      </a:r>
+                    </a:p>
+                  </a:txBody>
+                  <a:tcPr marL="101600" marR="101600" marT="50800" marB="50800">
+                    <a:lnL w="6350" cap="flat" cmpd="sng" algn="ctr">
+                      <a:solidFill>
+                        <a:srgbClr val="CCCCCC"/>
+                      </a:solidFill>
+                      <a:prstDash val="solid"/>
+                      <a:round/>
+                      <a:headEnd type="none" w="med" len="med"/>
+                      <a:tailEnd type="none" w="med" len="med"/>
+                    </a:lnL>
+                    <a:lnR w="6350" cap="flat" cmpd="sng" algn="ctr">
+                      <a:solidFill>
+                        <a:srgbClr val="CCCCCC"/>
+                      </a:solidFill>
+                      <a:prstDash val="solid"/>
+                      <a:round/>
+                      <a:headEnd type="none" w="med" len="med"/>
+                      <a:tailEnd type="none" w="med" len="med"/>
+                    </a:lnR>
+                    <a:lnT w="6350" cap="flat" cmpd="sng" algn="ctr">
+                      <a:solidFill>
+                        <a:srgbClr val="CCCCCC"/>
+                      </a:solidFill>
+                      <a:prstDash val="solid"/>
+                      <a:round/>
+                      <a:headEnd type="none" w="med" len="med"/>
+                      <a:tailEnd type="none" w="med" len="med"/>
+                    </a:lnT>
+                    <a:lnB w="6350" cap="flat" cmpd="sng" algn="ctr">
+                      <a:solidFill>
+                        <a:srgbClr val="CCCCCC"/>
+                      </a:solidFill>
+                      <a:prstDash val="solid"/>
+                      <a:round/>
+                      <a:headEnd type="none" w="med" len="med"/>
+                      <a:tailEnd type="none" w="med" len="med"/>
+                    </a:lnB>
+                  </a:tcPr>
+                </a:tc>
+                <a:tc>
+                  <a:txBody>
+                    <a:bodyPr/>
+                    <a:lstStyle/>
+                    <a:p>
+                      <a:pPr marL="0" indent="0" algn="ctr">
+                        <a:buNone/>
+                      </a:pPr>
+                      <a:endParaRPr lang="en-US" sz="1000" dirty="0">
+                        <a:latin typeface="Calibri" charset="0"/>
+                        <a:ea typeface="Calibri" charset="0"/>
+                        <a:cs typeface="Calibri" charset="0"/>
+                      </a:endParaRPr>
+                    </a:p>
+                  </a:txBody>
+                  <a:tcPr marL="101600" marR="101600" marT="50800" marB="50800">
+                    <a:lnL w="6350" cap="flat" cmpd="sng" algn="ctr">
+                      <a:solidFill>
+                        <a:srgbClr val="CCCCCC"/>
+                      </a:solidFill>
+                      <a:prstDash val="solid"/>
+                      <a:round/>
+                      <a:headEnd type="none" w="med" len="med"/>
+                      <a:tailEnd type="none" w="med" len="med"/>
+                    </a:lnL>
+                    <a:lnR w="6350" cap="flat" cmpd="sng" algn="ctr">
+                      <a:solidFill>
+                        <a:srgbClr val="CCCCCC"/>
+                      </a:solidFill>
+                      <a:prstDash val="solid"/>
+                      <a:round/>
+                      <a:headEnd type="none" w="med" len="med"/>
+                      <a:tailEnd type="none" w="med" len="med"/>
+                    </a:lnR>
+                    <a:lnT w="6350" cap="flat" cmpd="sng" algn="ctr">
+                      <a:solidFill>
+                        <a:srgbClr val="CCCCCC"/>
+                      </a:solidFill>
+                      <a:prstDash val="solid"/>
+                      <a:round/>
+                      <a:headEnd type="none" w="med" len="med"/>
+                      <a:tailEnd type="none" w="med" len="med"/>
+                    </a:lnT>
+                    <a:lnB w="6350" cap="flat" cmpd="sng" algn="ctr">
+                      <a:solidFill>
+                        <a:srgbClr val="CCCCCC"/>
+                      </a:solidFill>
+                      <a:prstDash val="solid"/>
+                      <a:round/>
+                      <a:headEnd type="none" w="med" len="med"/>
+                      <a:tailEnd type="none" w="med" len="med"/>
+                    </a:lnB>
+                  </a:tcPr>
+                </a:tc>
+                <a:tc>
+                  <a:txBody>
+                    <a:bodyPr/>
+                    <a:lstStyle/>
+                    <a:p>
+                      <a:pPr marL="0" indent="0" algn="ctr">
+                        <a:buNone/>
+                      </a:pPr>
+                      <a:r>
+                        <a:rPr lang="en-US" sz="1000" dirty="0">
+                          <a:solidFill>
+                            <a:srgbClr val="7A8084"/>
+                          </a:solidFill>
+                          <a:latin typeface="Calibri" pitchFamily="34" charset="0"/>
+                          <a:ea typeface="Calibri" pitchFamily="34" charset="-122"/>
+                          <a:cs typeface="Calibri" pitchFamily="34" charset="-120"/>
+                        </a:rPr>
+                        <a:t>(0.012)</a:t>
+                      </a:r>
+                      <a:endParaRPr lang="en-US" sz="1000" dirty="0">
+                        <a:latin typeface="Calibri" charset="0"/>
+                        <a:ea typeface="Calibri" charset="0"/>
+                        <a:cs typeface="Calibri" charset="0"/>
+                      </a:endParaRPr>
+                    </a:p>
+                  </a:txBody>
+                  <a:tcPr marL="101600" marR="101600" marT="50800" marB="50800">
+                    <a:lnL w="6350" cap="flat" cmpd="sng" algn="ctr">
+                      <a:solidFill>
+                        <a:srgbClr val="CCCCCC"/>
+                      </a:solidFill>
+                      <a:prstDash val="solid"/>
+                      <a:round/>
+                      <a:headEnd type="none" w="med" len="med"/>
+                      <a:tailEnd type="none" w="med" len="med"/>
+                    </a:lnL>
+                    <a:lnR w="6350" cap="flat" cmpd="sng" algn="ctr">
+                      <a:solidFill>
+                        <a:srgbClr val="CCCCCC"/>
+                      </a:solidFill>
+                      <a:prstDash val="solid"/>
+                      <a:round/>
+                      <a:headEnd type="none" w="med" len="med"/>
+                      <a:tailEnd type="none" w="med" len="med"/>
+                    </a:lnR>
+                    <a:lnT w="6350" cap="flat" cmpd="sng" algn="ctr">
+                      <a:solidFill>
+                        <a:srgbClr val="CCCCCC"/>
+                      </a:solidFill>
+                      <a:prstDash val="solid"/>
+                      <a:round/>
+                      <a:headEnd type="none" w="med" len="med"/>
+                      <a:tailEnd type="none" w="med" len="med"/>
+                    </a:lnT>
+                    <a:lnB w="6350" cap="flat" cmpd="sng" algn="ctr">
+                      <a:solidFill>
+                        <a:srgbClr val="CCCCCC"/>
+                      </a:solidFill>
+                      <a:prstDash val="solid"/>
+                      <a:round/>
+                      <a:headEnd type="none" w="med" len="med"/>
+                      <a:tailEnd type="none" w="med" len="med"/>
+                    </a:lnB>
+                  </a:tcPr>
+                </a:tc>
+                <a:extLst>
+                  <a:ext uri="{0D108BD9-81ED-4DB2-BD59-A6C34878D82A}">
+                    <a16:rowId xmlns:a16="http://schemas.microsoft.com/office/drawing/2014/main" val="10004"/>
+                  </a:ext>
+                </a:extLst>
+              </a:tr>
+              <a:tr h="275419">
+                <a:tc>
+                  <a:txBody>
+                    <a:bodyPr/>
+                    <a:lstStyle/>
+                    <a:p>
+                      <a:pPr marL="0" indent="0">
+                        <a:buNone/>
+                      </a:pPr>
+                      <a:r>
+                        <a:rPr lang="en-US" sz="1100" dirty="0">
+                          <a:solidFill>
+                            <a:srgbClr val="000000"/>
+                          </a:solidFill>
+                          <a:latin typeface="Calibri" pitchFamily="34" charset="0"/>
+                          <a:ea typeface="Calibri" pitchFamily="34" charset="-122"/>
+                          <a:cs typeface="Calibri" pitchFamily="34" charset="-120"/>
+                        </a:rPr>
+                        <a:t>Num. authors</a:t>
+                      </a:r>
+                      <a:endParaRPr lang="en-US" sz="1100" dirty="0">
+                        <a:latin typeface="Calibri" charset="0"/>
+                        <a:ea typeface="Calibri" charset="0"/>
+                        <a:cs typeface="Calibri" charset="0"/>
+                      </a:endParaRPr>
+                    </a:p>
+                  </a:txBody>
+                  <a:tcPr marL="101600" marR="101600" marT="50800" marB="50800">
+                    <a:lnL w="6350" cap="flat" cmpd="sng" algn="ctr">
+                      <a:solidFill>
+                        <a:srgbClr val="CCCCCC"/>
+                      </a:solidFill>
+                      <a:prstDash val="solid"/>
+                      <a:round/>
+                      <a:headEnd type="none" w="med" len="med"/>
+                      <a:tailEnd type="none" w="med" len="med"/>
+                    </a:lnL>
+                    <a:lnR w="6350" cap="flat" cmpd="sng" algn="ctr">
+                      <a:solidFill>
+                        <a:srgbClr val="CCCCCC"/>
+                      </a:solidFill>
+                      <a:prstDash val="solid"/>
+                      <a:round/>
+                      <a:headEnd type="none" w="med" len="med"/>
+                      <a:tailEnd type="none" w="med" len="med"/>
+                    </a:lnR>
+                    <a:lnT w="6350" cap="flat" cmpd="sng" algn="ctr">
+                      <a:solidFill>
+                        <a:srgbClr val="CCCCCC"/>
+                      </a:solidFill>
+                      <a:prstDash val="solid"/>
+                      <a:round/>
+                      <a:headEnd type="none" w="med" len="med"/>
+                      <a:tailEnd type="none" w="med" len="med"/>
+                    </a:lnT>
+                    <a:lnB w="6350" cap="flat" cmpd="sng" algn="ctr">
+                      <a:solidFill>
+                        <a:srgbClr val="CCCCCC"/>
+                      </a:solidFill>
+                      <a:prstDash val="solid"/>
+                      <a:round/>
+                      <a:headEnd type="none" w="med" len="med"/>
+                      <a:tailEnd type="none" w="med" len="med"/>
+                    </a:lnB>
+                  </a:tcPr>
+                </a:tc>
+                <a:tc>
+                  <a:txBody>
+                    <a:bodyPr/>
+                    <a:lstStyle/>
+                    <a:p>
+                      <a:pPr marL="0" indent="0" algn="ctr">
+                        <a:buNone/>
+                      </a:pPr>
+                      <a:r>
+                        <a:rPr lang="en-US" sz="1100" dirty="0">
+                          <a:solidFill>
+                            <a:srgbClr val="000000"/>
+                          </a:solidFill>
+                          <a:latin typeface="Calibri" pitchFamily="34" charset="0"/>
+                          <a:ea typeface="Calibri" pitchFamily="34" charset="-122"/>
+                          <a:cs typeface="Calibri" pitchFamily="34" charset="-120"/>
+                        </a:rPr>
+                        <a:t>0.001</a:t>
+                      </a:r>
+                      <a:endParaRPr lang="en-US" sz="1100" dirty="0">
+                        <a:latin typeface="Calibri" charset="0"/>
+                        <a:ea typeface="Calibri" charset="0"/>
+                        <a:cs typeface="Calibri" charset="0"/>
+                      </a:endParaRPr>
+                    </a:p>
+                  </a:txBody>
+                  <a:tcPr marL="101600" marR="101600" marT="50800" marB="50800">
+                    <a:lnL w="6350" cap="flat" cmpd="sng" algn="ctr">
+                      <a:solidFill>
+                        <a:srgbClr val="CCCCCC"/>
+                      </a:solidFill>
+                      <a:prstDash val="solid"/>
+                      <a:round/>
+                      <a:headEnd type="none" w="med" len="med"/>
+                      <a:tailEnd type="none" w="med" len="med"/>
+                    </a:lnL>
+                    <a:lnR w="6350" cap="flat" cmpd="sng" algn="ctr">
+                      <a:solidFill>
+                        <a:srgbClr val="CCCCCC"/>
+                      </a:solidFill>
+                      <a:prstDash val="solid"/>
+                      <a:round/>
+                      <a:headEnd type="none" w="med" len="med"/>
+                      <a:tailEnd type="none" w="med" len="med"/>
+                    </a:lnR>
+                    <a:lnT w="6350" cap="flat" cmpd="sng" algn="ctr">
+                      <a:solidFill>
+                        <a:srgbClr val="CCCCCC"/>
+                      </a:solidFill>
+                      <a:prstDash val="solid"/>
+                      <a:round/>
+                      <a:headEnd type="none" w="med" len="med"/>
+                      <a:tailEnd type="none" w="med" len="med"/>
+                    </a:lnT>
+                    <a:lnB w="6350" cap="flat" cmpd="sng" algn="ctr">
+                      <a:solidFill>
+                        <a:srgbClr val="CCCCCC"/>
+                      </a:solidFill>
+                      <a:prstDash val="solid"/>
+                      <a:round/>
+                      <a:headEnd type="none" w="med" len="med"/>
+                      <a:tailEnd type="none" w="med" len="med"/>
+                    </a:lnB>
+                  </a:tcPr>
+                </a:tc>
+                <a:tc>
+                  <a:txBody>
+                    <a:bodyPr/>
+                    <a:lstStyle/>
+                    <a:p>
+                      <a:pPr marL="0" indent="0" algn="ctr">
+                        <a:buNone/>
+                      </a:pPr>
+                      <a:r>
+                        <a:rPr lang="en-US" sz="1100" dirty="0">
+                          <a:solidFill>
+                            <a:srgbClr val="000000"/>
+                          </a:solidFill>
+                          <a:latin typeface="Calibri" pitchFamily="34" charset="0"/>
+                          <a:ea typeface="Calibri" pitchFamily="34" charset="-122"/>
+                          <a:cs typeface="Calibri" pitchFamily="34" charset="-120"/>
+                        </a:rPr>
+                        <a:t>0.001</a:t>
+                      </a:r>
+                      <a:endParaRPr lang="en-US" sz="1100" dirty="0">
+                        <a:latin typeface="Calibri" charset="0"/>
+                        <a:ea typeface="Calibri" charset="0"/>
+                        <a:cs typeface="Calibri" charset="0"/>
+                      </a:endParaRPr>
+                    </a:p>
+                  </a:txBody>
+                  <a:tcPr marL="101600" marR="101600" marT="50800" marB="50800">
+                    <a:lnL w="6350" cap="flat" cmpd="sng" algn="ctr">
+                      <a:solidFill>
+                        <a:srgbClr val="CCCCCC"/>
+                      </a:solidFill>
+                      <a:prstDash val="solid"/>
+                      <a:round/>
+                      <a:headEnd type="none" w="med" len="med"/>
+                      <a:tailEnd type="none" w="med" len="med"/>
+                    </a:lnL>
+                    <a:lnR w="6350" cap="flat" cmpd="sng" algn="ctr">
+                      <a:solidFill>
+                        <a:srgbClr val="CCCCCC"/>
+                      </a:solidFill>
+                      <a:prstDash val="solid"/>
+                      <a:round/>
+                      <a:headEnd type="none" w="med" len="med"/>
+                      <a:tailEnd type="none" w="med" len="med"/>
+                    </a:lnR>
+                    <a:lnT w="6350" cap="flat" cmpd="sng" algn="ctr">
+                      <a:solidFill>
+                        <a:srgbClr val="CCCCCC"/>
+                      </a:solidFill>
+                      <a:prstDash val="solid"/>
+                      <a:round/>
+                      <a:headEnd type="none" w="med" len="med"/>
+                      <a:tailEnd type="none" w="med" len="med"/>
+                    </a:lnT>
+                    <a:lnB w="6350" cap="flat" cmpd="sng" algn="ctr">
+                      <a:solidFill>
+                        <a:srgbClr val="CCCCCC"/>
+                      </a:solidFill>
+                      <a:prstDash val="solid"/>
+                      <a:round/>
+                      <a:headEnd type="none" w="med" len="med"/>
+                      <a:tailEnd type="none" w="med" len="med"/>
+                    </a:lnB>
+                  </a:tcPr>
+                </a:tc>
+                <a:extLst>
+                  <a:ext uri="{0D108BD9-81ED-4DB2-BD59-A6C34878D82A}">
+                    <a16:rowId xmlns:a16="http://schemas.microsoft.com/office/drawing/2014/main" val="10005"/>
+                  </a:ext>
+                </a:extLst>
+              </a:tr>
+              <a:tr h="275419">
+                <a:tc>
+                  <a:txBody>
+                    <a:bodyPr/>
+                    <a:lstStyle/>
+                    <a:p>
+                      <a:pPr marL="0" indent="0">
+                        <a:buNone/>
+                      </a:pPr>
+                      <a:r>
+                        <a:rPr lang="en-US" sz="1100" dirty="0">
+                          <a:solidFill>
+                            <a:srgbClr val="000000"/>
+                          </a:solidFill>
+                          <a:latin typeface="Calibri" pitchFamily="34" charset="0"/>
+                          <a:ea typeface="Calibri" pitchFamily="34" charset="-122"/>
+                          <a:cs typeface="Calibri" pitchFamily="34" charset="-120"/>
+                        </a:rPr>
+                        <a:t>Distinct institutions</a:t>
+                      </a:r>
+                      <a:endParaRPr lang="en-US" sz="1100" dirty="0">
+                        <a:latin typeface="Calibri" charset="0"/>
+                        <a:ea typeface="Calibri" charset="0"/>
+                        <a:cs typeface="Calibri" charset="0"/>
+                      </a:endParaRPr>
+                    </a:p>
+                  </a:txBody>
+                  <a:tcPr marL="101600" marR="101600" marT="50800" marB="50800">
+                    <a:lnL w="6350" cap="flat" cmpd="sng" algn="ctr">
+                      <a:solidFill>
+                        <a:srgbClr val="CCCCCC"/>
+                      </a:solidFill>
+                      <a:prstDash val="solid"/>
+                      <a:round/>
+                      <a:headEnd type="none" w="med" len="med"/>
+                      <a:tailEnd type="none" w="med" len="med"/>
+                    </a:lnL>
+                    <a:lnR w="6350" cap="flat" cmpd="sng" algn="ctr">
+                      <a:solidFill>
+                        <a:srgbClr val="CCCCCC"/>
+                      </a:solidFill>
+                      <a:prstDash val="solid"/>
+                      <a:round/>
+                      <a:headEnd type="none" w="med" len="med"/>
+                      <a:tailEnd type="none" w="med" len="med"/>
+                    </a:lnR>
+                    <a:lnT w="6350" cap="flat" cmpd="sng" algn="ctr">
+                      <a:solidFill>
+                        <a:srgbClr val="CCCCCC"/>
+                      </a:solidFill>
+                      <a:prstDash val="solid"/>
+                      <a:round/>
+                      <a:headEnd type="none" w="med" len="med"/>
+                      <a:tailEnd type="none" w="med" len="med"/>
+                    </a:lnT>
+                    <a:lnB w="6350" cap="flat" cmpd="sng" algn="ctr">
+                      <a:solidFill>
+                        <a:srgbClr val="CCCCCC"/>
+                      </a:solidFill>
+                      <a:prstDash val="solid"/>
+                      <a:round/>
+                      <a:headEnd type="none" w="med" len="med"/>
+                      <a:tailEnd type="none" w="med" len="med"/>
+                    </a:lnB>
+                  </a:tcPr>
+                </a:tc>
+                <a:tc>
+                  <a:txBody>
+                    <a:bodyPr/>
+                    <a:lstStyle/>
+                    <a:p>
+                      <a:pPr marL="0" indent="0" algn="ctr">
+                        <a:buNone/>
+                      </a:pPr>
+                      <a:r>
+                        <a:rPr lang="en-US" sz="1100" dirty="0">
+                          <a:solidFill>
+                            <a:srgbClr val="000000"/>
+                          </a:solidFill>
+                          <a:latin typeface="Calibri" pitchFamily="34" charset="0"/>
+                          <a:ea typeface="Calibri" pitchFamily="34" charset="-122"/>
+                          <a:cs typeface="Calibri" pitchFamily="34" charset="-120"/>
+                        </a:rPr>
+                        <a:t>–0.000***</a:t>
+                      </a:r>
+                      <a:endParaRPr lang="en-US" sz="1100" dirty="0">
+                        <a:latin typeface="Calibri" charset="0"/>
+                        <a:ea typeface="Calibri" charset="0"/>
+                        <a:cs typeface="Calibri" charset="0"/>
+                      </a:endParaRPr>
+                    </a:p>
+                  </a:txBody>
+                  <a:tcPr marL="101600" marR="101600" marT="50800" marB="50800">
+                    <a:lnL w="6350" cap="flat" cmpd="sng" algn="ctr">
+                      <a:solidFill>
+                        <a:srgbClr val="CCCCCC"/>
+                      </a:solidFill>
+                      <a:prstDash val="solid"/>
+                      <a:round/>
+                      <a:headEnd type="none" w="med" len="med"/>
+                      <a:tailEnd type="none" w="med" len="med"/>
+                    </a:lnL>
+                    <a:lnR w="6350" cap="flat" cmpd="sng" algn="ctr">
+                      <a:solidFill>
+                        <a:srgbClr val="CCCCCC"/>
+                      </a:solidFill>
+                      <a:prstDash val="solid"/>
+                      <a:round/>
+                      <a:headEnd type="none" w="med" len="med"/>
+                      <a:tailEnd type="none" w="med" len="med"/>
+                    </a:lnR>
+                    <a:lnT w="6350" cap="flat" cmpd="sng" algn="ctr">
+                      <a:solidFill>
+                        <a:srgbClr val="CCCCCC"/>
+                      </a:solidFill>
+                      <a:prstDash val="solid"/>
+                      <a:round/>
+                      <a:headEnd type="none" w="med" len="med"/>
+                      <a:tailEnd type="none" w="med" len="med"/>
+                    </a:lnT>
+                    <a:lnB w="6350" cap="flat" cmpd="sng" algn="ctr">
+                      <a:solidFill>
+                        <a:srgbClr val="CCCCCC"/>
+                      </a:solidFill>
+                      <a:prstDash val="solid"/>
+                      <a:round/>
+                      <a:headEnd type="none" w="med" len="med"/>
+                      <a:tailEnd type="none" w="med" len="med"/>
+                    </a:lnB>
+                  </a:tcPr>
+                </a:tc>
+                <a:tc>
+                  <a:txBody>
+                    <a:bodyPr/>
+                    <a:lstStyle/>
+                    <a:p>
+                      <a:pPr marL="0" indent="0" algn="ctr">
+                        <a:buNone/>
+                      </a:pPr>
+                      <a:r>
+                        <a:rPr lang="en-US" sz="1100" dirty="0">
+                          <a:solidFill>
+                            <a:srgbClr val="000000"/>
+                          </a:solidFill>
+                          <a:latin typeface="Calibri" pitchFamily="34" charset="0"/>
+                          <a:ea typeface="Calibri" pitchFamily="34" charset="-122"/>
+                          <a:cs typeface="Calibri" pitchFamily="34" charset="-120"/>
+                        </a:rPr>
+                        <a:t>–0.000***</a:t>
+                      </a:r>
+                      <a:endParaRPr lang="en-US" sz="1100" dirty="0">
+                        <a:latin typeface="Calibri" charset="0"/>
+                        <a:ea typeface="Calibri" charset="0"/>
+                        <a:cs typeface="Calibri" charset="0"/>
+                      </a:endParaRPr>
+                    </a:p>
+                  </a:txBody>
+                  <a:tcPr marL="101600" marR="101600" marT="50800" marB="50800">
+                    <a:lnL w="6350" cap="flat" cmpd="sng" algn="ctr">
+                      <a:solidFill>
+                        <a:srgbClr val="CCCCCC"/>
+                      </a:solidFill>
+                      <a:prstDash val="solid"/>
+                      <a:round/>
+                      <a:headEnd type="none" w="med" len="med"/>
+                      <a:tailEnd type="none" w="med" len="med"/>
+                    </a:lnL>
+                    <a:lnR w="6350" cap="flat" cmpd="sng" algn="ctr">
+                      <a:solidFill>
+                        <a:srgbClr val="CCCCCC"/>
+                      </a:solidFill>
+                      <a:prstDash val="solid"/>
+                      <a:round/>
+                      <a:headEnd type="none" w="med" len="med"/>
+                      <a:tailEnd type="none" w="med" len="med"/>
+                    </a:lnR>
+                    <a:lnT w="6350" cap="flat" cmpd="sng" algn="ctr">
+                      <a:solidFill>
+                        <a:srgbClr val="CCCCCC"/>
+                      </a:solidFill>
+                      <a:prstDash val="solid"/>
+                      <a:round/>
+                      <a:headEnd type="none" w="med" len="med"/>
+                      <a:tailEnd type="none" w="med" len="med"/>
+                    </a:lnT>
+                    <a:lnB w="6350" cap="flat" cmpd="sng" algn="ctr">
+                      <a:solidFill>
+                        <a:srgbClr val="CCCCCC"/>
+                      </a:solidFill>
+                      <a:prstDash val="solid"/>
+                      <a:round/>
+                      <a:headEnd type="none" w="med" len="med"/>
+                      <a:tailEnd type="none" w="med" len="med"/>
+                    </a:lnB>
+                  </a:tcPr>
+                </a:tc>
+                <a:extLst>
+                  <a:ext uri="{0D108BD9-81ED-4DB2-BD59-A6C34878D82A}">
+                    <a16:rowId xmlns:a16="http://schemas.microsoft.com/office/drawing/2014/main" val="10006"/>
+                  </a:ext>
+                </a:extLst>
+              </a:tr>
+              <a:tr h="275419">
+                <a:tc>
+                  <a:txBody>
+                    <a:bodyPr/>
+                    <a:lstStyle/>
+                    <a:p>
+                      <a:pPr marL="0" indent="0">
+                        <a:buNone/>
+                      </a:pPr>
+                      <a:r>
+                        <a:rPr lang="en-US" sz="1100" dirty="0">
+                          <a:solidFill>
+                            <a:srgbClr val="000000"/>
+                          </a:solidFill>
+                          <a:latin typeface="Calibri" pitchFamily="34" charset="0"/>
+                          <a:ea typeface="Calibri" pitchFamily="34" charset="-122"/>
+                          <a:cs typeface="Calibri" pitchFamily="34" charset="-120"/>
+                        </a:rPr>
+                        <a:t>Distinct countries</a:t>
+                      </a:r>
+                      <a:endParaRPr lang="en-US" sz="1100" dirty="0">
+                        <a:latin typeface="Calibri" charset="0"/>
+                        <a:ea typeface="Calibri" charset="0"/>
+                        <a:cs typeface="Calibri" charset="0"/>
+                      </a:endParaRPr>
+                    </a:p>
+                  </a:txBody>
+                  <a:tcPr marL="101600" marR="101600" marT="50800" marB="50800">
+                    <a:lnL w="6350" cap="flat" cmpd="sng" algn="ctr">
+                      <a:solidFill>
+                        <a:srgbClr val="CCCCCC"/>
+                      </a:solidFill>
+                      <a:prstDash val="solid"/>
+                      <a:round/>
+                      <a:headEnd type="none" w="med" len="med"/>
+                      <a:tailEnd type="none" w="med" len="med"/>
+                    </a:lnL>
+                    <a:lnR w="6350" cap="flat" cmpd="sng" algn="ctr">
+                      <a:solidFill>
+                        <a:srgbClr val="CCCCCC"/>
+                      </a:solidFill>
+                      <a:prstDash val="solid"/>
+                      <a:round/>
+                      <a:headEnd type="none" w="med" len="med"/>
+                      <a:tailEnd type="none" w="med" len="med"/>
+                    </a:lnR>
+                    <a:lnT w="6350" cap="flat" cmpd="sng" algn="ctr">
+                      <a:solidFill>
+                        <a:srgbClr val="CCCCCC"/>
+                      </a:solidFill>
+                      <a:prstDash val="solid"/>
+                      <a:round/>
+                      <a:headEnd type="none" w="med" len="med"/>
+                      <a:tailEnd type="none" w="med" len="med"/>
+                    </a:lnT>
+                    <a:lnB w="6350" cap="flat" cmpd="sng" algn="ctr">
+                      <a:solidFill>
+                        <a:srgbClr val="CCCCCC"/>
+                      </a:solidFill>
+                      <a:prstDash val="solid"/>
+                      <a:round/>
+                      <a:headEnd type="none" w="med" len="med"/>
+                      <a:tailEnd type="none" w="med" len="med"/>
+                    </a:lnB>
+                  </a:tcPr>
+                </a:tc>
+                <a:tc>
+                  <a:txBody>
+                    <a:bodyPr/>
+                    <a:lstStyle/>
+                    <a:p>
+                      <a:pPr marL="0" indent="0" algn="ctr">
+                        <a:buNone/>
+                      </a:pPr>
+                      <a:r>
+                        <a:rPr lang="en-US" sz="1100" dirty="0">
+                          <a:solidFill>
+                            <a:srgbClr val="000000"/>
+                          </a:solidFill>
+                          <a:latin typeface="Calibri" pitchFamily="34" charset="0"/>
+                          <a:ea typeface="Calibri" pitchFamily="34" charset="-122"/>
+                          <a:cs typeface="Calibri" pitchFamily="34" charset="-120"/>
+                        </a:rPr>
+                        <a:t>0.015***</a:t>
+                      </a:r>
+                      <a:endParaRPr lang="en-US" sz="1100" dirty="0">
+                        <a:latin typeface="Calibri" charset="0"/>
+                        <a:ea typeface="Calibri" charset="0"/>
+                        <a:cs typeface="Calibri" charset="0"/>
+                      </a:endParaRPr>
+                    </a:p>
+                  </a:txBody>
+                  <a:tcPr marL="101600" marR="101600" marT="50800" marB="50800">
+                    <a:lnL w="6350" cap="flat" cmpd="sng" algn="ctr">
+                      <a:solidFill>
+                        <a:srgbClr val="CCCCCC"/>
+                      </a:solidFill>
+                      <a:prstDash val="solid"/>
+                      <a:round/>
+                      <a:headEnd type="none" w="med" len="med"/>
+                      <a:tailEnd type="none" w="med" len="med"/>
+                    </a:lnL>
+                    <a:lnR w="6350" cap="flat" cmpd="sng" algn="ctr">
+                      <a:solidFill>
+                        <a:srgbClr val="CCCCCC"/>
+                      </a:solidFill>
+                      <a:prstDash val="solid"/>
+                      <a:round/>
+                      <a:headEnd type="none" w="med" len="med"/>
+                      <a:tailEnd type="none" w="med" len="med"/>
+                    </a:lnR>
+                    <a:lnT w="6350" cap="flat" cmpd="sng" algn="ctr">
+                      <a:solidFill>
+                        <a:srgbClr val="CCCCCC"/>
+                      </a:solidFill>
+                      <a:prstDash val="solid"/>
+                      <a:round/>
+                      <a:headEnd type="none" w="med" len="med"/>
+                      <a:tailEnd type="none" w="med" len="med"/>
+                    </a:lnT>
+                    <a:lnB w="6350" cap="flat" cmpd="sng" algn="ctr">
+                      <a:solidFill>
+                        <a:srgbClr val="CCCCCC"/>
+                      </a:solidFill>
+                      <a:prstDash val="solid"/>
+                      <a:round/>
+                      <a:headEnd type="none" w="med" len="med"/>
+                      <a:tailEnd type="none" w="med" len="med"/>
+                    </a:lnB>
+                  </a:tcPr>
+                </a:tc>
+                <a:tc>
+                  <a:txBody>
+                    <a:bodyPr/>
+                    <a:lstStyle/>
+                    <a:p>
+                      <a:pPr marL="0" indent="0" algn="ctr">
+                        <a:buNone/>
+                      </a:pPr>
+                      <a:r>
+                        <a:rPr lang="en-US" sz="1100" dirty="0">
+                          <a:solidFill>
+                            <a:srgbClr val="000000"/>
+                          </a:solidFill>
+                          <a:latin typeface="Calibri" pitchFamily="34" charset="0"/>
+                          <a:ea typeface="Calibri" pitchFamily="34" charset="-122"/>
+                          <a:cs typeface="Calibri" pitchFamily="34" charset="-120"/>
+                        </a:rPr>
+                        <a:t>0.015***</a:t>
+                      </a:r>
+                      <a:endParaRPr lang="en-US" sz="1100" dirty="0">
+                        <a:latin typeface="Calibri" charset="0"/>
+                        <a:ea typeface="Calibri" charset="0"/>
+                        <a:cs typeface="Calibri" charset="0"/>
+                      </a:endParaRPr>
+                    </a:p>
+                  </a:txBody>
+                  <a:tcPr marL="101600" marR="101600" marT="50800" marB="50800">
+                    <a:lnL w="6350" cap="flat" cmpd="sng" algn="ctr">
+                      <a:solidFill>
+                        <a:srgbClr val="CCCCCC"/>
+                      </a:solidFill>
+                      <a:prstDash val="solid"/>
+                      <a:round/>
+                      <a:headEnd type="none" w="med" len="med"/>
+                      <a:tailEnd type="none" w="med" len="med"/>
+                    </a:lnL>
+                    <a:lnR w="6350" cap="flat" cmpd="sng" algn="ctr">
+                      <a:solidFill>
+                        <a:srgbClr val="CCCCCC"/>
+                      </a:solidFill>
+                      <a:prstDash val="solid"/>
+                      <a:round/>
+                      <a:headEnd type="none" w="med" len="med"/>
+                      <a:tailEnd type="none" w="med" len="med"/>
+                    </a:lnR>
+                    <a:lnT w="6350" cap="flat" cmpd="sng" algn="ctr">
+                      <a:solidFill>
+                        <a:srgbClr val="CCCCCC"/>
+                      </a:solidFill>
+                      <a:prstDash val="solid"/>
+                      <a:round/>
+                      <a:headEnd type="none" w="med" len="med"/>
+                      <a:tailEnd type="none" w="med" len="med"/>
+                    </a:lnT>
+                    <a:lnB w="6350" cap="flat" cmpd="sng" algn="ctr">
+                      <a:solidFill>
+                        <a:srgbClr val="CCCCCC"/>
+                      </a:solidFill>
+                      <a:prstDash val="solid"/>
+                      <a:round/>
+                      <a:headEnd type="none" w="med" len="med"/>
+                      <a:tailEnd type="none" w="med" len="med"/>
+                    </a:lnB>
+                  </a:tcPr>
+                </a:tc>
+                <a:extLst>
+                  <a:ext uri="{0D108BD9-81ED-4DB2-BD59-A6C34878D82A}">
+                    <a16:rowId xmlns:a16="http://schemas.microsoft.com/office/drawing/2014/main" val="10007"/>
+                  </a:ext>
+                </a:extLst>
+              </a:tr>
+              <a:tr h="275419">
+                <a:tc>
+                  <a:txBody>
+                    <a:bodyPr/>
+                    <a:lstStyle/>
+                    <a:p>
+                      <a:pPr marL="0" indent="0">
+                        <a:buNone/>
+                      </a:pPr>
+                      <a:endParaRPr lang="en-US" sz="400" dirty="0">
+                        <a:latin typeface="Calibri" charset="0"/>
+                        <a:ea typeface="Calibri" charset="0"/>
+                        <a:cs typeface="Calibri" charset="0"/>
+                      </a:endParaRPr>
+                    </a:p>
+                  </a:txBody>
+                  <a:tcPr marL="101600" marR="101600" marT="50800" marB="50800">
+                    <a:lnL w="6350" cap="flat" cmpd="sng" algn="ctr">
+                      <a:solidFill>
+                        <a:srgbClr val="CCCCCC"/>
+                      </a:solidFill>
+                      <a:prstDash val="solid"/>
+                      <a:round/>
+                      <a:headEnd type="none" w="med" len="med"/>
+                      <a:tailEnd type="none" w="med" len="med"/>
+                    </a:lnL>
+                    <a:lnR w="6350" cap="flat" cmpd="sng" algn="ctr">
+                      <a:solidFill>
+                        <a:srgbClr val="CCCCCC"/>
+                      </a:solidFill>
+                      <a:prstDash val="solid"/>
+                      <a:round/>
+                      <a:headEnd type="none" w="med" len="med"/>
+                      <a:tailEnd type="none" w="med" len="med"/>
+                    </a:lnR>
+                    <a:lnT w="6350" cap="flat" cmpd="sng" algn="ctr">
+                      <a:solidFill>
+                        <a:srgbClr val="CCCCCC"/>
+                      </a:solidFill>
+                      <a:prstDash val="solid"/>
+                      <a:round/>
+                      <a:headEnd type="none" w="med" len="med"/>
+                      <a:tailEnd type="none" w="med" len="med"/>
+                    </a:lnT>
+                    <a:lnB w="6350" cap="flat" cmpd="sng" algn="ctr">
+                      <a:solidFill>
+                        <a:srgbClr val="CCCCCC"/>
+                      </a:solidFill>
+                      <a:prstDash val="solid"/>
+                      <a:round/>
+                      <a:headEnd type="none" w="med" len="med"/>
+                      <a:tailEnd type="none" w="med" len="med"/>
+                    </a:lnB>
+                  </a:tcPr>
+                </a:tc>
+                <a:tc>
+                  <a:txBody>
+                    <a:bodyPr/>
+                    <a:lstStyle/>
+                    <a:p>
+                      <a:pPr marL="0" indent="0">
+                        <a:buNone/>
+                      </a:pPr>
+                      <a:endParaRPr lang="en-US" sz="400" dirty="0">
+                        <a:latin typeface="Calibri" charset="0"/>
+                        <a:ea typeface="Calibri" charset="0"/>
+                        <a:cs typeface="Calibri" charset="0"/>
+                      </a:endParaRPr>
+                    </a:p>
+                  </a:txBody>
+                  <a:tcPr marL="101600" marR="101600" marT="50800" marB="50800">
+                    <a:lnL w="6350" cap="flat" cmpd="sng" algn="ctr">
+                      <a:solidFill>
+                        <a:srgbClr val="CCCCCC"/>
+                      </a:solidFill>
+                      <a:prstDash val="solid"/>
+                      <a:round/>
+                      <a:headEnd type="none" w="med" len="med"/>
+                      <a:tailEnd type="none" w="med" len="med"/>
+                    </a:lnL>
+                    <a:lnR w="6350" cap="flat" cmpd="sng" algn="ctr">
+                      <a:solidFill>
+                        <a:srgbClr val="CCCCCC"/>
+                      </a:solidFill>
+                      <a:prstDash val="solid"/>
+                      <a:round/>
+                      <a:headEnd type="none" w="med" len="med"/>
+                      <a:tailEnd type="none" w="med" len="med"/>
+                    </a:lnR>
+                    <a:lnT w="6350" cap="flat" cmpd="sng" algn="ctr">
+                      <a:solidFill>
+                        <a:srgbClr val="CCCCCC"/>
+                      </a:solidFill>
+                      <a:prstDash val="solid"/>
+                      <a:round/>
+                      <a:headEnd type="none" w="med" len="med"/>
+                      <a:tailEnd type="none" w="med" len="med"/>
+                    </a:lnT>
+                    <a:lnB w="6350" cap="flat" cmpd="sng" algn="ctr">
+                      <a:solidFill>
+                        <a:srgbClr val="CCCCCC"/>
+                      </a:solidFill>
+                      <a:prstDash val="solid"/>
+                      <a:round/>
+                      <a:headEnd type="none" w="med" len="med"/>
+                      <a:tailEnd type="none" w="med" len="med"/>
+                    </a:lnB>
+                  </a:tcPr>
+                </a:tc>
+                <a:tc>
+                  <a:txBody>
+                    <a:bodyPr/>
+                    <a:lstStyle/>
+                    <a:p>
+                      <a:pPr marL="0" indent="0">
+                        <a:buNone/>
+                      </a:pPr>
+                      <a:endParaRPr lang="en-US" sz="400" dirty="0">
+                        <a:latin typeface="Calibri" charset="0"/>
+                        <a:ea typeface="Calibri" charset="0"/>
+                        <a:cs typeface="Calibri" charset="0"/>
+                      </a:endParaRPr>
+                    </a:p>
+                  </a:txBody>
+                  <a:tcPr marL="101600" marR="101600" marT="50800" marB="50800">
+                    <a:lnL w="6350" cap="flat" cmpd="sng" algn="ctr">
+                      <a:solidFill>
+                        <a:srgbClr val="CCCCCC"/>
+                      </a:solidFill>
+                      <a:prstDash val="solid"/>
+                      <a:round/>
+                      <a:headEnd type="none" w="med" len="med"/>
+                      <a:tailEnd type="none" w="med" len="med"/>
+                    </a:lnL>
+                    <a:lnR w="6350" cap="flat" cmpd="sng" algn="ctr">
+                      <a:solidFill>
+                        <a:srgbClr val="CCCCCC"/>
+                      </a:solidFill>
+                      <a:prstDash val="solid"/>
+                      <a:round/>
+                      <a:headEnd type="none" w="med" len="med"/>
+                      <a:tailEnd type="none" w="med" len="med"/>
+                    </a:lnR>
+                    <a:lnT w="6350" cap="flat" cmpd="sng" algn="ctr">
+                      <a:solidFill>
+                        <a:srgbClr val="CCCCCC"/>
+                      </a:solidFill>
+                      <a:prstDash val="solid"/>
+                      <a:round/>
+                      <a:headEnd type="none" w="med" len="med"/>
+                      <a:tailEnd type="none" w="med" len="med"/>
+                    </a:lnT>
+                    <a:lnB w="6350" cap="flat" cmpd="sng" algn="ctr">
+                      <a:solidFill>
+                        <a:srgbClr val="CCCCCC"/>
+                      </a:solidFill>
+                      <a:prstDash val="solid"/>
+                      <a:round/>
+                      <a:headEnd type="none" w="med" len="med"/>
+                      <a:tailEnd type="none" w="med" len="med"/>
+                    </a:lnB>
+                  </a:tcPr>
+                </a:tc>
+                <a:extLst>
+                  <a:ext uri="{0D108BD9-81ED-4DB2-BD59-A6C34878D82A}">
+                    <a16:rowId xmlns:a16="http://schemas.microsoft.com/office/drawing/2014/main" val="10008"/>
+                  </a:ext>
+                </a:extLst>
+              </a:tr>
+              <a:tr h="275419">
+                <a:tc>
+                  <a:txBody>
+                    <a:bodyPr/>
+                    <a:lstStyle/>
+                    <a:p>
+                      <a:pPr marL="0" indent="0">
+                        <a:buNone/>
+                      </a:pPr>
+                      <a:r>
+                        <a:rPr lang="en-US" sz="1100" dirty="0">
+                          <a:solidFill>
+                            <a:srgbClr val="000000"/>
+                          </a:solidFill>
+                          <a:latin typeface="Calibri" pitchFamily="34" charset="0"/>
+                          <a:ea typeface="Calibri" pitchFamily="34" charset="-122"/>
+                          <a:cs typeface="Calibri" pitchFamily="34" charset="-120"/>
+                        </a:rPr>
+                        <a:t>Field FE</a:t>
+                      </a:r>
+                      <a:endParaRPr lang="en-US" sz="1100" dirty="0">
+                        <a:latin typeface="Calibri" charset="0"/>
+                        <a:ea typeface="Calibri" charset="0"/>
+                        <a:cs typeface="Calibri" charset="0"/>
+                      </a:endParaRPr>
+                    </a:p>
+                  </a:txBody>
+                  <a:tcPr marL="101600" marR="101600" marT="50800" marB="50800">
+                    <a:lnL w="6350" cap="flat" cmpd="sng" algn="ctr">
+                      <a:solidFill>
+                        <a:srgbClr val="CCCCCC"/>
+                      </a:solidFill>
+                      <a:prstDash val="solid"/>
+                      <a:round/>
+                      <a:headEnd type="none" w="med" len="med"/>
+                      <a:tailEnd type="none" w="med" len="med"/>
+                    </a:lnL>
+                    <a:lnR w="6350" cap="flat" cmpd="sng" algn="ctr">
+                      <a:solidFill>
+                        <a:srgbClr val="CCCCCC"/>
+                      </a:solidFill>
+                      <a:prstDash val="solid"/>
+                      <a:round/>
+                      <a:headEnd type="none" w="med" len="med"/>
+                      <a:tailEnd type="none" w="med" len="med"/>
+                    </a:lnR>
+                    <a:lnT w="6350" cap="flat" cmpd="sng" algn="ctr">
+                      <a:solidFill>
+                        <a:srgbClr val="CCCCCC"/>
+                      </a:solidFill>
+                      <a:prstDash val="solid"/>
+                      <a:round/>
+                      <a:headEnd type="none" w="med" len="med"/>
+                      <a:tailEnd type="none" w="med" len="med"/>
+                    </a:lnT>
+                    <a:lnB w="6350" cap="flat" cmpd="sng" algn="ctr">
+                      <a:solidFill>
+                        <a:srgbClr val="CCCCCC"/>
+                      </a:solidFill>
+                      <a:prstDash val="solid"/>
+                      <a:round/>
+                      <a:headEnd type="none" w="med" len="med"/>
+                      <a:tailEnd type="none" w="med" len="med"/>
+                    </a:lnB>
+                  </a:tcPr>
+                </a:tc>
+                <a:tc>
+                  <a:txBody>
+                    <a:bodyPr/>
+                    <a:lstStyle/>
+                    <a:p>
+                      <a:pPr marL="0" indent="0" algn="ctr">
+                        <a:buNone/>
+                      </a:pPr>
+                      <a:r>
+                        <a:rPr lang="en-US" sz="1100" dirty="0">
+                          <a:solidFill>
+                            <a:srgbClr val="000000"/>
+                          </a:solidFill>
+                          <a:latin typeface="Calibri" pitchFamily="34" charset="0"/>
+                          <a:ea typeface="Calibri" pitchFamily="34" charset="-122"/>
+                          <a:cs typeface="Calibri" pitchFamily="34" charset="-120"/>
+                        </a:rPr>
+                        <a:t>Yes</a:t>
+                      </a:r>
+                      <a:endParaRPr lang="en-US" sz="1100" dirty="0">
+                        <a:latin typeface="Calibri" charset="0"/>
+                        <a:ea typeface="Calibri" charset="0"/>
+                        <a:cs typeface="Calibri" charset="0"/>
+                      </a:endParaRPr>
+                    </a:p>
+                  </a:txBody>
+                  <a:tcPr marL="101600" marR="101600" marT="50800" marB="50800">
+                    <a:lnL w="6350" cap="flat" cmpd="sng" algn="ctr">
+                      <a:solidFill>
+                        <a:srgbClr val="CCCCCC"/>
+                      </a:solidFill>
+                      <a:prstDash val="solid"/>
+                      <a:round/>
+                      <a:headEnd type="none" w="med" len="med"/>
+                      <a:tailEnd type="none" w="med" len="med"/>
+                    </a:lnL>
+                    <a:lnR w="6350" cap="flat" cmpd="sng" algn="ctr">
+                      <a:solidFill>
+                        <a:srgbClr val="CCCCCC"/>
+                      </a:solidFill>
+                      <a:prstDash val="solid"/>
+                      <a:round/>
+                      <a:headEnd type="none" w="med" len="med"/>
+                      <a:tailEnd type="none" w="med" len="med"/>
+                    </a:lnR>
+                    <a:lnT w="6350" cap="flat" cmpd="sng" algn="ctr">
+                      <a:solidFill>
+                        <a:srgbClr val="CCCCCC"/>
+                      </a:solidFill>
+                      <a:prstDash val="solid"/>
+                      <a:round/>
+                      <a:headEnd type="none" w="med" len="med"/>
+                      <a:tailEnd type="none" w="med" len="med"/>
+                    </a:lnT>
+                    <a:lnB w="6350" cap="flat" cmpd="sng" algn="ctr">
+                      <a:solidFill>
+                        <a:srgbClr val="CCCCCC"/>
+                      </a:solidFill>
+                      <a:prstDash val="solid"/>
+                      <a:round/>
+                      <a:headEnd type="none" w="med" len="med"/>
+                      <a:tailEnd type="none" w="med" len="med"/>
+                    </a:lnB>
+                  </a:tcPr>
+                </a:tc>
+                <a:tc>
+                  <a:txBody>
+                    <a:bodyPr/>
+                    <a:lstStyle/>
+                    <a:p>
+                      <a:pPr marL="0" indent="0" algn="ctr">
+                        <a:buNone/>
+                      </a:pPr>
+                      <a:r>
+                        <a:rPr lang="en-US" sz="1100" dirty="0">
+                          <a:solidFill>
+                            <a:srgbClr val="000000"/>
+                          </a:solidFill>
+                          <a:latin typeface="Calibri" pitchFamily="34" charset="0"/>
+                          <a:ea typeface="Calibri" pitchFamily="34" charset="-122"/>
+                          <a:cs typeface="Calibri" pitchFamily="34" charset="-120"/>
+                        </a:rPr>
+                        <a:t>Yes</a:t>
+                      </a:r>
+                      <a:endParaRPr lang="en-US" sz="1100" dirty="0">
+                        <a:latin typeface="Calibri" charset="0"/>
+                        <a:ea typeface="Calibri" charset="0"/>
+                        <a:cs typeface="Calibri" charset="0"/>
+                      </a:endParaRPr>
+                    </a:p>
+                  </a:txBody>
+                  <a:tcPr marL="101600" marR="101600" marT="50800" marB="50800">
+                    <a:lnL w="6350" cap="flat" cmpd="sng" algn="ctr">
+                      <a:solidFill>
+                        <a:srgbClr val="CCCCCC"/>
+                      </a:solidFill>
+                      <a:prstDash val="solid"/>
+                      <a:round/>
+                      <a:headEnd type="none" w="med" len="med"/>
+                      <a:tailEnd type="none" w="med" len="med"/>
+                    </a:lnL>
+                    <a:lnR w="6350" cap="flat" cmpd="sng" algn="ctr">
+                      <a:solidFill>
+                        <a:srgbClr val="CCCCCC"/>
+                      </a:solidFill>
+                      <a:prstDash val="solid"/>
+                      <a:round/>
+                      <a:headEnd type="none" w="med" len="med"/>
+                      <a:tailEnd type="none" w="med" len="med"/>
+                    </a:lnR>
+                    <a:lnT w="6350" cap="flat" cmpd="sng" algn="ctr">
+                      <a:solidFill>
+                        <a:srgbClr val="CCCCCC"/>
+                      </a:solidFill>
+                      <a:prstDash val="solid"/>
+                      <a:round/>
+                      <a:headEnd type="none" w="med" len="med"/>
+                      <a:tailEnd type="none" w="med" len="med"/>
+                    </a:lnT>
+                    <a:lnB w="6350" cap="flat" cmpd="sng" algn="ctr">
+                      <a:solidFill>
+                        <a:srgbClr val="CCCCCC"/>
+                      </a:solidFill>
+                      <a:prstDash val="solid"/>
+                      <a:round/>
+                      <a:headEnd type="none" w="med" len="med"/>
+                      <a:tailEnd type="none" w="med" len="med"/>
+                    </a:lnB>
+                  </a:tcPr>
+                </a:tc>
+                <a:extLst>
+                  <a:ext uri="{0D108BD9-81ED-4DB2-BD59-A6C34878D82A}">
+                    <a16:rowId xmlns:a16="http://schemas.microsoft.com/office/drawing/2014/main" val="10009"/>
+                  </a:ext>
+                </a:extLst>
+              </a:tr>
+              <a:tr h="275419">
+                <a:tc>
+                  <a:txBody>
+                    <a:bodyPr/>
+                    <a:lstStyle/>
+                    <a:p>
+                      <a:pPr marL="0" indent="0">
+                        <a:buNone/>
+                      </a:pPr>
+                      <a:r>
+                        <a:rPr lang="en-US" sz="1100" dirty="0">
+                          <a:solidFill>
+                            <a:srgbClr val="000000"/>
+                          </a:solidFill>
+                          <a:latin typeface="Calibri" pitchFamily="34" charset="0"/>
+                          <a:ea typeface="Calibri" pitchFamily="34" charset="-122"/>
+                          <a:cs typeface="Calibri" pitchFamily="34" charset="-120"/>
+                        </a:rPr>
+                        <a:t>Year-month FE</a:t>
+                      </a:r>
+                      <a:endParaRPr lang="en-US" sz="1100" dirty="0">
+                        <a:latin typeface="Calibri" charset="0"/>
+                        <a:ea typeface="Calibri" charset="0"/>
+                        <a:cs typeface="Calibri" charset="0"/>
+                      </a:endParaRPr>
+                    </a:p>
+                  </a:txBody>
+                  <a:tcPr marL="101600" marR="101600" marT="50800" marB="50800">
+                    <a:lnL w="6350" cap="flat" cmpd="sng" algn="ctr">
+                      <a:solidFill>
+                        <a:srgbClr val="CCCCCC"/>
+                      </a:solidFill>
+                      <a:prstDash val="solid"/>
+                      <a:round/>
+                      <a:headEnd type="none" w="med" len="med"/>
+                      <a:tailEnd type="none" w="med" len="med"/>
+                    </a:lnL>
+                    <a:lnR w="6350" cap="flat" cmpd="sng" algn="ctr">
+                      <a:solidFill>
+                        <a:srgbClr val="CCCCCC"/>
+                      </a:solidFill>
+                      <a:prstDash val="solid"/>
+                      <a:round/>
+                      <a:headEnd type="none" w="med" len="med"/>
+                      <a:tailEnd type="none" w="med" len="med"/>
+                    </a:lnR>
+                    <a:lnT w="6350" cap="flat" cmpd="sng" algn="ctr">
+                      <a:solidFill>
+                        <a:srgbClr val="CCCCCC"/>
+                      </a:solidFill>
+                      <a:prstDash val="solid"/>
+                      <a:round/>
+                      <a:headEnd type="none" w="med" len="med"/>
+                      <a:tailEnd type="none" w="med" len="med"/>
+                    </a:lnT>
+                    <a:lnB w="6350" cap="flat" cmpd="sng" algn="ctr">
+                      <a:solidFill>
+                        <a:srgbClr val="CCCCCC"/>
+                      </a:solidFill>
+                      <a:prstDash val="solid"/>
+                      <a:round/>
+                      <a:headEnd type="none" w="med" len="med"/>
+                      <a:tailEnd type="none" w="med" len="med"/>
+                    </a:lnB>
+                  </a:tcPr>
+                </a:tc>
+                <a:tc>
+                  <a:txBody>
+                    <a:bodyPr/>
+                    <a:lstStyle/>
+                    <a:p>
+                      <a:pPr marL="0" indent="0" algn="ctr">
+                        <a:buNone/>
+                      </a:pPr>
+                      <a:r>
+                        <a:rPr lang="en-US" sz="1100" dirty="0">
+                          <a:solidFill>
+                            <a:srgbClr val="000000"/>
+                          </a:solidFill>
+                          <a:latin typeface="Calibri" pitchFamily="34" charset="0"/>
+                          <a:ea typeface="Calibri" pitchFamily="34" charset="-122"/>
+                          <a:cs typeface="Calibri" pitchFamily="34" charset="-120"/>
+                        </a:rPr>
+                        <a:t>Yes</a:t>
+                      </a:r>
+                      <a:endParaRPr lang="en-US" sz="1100" dirty="0">
+                        <a:latin typeface="Calibri" charset="0"/>
+                        <a:ea typeface="Calibri" charset="0"/>
+                        <a:cs typeface="Calibri" charset="0"/>
+                      </a:endParaRPr>
+                    </a:p>
+                  </a:txBody>
+                  <a:tcPr marL="101600" marR="101600" marT="50800" marB="50800">
+                    <a:lnL w="6350" cap="flat" cmpd="sng" algn="ctr">
+                      <a:solidFill>
+                        <a:srgbClr val="CCCCCC"/>
+                      </a:solidFill>
+                      <a:prstDash val="solid"/>
+                      <a:round/>
+                      <a:headEnd type="none" w="med" len="med"/>
+                      <a:tailEnd type="none" w="med" len="med"/>
+                    </a:lnL>
+                    <a:lnR w="6350" cap="flat" cmpd="sng" algn="ctr">
+                      <a:solidFill>
+                        <a:srgbClr val="CCCCCC"/>
+                      </a:solidFill>
+                      <a:prstDash val="solid"/>
+                      <a:round/>
+                      <a:headEnd type="none" w="med" len="med"/>
+                      <a:tailEnd type="none" w="med" len="med"/>
+                    </a:lnR>
+                    <a:lnT w="6350" cap="flat" cmpd="sng" algn="ctr">
+                      <a:solidFill>
+                        <a:srgbClr val="CCCCCC"/>
+                      </a:solidFill>
+                      <a:prstDash val="solid"/>
+                      <a:round/>
+                      <a:headEnd type="none" w="med" len="med"/>
+                      <a:tailEnd type="none" w="med" len="med"/>
+                    </a:lnT>
+                    <a:lnB w="6350" cap="flat" cmpd="sng" algn="ctr">
+                      <a:solidFill>
+                        <a:srgbClr val="CCCCCC"/>
+                      </a:solidFill>
+                      <a:prstDash val="solid"/>
+                      <a:round/>
+                      <a:headEnd type="none" w="med" len="med"/>
+                      <a:tailEnd type="none" w="med" len="med"/>
+                    </a:lnB>
+                  </a:tcPr>
+                </a:tc>
+                <a:tc>
+                  <a:txBody>
+                    <a:bodyPr/>
+                    <a:lstStyle/>
+                    <a:p>
+                      <a:pPr marL="0" indent="0" algn="ctr">
+                        <a:buNone/>
+                      </a:pPr>
+                      <a:r>
+                        <a:rPr lang="en-US" sz="1100" dirty="0">
+                          <a:solidFill>
+                            <a:srgbClr val="000000"/>
+                          </a:solidFill>
+                          <a:latin typeface="Calibri" pitchFamily="34" charset="0"/>
+                          <a:ea typeface="Calibri" pitchFamily="34" charset="-122"/>
+                          <a:cs typeface="Calibri" pitchFamily="34" charset="-120"/>
+                        </a:rPr>
+                        <a:t>Yes</a:t>
+                      </a:r>
+                      <a:endParaRPr lang="en-US" sz="1100" dirty="0">
+                        <a:latin typeface="Calibri" charset="0"/>
+                        <a:ea typeface="Calibri" charset="0"/>
+                        <a:cs typeface="Calibri" charset="0"/>
+                      </a:endParaRPr>
+                    </a:p>
+                  </a:txBody>
+                  <a:tcPr marL="101600" marR="101600" marT="50800" marB="50800">
+                    <a:lnL w="6350" cap="flat" cmpd="sng" algn="ctr">
+                      <a:solidFill>
+                        <a:srgbClr val="CCCCCC"/>
+                      </a:solidFill>
+                      <a:prstDash val="solid"/>
+                      <a:round/>
+                      <a:headEnd type="none" w="med" len="med"/>
+                      <a:tailEnd type="none" w="med" len="med"/>
+                    </a:lnL>
+                    <a:lnR w="6350" cap="flat" cmpd="sng" algn="ctr">
+                      <a:solidFill>
+                        <a:srgbClr val="CCCCCC"/>
+                      </a:solidFill>
+                      <a:prstDash val="solid"/>
+                      <a:round/>
+                      <a:headEnd type="none" w="med" len="med"/>
+                      <a:tailEnd type="none" w="med" len="med"/>
+                    </a:lnR>
+                    <a:lnT w="6350" cap="flat" cmpd="sng" algn="ctr">
+                      <a:solidFill>
+                        <a:srgbClr val="CCCCCC"/>
+                      </a:solidFill>
+                      <a:prstDash val="solid"/>
+                      <a:round/>
+                      <a:headEnd type="none" w="med" len="med"/>
+                      <a:tailEnd type="none" w="med" len="med"/>
+                    </a:lnT>
+                    <a:lnB w="6350" cap="flat" cmpd="sng" algn="ctr">
+                      <a:solidFill>
+                        <a:srgbClr val="CCCCCC"/>
+                      </a:solidFill>
+                      <a:prstDash val="solid"/>
+                      <a:round/>
+                      <a:headEnd type="none" w="med" len="med"/>
+                      <a:tailEnd type="none" w="med" len="med"/>
+                    </a:lnB>
+                  </a:tcPr>
+                </a:tc>
+                <a:extLst>
+                  <a:ext uri="{0D108BD9-81ED-4DB2-BD59-A6C34878D82A}">
+                    <a16:rowId xmlns:a16="http://schemas.microsoft.com/office/drawing/2014/main" val="10010"/>
+                  </a:ext>
+                </a:extLst>
+              </a:tr>
+              <a:tr h="275419">
+                <a:tc>
+                  <a:txBody>
+                    <a:bodyPr/>
+                    <a:lstStyle/>
+                    <a:p>
+                      <a:pPr marL="0" indent="0">
+                        <a:buNone/>
+                      </a:pPr>
+                      <a:r>
+                        <a:rPr lang="en-US" sz="1100" dirty="0">
+                          <a:solidFill>
+                            <a:srgbClr val="000000"/>
+                          </a:solidFill>
+                          <a:latin typeface="Calibri" pitchFamily="34" charset="0"/>
+                          <a:ea typeface="Calibri" pitchFamily="34" charset="-122"/>
+                          <a:cs typeface="Calibri" pitchFamily="34" charset="-120"/>
+                        </a:rPr>
+                        <a:t>N</a:t>
+                      </a:r>
+                      <a:endParaRPr lang="en-US" sz="1100" dirty="0">
+                        <a:latin typeface="Calibri" charset="0"/>
+                        <a:ea typeface="Calibri" charset="0"/>
+                        <a:cs typeface="Calibri" charset="0"/>
+                      </a:endParaRPr>
+                    </a:p>
+                  </a:txBody>
+                  <a:tcPr marL="101600" marR="101600" marT="50800" marB="50800">
+                    <a:lnL w="6350" cap="flat" cmpd="sng" algn="ctr">
+                      <a:solidFill>
+                        <a:srgbClr val="CCCCCC"/>
+                      </a:solidFill>
+                      <a:prstDash val="solid"/>
+                      <a:round/>
+                      <a:headEnd type="none" w="med" len="med"/>
+                      <a:tailEnd type="none" w="med" len="med"/>
+                    </a:lnL>
+                    <a:lnR w="6350" cap="flat" cmpd="sng" algn="ctr">
+                      <a:solidFill>
+                        <a:srgbClr val="CCCCCC"/>
+                      </a:solidFill>
+                      <a:prstDash val="solid"/>
+                      <a:round/>
+                      <a:headEnd type="none" w="med" len="med"/>
+                      <a:tailEnd type="none" w="med" len="med"/>
+                    </a:lnR>
+                    <a:lnT w="6350" cap="flat" cmpd="sng" algn="ctr">
+                      <a:solidFill>
+                        <a:srgbClr val="CCCCCC"/>
+                      </a:solidFill>
+                      <a:prstDash val="solid"/>
+                      <a:round/>
+                      <a:headEnd type="none" w="med" len="med"/>
+                      <a:tailEnd type="none" w="med" len="med"/>
+                    </a:lnT>
+                    <a:lnB w="6350" cap="flat" cmpd="sng" algn="ctr">
+                      <a:solidFill>
+                        <a:srgbClr val="CCCCCC"/>
+                      </a:solidFill>
+                      <a:prstDash val="solid"/>
+                      <a:round/>
+                      <a:headEnd type="none" w="med" len="med"/>
+                      <a:tailEnd type="none" w="med" len="med"/>
+                    </a:lnB>
+                  </a:tcPr>
+                </a:tc>
+                <a:tc>
+                  <a:txBody>
+                    <a:bodyPr/>
+                    <a:lstStyle/>
+                    <a:p>
+                      <a:pPr marL="0" indent="0" algn="ctr">
+                        <a:buNone/>
+                      </a:pPr>
+                      <a:r>
+                        <a:rPr lang="en-US" sz="1100" dirty="0">
+                          <a:solidFill>
+                            <a:srgbClr val="000000"/>
+                          </a:solidFill>
+                          <a:latin typeface="Calibri" pitchFamily="34" charset="0"/>
+                          <a:ea typeface="Calibri" pitchFamily="34" charset="-122"/>
+                          <a:cs typeface="Calibri" pitchFamily="34" charset="-120"/>
+                        </a:rPr>
+                        <a:t>35,080</a:t>
+                      </a:r>
+                      <a:endParaRPr lang="en-US" sz="1100" dirty="0">
+                        <a:latin typeface="Calibri" charset="0"/>
+                        <a:ea typeface="Calibri" charset="0"/>
+                        <a:cs typeface="Calibri" charset="0"/>
+                      </a:endParaRPr>
+                    </a:p>
+                  </a:txBody>
+                  <a:tcPr marL="101600" marR="101600" marT="50800" marB="50800">
+                    <a:lnL w="6350" cap="flat" cmpd="sng" algn="ctr">
+                      <a:solidFill>
+                        <a:srgbClr val="CCCCCC"/>
+                      </a:solidFill>
+                      <a:prstDash val="solid"/>
+                      <a:round/>
+                      <a:headEnd type="none" w="med" len="med"/>
+                      <a:tailEnd type="none" w="med" len="med"/>
+                    </a:lnL>
+                    <a:lnR w="6350" cap="flat" cmpd="sng" algn="ctr">
+                      <a:solidFill>
+                        <a:srgbClr val="CCCCCC"/>
+                      </a:solidFill>
+                      <a:prstDash val="solid"/>
+                      <a:round/>
+                      <a:headEnd type="none" w="med" len="med"/>
+                      <a:tailEnd type="none" w="med" len="med"/>
+                    </a:lnR>
+                    <a:lnT w="6350" cap="flat" cmpd="sng" algn="ctr">
+                      <a:solidFill>
+                        <a:srgbClr val="CCCCCC"/>
+                      </a:solidFill>
+                      <a:prstDash val="solid"/>
+                      <a:round/>
+                      <a:headEnd type="none" w="med" len="med"/>
+                      <a:tailEnd type="none" w="med" len="med"/>
+                    </a:lnT>
+                    <a:lnB w="6350" cap="flat" cmpd="sng" algn="ctr">
+                      <a:solidFill>
+                        <a:srgbClr val="CCCCCC"/>
+                      </a:solidFill>
+                      <a:prstDash val="solid"/>
+                      <a:round/>
+                      <a:headEnd type="none" w="med" len="med"/>
+                      <a:tailEnd type="none" w="med" len="med"/>
+                    </a:lnB>
+                  </a:tcPr>
+                </a:tc>
+                <a:tc>
+                  <a:txBody>
+                    <a:bodyPr/>
+                    <a:lstStyle/>
+                    <a:p>
+                      <a:pPr marL="0" indent="0" algn="ctr">
+                        <a:buNone/>
+                      </a:pPr>
+                      <a:r>
+                        <a:rPr lang="en-US" sz="1100" dirty="0">
+                          <a:solidFill>
+                            <a:srgbClr val="000000"/>
+                          </a:solidFill>
+                          <a:latin typeface="Calibri" pitchFamily="34" charset="0"/>
+                          <a:ea typeface="Calibri" pitchFamily="34" charset="-122"/>
+                          <a:cs typeface="Calibri" pitchFamily="34" charset="-120"/>
+                        </a:rPr>
+                        <a:t>35,080</a:t>
+                      </a:r>
+                      <a:endParaRPr lang="en-US" sz="1100" dirty="0">
+                        <a:latin typeface="Calibri" charset="0"/>
+                        <a:ea typeface="Calibri" charset="0"/>
+                        <a:cs typeface="Calibri" charset="0"/>
+                      </a:endParaRPr>
+                    </a:p>
+                  </a:txBody>
+                  <a:tcPr marL="101600" marR="101600" marT="50800" marB="50800">
+                    <a:lnL w="6350" cap="flat" cmpd="sng" algn="ctr">
+                      <a:solidFill>
+                        <a:srgbClr val="CCCCCC"/>
+                      </a:solidFill>
+                      <a:prstDash val="solid"/>
+                      <a:round/>
+                      <a:headEnd type="none" w="med" len="med"/>
+                      <a:tailEnd type="none" w="med" len="med"/>
+                    </a:lnL>
+                    <a:lnR w="6350" cap="flat" cmpd="sng" algn="ctr">
+                      <a:solidFill>
+                        <a:srgbClr val="CCCCCC"/>
+                      </a:solidFill>
+                      <a:prstDash val="solid"/>
+                      <a:round/>
+                      <a:headEnd type="none" w="med" len="med"/>
+                      <a:tailEnd type="none" w="med" len="med"/>
+                    </a:lnR>
+                    <a:lnT w="6350" cap="flat" cmpd="sng" algn="ctr">
+                      <a:solidFill>
+                        <a:srgbClr val="CCCCCC"/>
+                      </a:solidFill>
+                      <a:prstDash val="solid"/>
+                      <a:round/>
+                      <a:headEnd type="none" w="med" len="med"/>
+                      <a:tailEnd type="none" w="med" len="med"/>
+                    </a:lnT>
+                    <a:lnB w="6350" cap="flat" cmpd="sng" algn="ctr">
+                      <a:solidFill>
+                        <a:srgbClr val="CCCCCC"/>
+                      </a:solidFill>
+                      <a:prstDash val="solid"/>
+                      <a:round/>
+                      <a:headEnd type="none" w="med" len="med"/>
+                      <a:tailEnd type="none" w="med" len="med"/>
+                    </a:lnB>
+                  </a:tcPr>
+                </a:tc>
+                <a:extLst>
+                  <a:ext uri="{0D108BD9-81ED-4DB2-BD59-A6C34878D82A}">
+                    <a16:rowId xmlns:a16="http://schemas.microsoft.com/office/drawing/2014/main" val="10011"/>
+                  </a:ext>
+                </a:extLst>
+              </a:tr>
+              <a:tr h="275419">
+                <a:tc>
+                  <a:txBody>
+                    <a:bodyPr/>
+                    <a:lstStyle/>
+                    <a:p>
+                      <a:pPr marL="0" indent="0">
+                        <a:buNone/>
+                      </a:pPr>
+                      <a:r>
+                        <a:rPr lang="en-US" sz="1100" dirty="0">
+                          <a:solidFill>
+                            <a:srgbClr val="000000"/>
+                          </a:solidFill>
+                          <a:latin typeface="Calibri" pitchFamily="34" charset="0"/>
+                          <a:ea typeface="Calibri" pitchFamily="34" charset="-122"/>
+                          <a:cs typeface="Calibri" pitchFamily="34" charset="-120"/>
+                        </a:rPr>
+                        <a:t>R²</a:t>
+                      </a:r>
+                      <a:endParaRPr lang="en-US" sz="1100" dirty="0">
+                        <a:latin typeface="Calibri" charset="0"/>
+                        <a:ea typeface="Calibri" charset="0"/>
+                        <a:cs typeface="Calibri" charset="0"/>
+                      </a:endParaRPr>
+                    </a:p>
+                  </a:txBody>
+                  <a:tcPr marL="101600" marR="101600" marT="50800" marB="50800">
+                    <a:lnL w="6350" cap="flat" cmpd="sng" algn="ctr">
+                      <a:solidFill>
+                        <a:srgbClr val="CCCCCC"/>
+                      </a:solidFill>
+                      <a:prstDash val="solid"/>
+                      <a:round/>
+                      <a:headEnd type="none" w="med" len="med"/>
+                      <a:tailEnd type="none" w="med" len="med"/>
+                    </a:lnL>
+                    <a:lnR w="6350" cap="flat" cmpd="sng" algn="ctr">
+                      <a:solidFill>
+                        <a:srgbClr val="CCCCCC"/>
+                      </a:solidFill>
+                      <a:prstDash val="solid"/>
+                      <a:round/>
+                      <a:headEnd type="none" w="med" len="med"/>
+                      <a:tailEnd type="none" w="med" len="med"/>
+                    </a:lnR>
+                    <a:lnT w="6350" cap="flat" cmpd="sng" algn="ctr">
+                      <a:solidFill>
+                        <a:srgbClr val="CCCCCC"/>
+                      </a:solidFill>
+                      <a:prstDash val="solid"/>
+                      <a:round/>
+                      <a:headEnd type="none" w="med" len="med"/>
+                      <a:tailEnd type="none" w="med" len="med"/>
+                    </a:lnT>
+                    <a:lnB w="6350" cap="flat" cmpd="sng" algn="ctr">
+                      <a:solidFill>
+                        <a:srgbClr val="CCCCCC"/>
+                      </a:solidFill>
+                      <a:prstDash val="solid"/>
+                      <a:round/>
+                      <a:headEnd type="none" w="med" len="med"/>
+                      <a:tailEnd type="none" w="med" len="med"/>
+                    </a:lnB>
+                  </a:tcPr>
+                </a:tc>
+                <a:tc>
+                  <a:txBody>
+                    <a:bodyPr/>
+                    <a:lstStyle/>
+                    <a:p>
+                      <a:pPr marL="0" indent="0" algn="ctr">
+                        <a:buNone/>
+                      </a:pPr>
+                      <a:r>
+                        <a:rPr lang="en-US" sz="1100" dirty="0">
+                          <a:solidFill>
+                            <a:srgbClr val="000000"/>
+                          </a:solidFill>
+                          <a:latin typeface="Calibri" pitchFamily="34" charset="0"/>
+                          <a:ea typeface="Calibri" pitchFamily="34" charset="-122"/>
+                          <a:cs typeface="Calibri" pitchFamily="34" charset="-120"/>
+                        </a:rPr>
+                        <a:t>0.143</a:t>
+                      </a:r>
+                      <a:endParaRPr lang="en-US" sz="1100" dirty="0">
+                        <a:latin typeface="Calibri" charset="0"/>
+                        <a:ea typeface="Calibri" charset="0"/>
+                        <a:cs typeface="Calibri" charset="0"/>
+                      </a:endParaRPr>
+                    </a:p>
+                  </a:txBody>
+                  <a:tcPr marL="101600" marR="101600" marT="50800" marB="50800">
+                    <a:lnL w="6350" cap="flat" cmpd="sng" algn="ctr">
+                      <a:solidFill>
+                        <a:srgbClr val="CCCCCC"/>
+                      </a:solidFill>
+                      <a:prstDash val="solid"/>
+                      <a:round/>
+                      <a:headEnd type="none" w="med" len="med"/>
+                      <a:tailEnd type="none" w="med" len="med"/>
+                    </a:lnL>
+                    <a:lnR w="6350" cap="flat" cmpd="sng" algn="ctr">
+                      <a:solidFill>
+                        <a:srgbClr val="CCCCCC"/>
+                      </a:solidFill>
+                      <a:prstDash val="solid"/>
+                      <a:round/>
+                      <a:headEnd type="none" w="med" len="med"/>
+                      <a:tailEnd type="none" w="med" len="med"/>
+                    </a:lnR>
+                    <a:lnT w="6350" cap="flat" cmpd="sng" algn="ctr">
+                      <a:solidFill>
+                        <a:srgbClr val="CCCCCC"/>
+                      </a:solidFill>
+                      <a:prstDash val="solid"/>
+                      <a:round/>
+                      <a:headEnd type="none" w="med" len="med"/>
+                      <a:tailEnd type="none" w="med" len="med"/>
+                    </a:lnT>
+                    <a:lnB w="6350" cap="flat" cmpd="sng" algn="ctr">
+                      <a:solidFill>
+                        <a:srgbClr val="CCCCCC"/>
+                      </a:solidFill>
+                      <a:prstDash val="solid"/>
+                      <a:round/>
+                      <a:headEnd type="none" w="med" len="med"/>
+                      <a:tailEnd type="none" w="med" len="med"/>
+                    </a:lnB>
+                  </a:tcPr>
+                </a:tc>
+                <a:tc>
+                  <a:txBody>
+                    <a:bodyPr/>
+                    <a:lstStyle/>
+                    <a:p>
+                      <a:pPr marL="0" indent="0" algn="ctr">
+                        <a:buNone/>
+                      </a:pPr>
+                      <a:r>
+                        <a:rPr lang="en-US" sz="1100" dirty="0">
+                          <a:solidFill>
+                            <a:srgbClr val="000000"/>
+                          </a:solidFill>
+                          <a:latin typeface="Calibri" pitchFamily="34" charset="0"/>
+                          <a:ea typeface="Calibri" pitchFamily="34" charset="-122"/>
+                          <a:cs typeface="Calibri" pitchFamily="34" charset="-120"/>
+                        </a:rPr>
+                        <a:t>0.143</a:t>
+                      </a:r>
+                      <a:endParaRPr lang="en-US" sz="1100" dirty="0">
+                        <a:latin typeface="Calibri" charset="0"/>
+                        <a:ea typeface="Calibri" charset="0"/>
+                        <a:cs typeface="Calibri" charset="0"/>
+                      </a:endParaRPr>
+                    </a:p>
+                  </a:txBody>
+                  <a:tcPr marL="101600" marR="101600" marT="50800" marB="50800">
+                    <a:lnL w="6350" cap="flat" cmpd="sng" algn="ctr">
+                      <a:solidFill>
+                        <a:srgbClr val="CCCCCC"/>
+                      </a:solidFill>
+                      <a:prstDash val="solid"/>
+                      <a:round/>
+                      <a:headEnd type="none" w="med" len="med"/>
+                      <a:tailEnd type="none" w="med" len="med"/>
+                    </a:lnL>
+                    <a:lnR w="6350" cap="flat" cmpd="sng" algn="ctr">
+                      <a:solidFill>
+                        <a:srgbClr val="CCCCCC"/>
+                      </a:solidFill>
+                      <a:prstDash val="solid"/>
+                      <a:round/>
+                      <a:headEnd type="none" w="med" len="med"/>
+                      <a:tailEnd type="none" w="med" len="med"/>
+                    </a:lnR>
+                    <a:lnT w="6350" cap="flat" cmpd="sng" algn="ctr">
+                      <a:solidFill>
+                        <a:srgbClr val="CCCCCC"/>
+                      </a:solidFill>
+                      <a:prstDash val="solid"/>
+                      <a:round/>
+                      <a:headEnd type="none" w="med" len="med"/>
+                      <a:tailEnd type="none" w="med" len="med"/>
+                    </a:lnT>
+                    <a:lnB w="6350" cap="flat" cmpd="sng" algn="ctr">
+                      <a:solidFill>
+                        <a:srgbClr val="CCCCCC"/>
+                      </a:solidFill>
+                      <a:prstDash val="solid"/>
+                      <a:round/>
+                      <a:headEnd type="none" w="med" len="med"/>
+                      <a:tailEnd type="none" w="med" len="med"/>
+                    </a:lnB>
+                  </a:tcPr>
+                </a:tc>
+                <a:extLst>
+                  <a:ext uri="{0D108BD9-81ED-4DB2-BD59-A6C34878D82A}">
+                    <a16:rowId xmlns:a16="http://schemas.microsoft.com/office/drawing/2014/main" val="10012"/>
+                  </a:ext>
+                </a:extLst>
+              </a:tr>
+            </a:tbl>
+          </a:graphicData>
+        </a:graphic>
+      </p:graphicFrame>
+      <p:sp>
+        <p:nvSpPr>
+          <p:cNvPr id="6" name="Text 2">
+            <a:extLst>
+              <a:ext uri="{FF2B5EF4-FFF2-40B4-BE49-F238E27FC236}">
+                <a16:creationId xmlns:a16="http://schemas.microsoft.com/office/drawing/2014/main" id="{7D90E107-81D9-1414-4CFA-7F4F323AC4D2}"/>
+              </a:ext>
+            </a:extLst>
+          </p:cNvPr>
+          <p:cNvSpPr/>
+          <p:nvPr/>
+        </p:nvSpPr>
+        <p:spPr>
+          <a:xfrm>
+            <a:off x="548640" y="4869180"/>
+            <a:ext cx="3937635" cy="274320"/>
+          </a:xfrm>
+          <a:prstGeom prst="rect">
+            <a:avLst/>
+          </a:prstGeom>
+          <a:noFill/>
+          <a:ln/>
+        </p:spPr>
+        <p:txBody>
+          <a:bodyPr wrap="square" rtlCol="0" anchor="ctr"/>
+          <a:lstStyle/>
+          <a:p>
+            <a:pPr marL="0" indent="0">
+              <a:buNone/>
+            </a:pPr>
+            <a:r>
+              <a:rPr lang="en-US" sz="900" dirty="0">
+                <a:solidFill>
+                  <a:srgbClr val="7A8084"/>
+                </a:solidFill>
+                <a:latin typeface="Calibri" pitchFamily="34" charset="0"/>
+                <a:ea typeface="Calibri" pitchFamily="34" charset="-122"/>
+                <a:cs typeface="Calibri" pitchFamily="34" charset="-120"/>
+              </a:rPr>
+              <a:t>HC1 robust standard errors in parentheses.  *** p &lt; 0.01, ** p &lt; 0.05, * p &lt; 0.10</a:t>
+            </a:r>
+            <a:endParaRPr lang="en-US" sz="900" dirty="0"/>
+          </a:p>
+        </p:txBody>
+      </p:sp>
+      <p:sp>
+        <p:nvSpPr>
+          <p:cNvPr id="7" name="TextBox 6">
+            <a:extLst>
+              <a:ext uri="{FF2B5EF4-FFF2-40B4-BE49-F238E27FC236}">
+                <a16:creationId xmlns:a16="http://schemas.microsoft.com/office/drawing/2014/main" id="{771E702E-7403-C417-7D71-DF7CAF8B3104}"/>
+              </a:ext>
+            </a:extLst>
+          </p:cNvPr>
+          <p:cNvSpPr txBox="1"/>
+          <p:nvPr/>
+        </p:nvSpPr>
+        <p:spPr>
+          <a:xfrm>
+            <a:off x="5644991" y="1663809"/>
+            <a:ext cx="2950369" cy="2062103"/>
+          </a:xfrm>
+          <a:prstGeom prst="rect">
+            <a:avLst/>
+          </a:prstGeom>
+          <a:noFill/>
+          <a:ln/>
+        </p:spPr>
+        <p:txBody>
+          <a:bodyPr wrap="square" rtlCol="0">
+            <a:spAutoFit/>
+          </a:bodyPr>
+          <a:lstStyle/>
+          <a:p>
+            <a:pPr marL="342900" indent="-342900">
+              <a:buFont typeface="+mj-lt"/>
+              <a:buAutoNum type="arabicPeriod"/>
+            </a:pPr>
+            <a:r>
+              <a:rPr lang="en-US" sz="1600" dirty="0">
+                <a:solidFill/>
+              </a:rPr>
+              <a:t>Both jump gradual trend are separately significant</a:t>
+            </a:r>
+          </a:p>
+          <a:p>
+            <a:pPr marL="342900" indent="-342900">
+              <a:buFont typeface="+mj-lt"/>
+              <a:buAutoNum type="arabicPeriod"/>
+            </a:pPr>
+            <a:r>
+              <a:rPr lang="en-US" sz="1600" dirty="0">
+                <a:solidFill/>
+              </a:rPr>
+              <a:t>Gradual trend better describes impact than singular-time jump</a:t>
+            </a:r>
+          </a:p>
+          <a:p>
+            <a:pPr marL="342900" indent="-342900">
+              <a:buFont typeface="+mj-lt"/>
+              <a:buAutoNum type="arabicPeriod"/>
+            </a:pPr>
+            <a:r>
+              <a:rPr lang="en-US" sz="1600" dirty="0">
+                <a:solidFill/>
+              </a:rPr>
+              <a:t>This makes sense as it takes time to adopt new models into a workflow</a:t>
+            </a:r>
+          </a:p>
+        </p:txBody>
+      </p:sp>
+    </p:spTree>
+    <p:extLst>
+      <p:ext uri="{BB962C8B-B14F-4D97-AF65-F5344CB8AC3E}">
+        <p14:creationId xmlns:p14="http://schemas.microsoft.com/office/powerpoint/2010/main" val="2202351863"/>
+      </p:ext>
+    </p:extLst>
+  </p:cSld>
+  <p:clrMapOvr>
+    <a:masterClrMapping/>
+  </p:clrMapOvr>
+</p:sld>
+</file>
+
+<file path=ppt/slides/slide16.xml><?xml version="1.0" encoding="utf-8"?>
 <p:sld xmlns:a="http://schemas.openxmlformats.org/drawingml/2006/main" xmlns:r="http://schemas.openxmlformats.org/officeDocument/2006/relationships" xmlns:p="http://schemas.openxmlformats.org/presentationml/2006/main">
   <p:cSld name="Slide 8">
     <p:bg>
@@ -7369,7 +11145,7 @@
 </p:sld>
 </file>
 
-<file path=ppt/slides/slide15.xml><?xml version="1.0" encoding="utf-8"?>
+<file path=ppt/slides/slide17.xml><?xml version="1.0" encoding="utf-8"?>
 <p:sld xmlns:a="http://schemas.openxmlformats.org/drawingml/2006/main" xmlns:r="http://schemas.openxmlformats.org/officeDocument/2006/relationships" xmlns:p="http://schemas.openxmlformats.org/presentationml/2006/main">
   <p:cSld>
     <p:bg>
@@ -7720,202 +11496,7 @@
 </p:sld>
 </file>
 
-<file path=ppt/slides/slide16.xml><?xml version="1.0" encoding="utf-8"?>
-<p:sld xmlns:a="http://schemas.openxmlformats.org/drawingml/2006/main" xmlns:r="http://schemas.openxmlformats.org/officeDocument/2006/relationships" xmlns:p="http://schemas.openxmlformats.org/presentationml/2006/main" show="0">
-  <p:cSld name="Slide 9">
-    <p:bg>
-      <p:bgPr>
-        <a:solidFill>
-          <a:srgbClr val="F2F2F2"/>
-        </a:solidFill>
-        <a:effectLst/>
-      </p:bgPr>
-    </p:bg>
-    <p:spTree>
-      <p:nvGrpSpPr>
-        <p:cNvPr id="1" name=""/>
-        <p:cNvGrpSpPr/>
-        <p:nvPr/>
-      </p:nvGrpSpPr>
-      <p:grpSpPr>
-        <a:xfrm>
-          <a:off x="0" y="0"/>
-          <a:ext cx="0" cy="0"/>
-          <a:chOff x="0" y="0"/>
-          <a:chExt cx="0" cy="0"/>
-        </a:xfrm>
-      </p:grpSpPr>
-      <p:sp>
-        <p:nvSpPr>
-          <p:cNvPr id="2" name="Text 0"/>
-          <p:cNvSpPr/>
-          <p:nvPr/>
-        </p:nvSpPr>
-        <p:spPr>
-          <a:xfrm>
-            <a:off x="548640" y="274320"/>
-            <a:ext cx="8046720" cy="548640"/>
-          </a:xfrm>
-          <a:prstGeom prst="rect">
-            <a:avLst/>
-          </a:prstGeom>
-          <a:noFill/>
-          <a:ln/>
-        </p:spPr>
-        <p:txBody>
-          <a:bodyPr wrap="square" lIns="0" tIns="0" rIns="0" bIns="0" rtlCol="0" anchor="ctr"/>
-          <a:lstStyle/>
-          <a:p>
-            <a:pPr marL="0" indent="0">
-              <a:buNone/>
-            </a:pPr>
-            <a:r>
-              <a:rPr lang="en-US" sz="2400" b="1" dirty="0">
-                <a:solidFill>
-                  <a:srgbClr val="36454F"/>
-                </a:solidFill>
-                <a:latin typeface="Georgia" pitchFamily="34" charset="0"/>
-                <a:ea typeface="Georgia" pitchFamily="34" charset="-122"/>
-                <a:cs typeface="Georgia" pitchFamily="34" charset="-120"/>
-              </a:rPr>
-              <a:t>Cross-Sectional Validation</a:t>
-            </a:r>
-            <a:endParaRPr lang="en-US" sz="2400" dirty="0"/>
-          </a:p>
-        </p:txBody>
-      </p:sp>
-      <p:sp>
-        <p:nvSpPr>
-          <p:cNvPr id="3" name="Text 1"/>
-          <p:cNvSpPr/>
-          <p:nvPr/>
-        </p:nvSpPr>
-        <p:spPr>
-          <a:xfrm>
-            <a:off x="548640" y="777240"/>
-            <a:ext cx="8046720" cy="365760"/>
-          </a:xfrm>
-          <a:prstGeom prst="rect">
-            <a:avLst/>
-          </a:prstGeom>
-          <a:noFill/>
-          <a:ln/>
-        </p:spPr>
-        <p:txBody>
-          <a:bodyPr wrap="square" rtlCol="0" anchor="ctr"/>
-          <a:lstStyle/>
-          <a:p>
-            <a:pPr marL="0" indent="0">
-              <a:buNone/>
-            </a:pPr>
-            <a:r>
-              <a:rPr lang="en-US" sz="1200" dirty="0">
-                <a:solidFill>
-                  <a:srgbClr val="7A8084"/>
-                </a:solidFill>
-                <a:latin typeface="Calibri" pitchFamily="34" charset="0"/>
-                <a:ea typeface="Calibri" pitchFamily="34" charset="-122"/>
-                <a:cs typeface="Calibri" pitchFamily="34" charset="-120"/>
-              </a:rPr>
-              <a:t>Fields with higher AI propensity saw larger increases in citation diversity (r = 0.603)</a:t>
-            </a:r>
-            <a:endParaRPr lang="en-US" sz="1200" dirty="0"/>
-          </a:p>
-        </p:txBody>
-      </p:sp>
-      <p:pic>
-        <p:nvPicPr>
-          <p:cNvPr id="6" name="Picture 5" descr="A graph of different colored dots&#10;&#10;AI-generated content may be incorrect.">
-            <a:extLst>
-              <a:ext uri="{FF2B5EF4-FFF2-40B4-BE49-F238E27FC236}">
-                <a16:creationId xmlns:a16="http://schemas.microsoft.com/office/drawing/2014/main" id="{27CCC976-39C1-24E4-B0D8-25E04A0A39FF}"/>
-              </a:ext>
-            </a:extLst>
-          </p:cNvPr>
-          <p:cNvPicPr>
-            <a:picLocks noChangeAspect="1"/>
-          </p:cNvPicPr>
-          <p:nvPr/>
-        </p:nvPicPr>
-        <p:blipFill>
-          <a:blip r:embed="rId3"/>
-          <a:stretch>
-            <a:fillRect/>
-          </a:stretch>
-        </p:blipFill>
-        <p:spPr>
-          <a:xfrm>
-            <a:off x="548640" y="1312346"/>
-            <a:ext cx="4564843" cy="3556834"/>
-          </a:xfrm>
-          <a:prstGeom prst="rect">
-            <a:avLst/>
-          </a:prstGeom>
-          <a:ln/>
-        </p:spPr>
-      </p:pic>
-      <p:sp>
-        <p:nvSpPr>
-          <p:cNvPr id="4" name="TextBox 3">
-            <a:extLst>
-              <a:ext uri="{FF2B5EF4-FFF2-40B4-BE49-F238E27FC236}">
-                <a16:creationId xmlns:a16="http://schemas.microsoft.com/office/drawing/2014/main" id="{4C12A203-9A47-F78D-2C5D-750F35AB8E2A}"/>
-              </a:ext>
-            </a:extLst>
-          </p:cNvPr>
-          <p:cNvSpPr txBox="1"/>
-          <p:nvPr/>
-        </p:nvSpPr>
-        <p:spPr>
-          <a:xfrm>
-            <a:off x="5679281" y="1498084"/>
-            <a:ext cx="2600325" cy="2554545"/>
-          </a:xfrm>
-          <a:prstGeom prst="rect">
-            <a:avLst/>
-          </a:prstGeom>
-          <a:noFill/>
-          <a:ln/>
-        </p:spPr>
-        <p:txBody>
-          <a:bodyPr wrap="square" rtlCol="0">
-            <a:spAutoFit/>
-          </a:bodyPr>
-          <a:lstStyle/>
-          <a:p>
-            <a:r>
-              <a:rPr lang="en-US" sz="1600" dirty="0">
-                <a:solidFill/>
-              </a:rPr>
-              <a:t>Dose-Response: Higher Propensity -&gt; Larger Entropy Gains</a:t>
-            </a:r>
-          </a:p>
-          <a:p>
-            <a:endParaRPr lang="en-US" sz="1600" dirty="0"/>
-          </a:p>
-          <a:p>
-            <a:pPr marL="285750" indent="-285750">
-              <a:buFont typeface="Arial" panose="020B0604020202020204" pitchFamily="34" charset="0"/>
-              <a:buChar char="•"/>
-            </a:pPr>
-            <a:r>
-              <a:rPr lang="en-US" sz="1600" dirty="0">
-                <a:solidFill/>
-              </a:rPr>
-              <a:t>While no longer controlling for other variables, this offers a clean visualization of the effect we find in our regression specification</a:t>
-            </a:r>
-          </a:p>
-        </p:txBody>
-      </p:sp>
-    </p:spTree>
-  </p:cSld>
-  <p:clrMapOvr>
-    <a:masterClrMapping/>
-  </p:clrMapOvr>
-</p:sld>
-</file>
-
-<file path=ppt/slides/slide17.xml><?xml version="1.0" encoding="utf-8"?>
+<file path=ppt/slides/slide18.xml><?xml version="1.0" encoding="utf-8"?>
 <p:sld xmlns:a="http://schemas.openxmlformats.org/drawingml/2006/main" xmlns:r="http://schemas.openxmlformats.org/officeDocument/2006/relationships" xmlns:p="http://schemas.openxmlformats.org/presentationml/2006/main">
   <p:cSld>
     <p:bg>
@@ -8417,7 +11998,7 @@
 </p:sld>
 </file>
 
-<file path=ppt/slides/slide18.xml><?xml version="1.0" encoding="utf-8"?>
+<file path=ppt/slides/slide19.xml><?xml version="1.0" encoding="utf-8"?>
 <p:sld xmlns:a="http://schemas.openxmlformats.org/drawingml/2006/main" xmlns:r="http://schemas.openxmlformats.org/officeDocument/2006/relationships" xmlns:p="http://schemas.openxmlformats.org/presentationml/2006/main">
   <p:cSld>
     <p:bg>
@@ -9001,258 +12582,6 @@
         <p14:creationId xmlns:p14="http://schemas.microsoft.com/office/powerpoint/2010/main" val="3067539919"/>
       </p:ext>
     </p:extLst>
-  </p:cSld>
-  <p:clrMapOvr>
-    <a:masterClrMapping/>
-  </p:clrMapOvr>
-</p:sld>
-</file>
-
-<file path=ppt/slides/slide19.xml><?xml version="1.0" encoding="utf-8"?>
-<p:sld xmlns:a="http://schemas.openxmlformats.org/drawingml/2006/main" xmlns:r="http://schemas.openxmlformats.org/officeDocument/2006/relationships" xmlns:p="http://schemas.openxmlformats.org/presentationml/2006/main">
-  <p:cSld name="Slide 10">
-    <p:bg>
-      <p:bgPr>
-        <a:solidFill>
-          <a:srgbClr val="212121"/>
-        </a:solidFill>
-        <a:effectLst/>
-      </p:bgPr>
-    </p:bg>
-    <p:spTree>
-      <p:nvGrpSpPr>
-        <p:cNvPr id="1" name=""/>
-        <p:cNvGrpSpPr/>
-        <p:nvPr/>
-      </p:nvGrpSpPr>
-      <p:grpSpPr>
-        <a:xfrm>
-          <a:off x="0" y="0"/>
-          <a:ext cx="0" cy="0"/>
-          <a:chOff x="0" y="0"/>
-          <a:chExt cx="0" cy="0"/>
-        </a:xfrm>
-      </p:grpSpPr>
-      <p:sp>
-        <p:nvSpPr>
-          <p:cNvPr id="2" name="Text 0"/>
-          <p:cNvSpPr/>
-          <p:nvPr/>
-        </p:nvSpPr>
-        <p:spPr>
-          <a:xfrm>
-            <a:off x="731520" y="365760"/>
-            <a:ext cx="7680960" cy="640080"/>
-          </a:xfrm>
-          <a:prstGeom prst="rect">
-            <a:avLst/>
-          </a:prstGeom>
-          <a:noFill/>
-          <a:ln/>
-        </p:spPr>
-        <p:txBody>
-          <a:bodyPr wrap="square" lIns="0" tIns="0" rIns="0" bIns="0" rtlCol="0" anchor="ctr"/>
-          <a:lstStyle/>
-          <a:p>
-            <a:pPr marL="0" indent="0">
-              <a:buNone/>
-            </a:pPr>
-            <a:r>
-              <a:rPr lang="en-US" sz="3200" b="1" dirty="0">
-                <a:solidFill>
-                  <a:srgbClr val="FFFFFF"/>
-                </a:solidFill>
-                <a:latin typeface="Georgia" pitchFamily="34" charset="0"/>
-                <a:ea typeface="Georgia" pitchFamily="34" charset="-122"/>
-                <a:cs typeface="Georgia" pitchFamily="34" charset="-120"/>
-              </a:rPr>
-              <a:t>Key Takeaways</a:t>
-            </a:r>
-            <a:endParaRPr lang="en-US" sz="3200" dirty="0"/>
-          </a:p>
-        </p:txBody>
-      </p:sp>
-      <p:sp>
-        <p:nvSpPr>
-          <p:cNvPr id="3" name="Shape 1"/>
-          <p:cNvSpPr/>
-          <p:nvPr/>
-        </p:nvSpPr>
-        <p:spPr>
-          <a:xfrm>
-            <a:off x="731520" y="1280160"/>
-            <a:ext cx="411480" cy="411480"/>
-          </a:xfrm>
-          <a:prstGeom prst="ellipse">
-            <a:avLst/>
-          </a:prstGeom>
-          <a:solidFill>
-            <a:srgbClr val="E8963E"/>
-          </a:solidFill>
-          <a:ln/>
-        </p:spPr>
-        <p:txBody>
-          <a:bodyPr/>
-          <a:lstStyle/>
-          <a:p>
-            <a:endParaRPr lang="en-US"/>
-          </a:p>
-        </p:txBody>
-      </p:sp>
-      <p:sp>
-        <p:nvSpPr>
-          <p:cNvPr id="4" name="Text 2"/>
-          <p:cNvSpPr/>
-          <p:nvPr/>
-        </p:nvSpPr>
-        <p:spPr>
-          <a:xfrm>
-            <a:off x="731520" y="1280160"/>
-            <a:ext cx="411480" cy="411480"/>
-          </a:xfrm>
-          <a:prstGeom prst="rect">
-            <a:avLst/>
-          </a:prstGeom>
-          <a:noFill/>
-          <a:ln/>
-        </p:spPr>
-        <p:txBody>
-          <a:bodyPr wrap="square" rtlCol="0" anchor="ctr"/>
-          <a:lstStyle/>
-          <a:p>
-            <a:pPr marL="0" indent="0" algn="ctr">
-              <a:buNone/>
-            </a:pPr>
-            <a:r>
-              <a:rPr lang="en-US" sz="1600" b="1" dirty="0">
-                <a:solidFill>
-                  <a:srgbClr val="FFFFFF"/>
-                </a:solidFill>
-                <a:latin typeface="Calibri" pitchFamily="34" charset="0"/>
-                <a:ea typeface="Calibri" pitchFamily="34" charset="-122"/>
-                <a:cs typeface="Calibri" pitchFamily="34" charset="-120"/>
-              </a:rPr>
-              <a:t>1</a:t>
-            </a:r>
-            <a:endParaRPr lang="en-US" sz="1600" dirty="0"/>
-          </a:p>
-        </p:txBody>
-      </p:sp>
-      <p:sp>
-        <p:nvSpPr>
-          <p:cNvPr id="5" name="Text 3"/>
-          <p:cNvSpPr/>
-          <p:nvPr/>
-        </p:nvSpPr>
-        <p:spPr>
-          <a:xfrm>
-            <a:off x="1371600" y="1234440"/>
-            <a:ext cx="7040880" cy="320040"/>
-          </a:xfrm>
-          <a:prstGeom prst="rect">
-            <a:avLst/>
-          </a:prstGeom>
-          <a:noFill/>
-          <a:ln/>
-        </p:spPr>
-        <p:txBody>
-          <a:bodyPr wrap="square" lIns="0" tIns="0" rIns="0" bIns="0" rtlCol="0" anchor="ctr"/>
-          <a:lstStyle/>
-          <a:p>
-            <a:pPr marL="0" indent="0">
-              <a:buNone/>
-            </a:pPr>
-            <a:r>
-              <a:rPr lang="en-US" sz="1600" b="1" dirty="0">
-                <a:solidFill>
-                  <a:srgbClr val="FFFFFF"/>
-                </a:solidFill>
-                <a:latin typeface="Calibri" pitchFamily="34" charset="0"/>
-                <a:ea typeface="Calibri" pitchFamily="34" charset="-122"/>
-                <a:cs typeface="Calibri" pitchFamily="34" charset="-120"/>
-              </a:rPr>
-              <a:t>LLM Adoption Causes an Increase in Citation Diversity </a:t>
-            </a:r>
-            <a:endParaRPr lang="en-US" sz="1600" dirty="0"/>
-          </a:p>
-        </p:txBody>
-      </p:sp>
-      <p:sp>
-        <p:nvSpPr>
-          <p:cNvPr id="6" name="Text 4"/>
-          <p:cNvSpPr/>
-          <p:nvPr/>
-        </p:nvSpPr>
-        <p:spPr>
-          <a:xfrm>
-            <a:off x="1371600" y="1554480"/>
-            <a:ext cx="7040880" cy="411480"/>
-          </a:xfrm>
-          <a:prstGeom prst="rect">
-            <a:avLst/>
-          </a:prstGeom>
-          <a:noFill/>
-          <a:ln/>
-        </p:spPr>
-        <p:txBody>
-          <a:bodyPr wrap="square" lIns="0" tIns="0" rIns="0" bIns="0" rtlCol="0" anchor="ctr"/>
-          <a:lstStyle/>
-          <a:p>
-            <a:r>
-              <a:rPr lang="en-US" sz="1200" dirty="0">
-                <a:solidFill>
-                  <a:srgbClr val="C8CDD0"/>
-                </a:solidFill>
-                <a:latin typeface="Calibri" pitchFamily="34" charset="0"/>
-                <a:ea typeface="Calibri" pitchFamily="34" charset="-122"/>
-                <a:cs typeface="Calibri" pitchFamily="34" charset="-120"/>
-              </a:rPr>
-              <a:t>Shannon entropy increase post ChatGPT 4o introduction is modulated by AI propensity score</a:t>
-            </a:r>
-            <a:endParaRPr lang="en-US" sz="1200" dirty="0"/>
-          </a:p>
-        </p:txBody>
-      </p:sp>
-      <p:sp>
-        <p:nvSpPr>
-          <p:cNvPr id="19" name="Text 17"/>
-          <p:cNvSpPr/>
-          <p:nvPr/>
-        </p:nvSpPr>
-        <p:spPr>
-          <a:xfrm>
-            <a:off x="731520" y="4617720"/>
-            <a:ext cx="7680960" cy="365760"/>
-          </a:xfrm>
-          <a:prstGeom prst="rect">
-            <a:avLst/>
-          </a:prstGeom>
-          <a:noFill/>
-          <a:ln/>
-        </p:spPr>
-        <p:txBody>
-          <a:bodyPr wrap="square" rtlCol="0" anchor="ctr"/>
-          <a:lstStyle/>
-          <a:p>
-            <a:pPr marL="0" indent="0" algn="ctr">
-              <a:buNone/>
-            </a:pPr>
-            <a:r>
-              <a:rPr lang="en-US" sz="1100" dirty="0">
-                <a:solidFill>
-                  <a:srgbClr val="7A8084"/>
-                </a:solidFill>
-                <a:latin typeface="Calibri" pitchFamily="34" charset="0"/>
-                <a:ea typeface="Calibri" pitchFamily="34" charset="-122"/>
-                <a:cs typeface="Calibri" pitchFamily="34" charset="-120"/>
-              </a:rPr>
-              <a:t>Ben Heim &amp; Adam Tuchler  |  University of Chicago</a:t>
-            </a:r>
-            <a:endParaRPr lang="en-US" sz="1100" dirty="0"/>
-          </a:p>
-        </p:txBody>
-      </p:sp>
-    </p:spTree>
   </p:cSld>
   <p:clrMapOvr>
     <a:masterClrMapping/>
@@ -9576,6 +12905,258 @@
 
 <file path=ppt/slides/slide20.xml><?xml version="1.0" encoding="utf-8"?>
 <p:sld xmlns:a="http://schemas.openxmlformats.org/drawingml/2006/main" xmlns:r="http://schemas.openxmlformats.org/officeDocument/2006/relationships" xmlns:p="http://schemas.openxmlformats.org/presentationml/2006/main">
+  <p:cSld name="Slide 10">
+    <p:bg>
+      <p:bgPr>
+        <a:solidFill>
+          <a:srgbClr val="212121"/>
+        </a:solidFill>
+        <a:effectLst/>
+      </p:bgPr>
+    </p:bg>
+    <p:spTree>
+      <p:nvGrpSpPr>
+        <p:cNvPr id="1" name=""/>
+        <p:cNvGrpSpPr/>
+        <p:nvPr/>
+      </p:nvGrpSpPr>
+      <p:grpSpPr>
+        <a:xfrm>
+          <a:off x="0" y="0"/>
+          <a:ext cx="0" cy="0"/>
+          <a:chOff x="0" y="0"/>
+          <a:chExt cx="0" cy="0"/>
+        </a:xfrm>
+      </p:grpSpPr>
+      <p:sp>
+        <p:nvSpPr>
+          <p:cNvPr id="2" name="Text 0"/>
+          <p:cNvSpPr/>
+          <p:nvPr/>
+        </p:nvSpPr>
+        <p:spPr>
+          <a:xfrm>
+            <a:off x="731520" y="365760"/>
+            <a:ext cx="7680960" cy="640080"/>
+          </a:xfrm>
+          <a:prstGeom prst="rect">
+            <a:avLst/>
+          </a:prstGeom>
+          <a:noFill/>
+          <a:ln/>
+        </p:spPr>
+        <p:txBody>
+          <a:bodyPr wrap="square" lIns="0" tIns="0" rIns="0" bIns="0" rtlCol="0" anchor="ctr"/>
+          <a:lstStyle/>
+          <a:p>
+            <a:pPr marL="0" indent="0">
+              <a:buNone/>
+            </a:pPr>
+            <a:r>
+              <a:rPr lang="en-US" sz="3200" b="1" dirty="0">
+                <a:solidFill>
+                  <a:srgbClr val="FFFFFF"/>
+                </a:solidFill>
+                <a:latin typeface="Georgia" pitchFamily="34" charset="0"/>
+                <a:ea typeface="Georgia" pitchFamily="34" charset="-122"/>
+                <a:cs typeface="Georgia" pitchFamily="34" charset="-120"/>
+              </a:rPr>
+              <a:t>Key Takeaways</a:t>
+            </a:r>
+            <a:endParaRPr lang="en-US" sz="3200" dirty="0"/>
+          </a:p>
+        </p:txBody>
+      </p:sp>
+      <p:sp>
+        <p:nvSpPr>
+          <p:cNvPr id="3" name="Shape 1"/>
+          <p:cNvSpPr/>
+          <p:nvPr/>
+        </p:nvSpPr>
+        <p:spPr>
+          <a:xfrm>
+            <a:off x="731520" y="1280160"/>
+            <a:ext cx="411480" cy="411480"/>
+          </a:xfrm>
+          <a:prstGeom prst="ellipse">
+            <a:avLst/>
+          </a:prstGeom>
+          <a:solidFill>
+            <a:srgbClr val="E8963E"/>
+          </a:solidFill>
+          <a:ln/>
+        </p:spPr>
+        <p:txBody>
+          <a:bodyPr/>
+          <a:lstStyle/>
+          <a:p>
+            <a:endParaRPr lang="en-US"/>
+          </a:p>
+        </p:txBody>
+      </p:sp>
+      <p:sp>
+        <p:nvSpPr>
+          <p:cNvPr id="4" name="Text 2"/>
+          <p:cNvSpPr/>
+          <p:nvPr/>
+        </p:nvSpPr>
+        <p:spPr>
+          <a:xfrm>
+            <a:off x="731520" y="1280160"/>
+            <a:ext cx="411480" cy="411480"/>
+          </a:xfrm>
+          <a:prstGeom prst="rect">
+            <a:avLst/>
+          </a:prstGeom>
+          <a:noFill/>
+          <a:ln/>
+        </p:spPr>
+        <p:txBody>
+          <a:bodyPr wrap="square" rtlCol="0" anchor="ctr"/>
+          <a:lstStyle/>
+          <a:p>
+            <a:pPr marL="0" indent="0" algn="ctr">
+              <a:buNone/>
+            </a:pPr>
+            <a:r>
+              <a:rPr lang="en-US" sz="1600" b="1" dirty="0">
+                <a:solidFill>
+                  <a:srgbClr val="FFFFFF"/>
+                </a:solidFill>
+                <a:latin typeface="Calibri" pitchFamily="34" charset="0"/>
+                <a:ea typeface="Calibri" pitchFamily="34" charset="-122"/>
+                <a:cs typeface="Calibri" pitchFamily="34" charset="-120"/>
+              </a:rPr>
+              <a:t>1</a:t>
+            </a:r>
+            <a:endParaRPr lang="en-US" sz="1600" dirty="0"/>
+          </a:p>
+        </p:txBody>
+      </p:sp>
+      <p:sp>
+        <p:nvSpPr>
+          <p:cNvPr id="5" name="Text 3"/>
+          <p:cNvSpPr/>
+          <p:nvPr/>
+        </p:nvSpPr>
+        <p:spPr>
+          <a:xfrm>
+            <a:off x="1371600" y="1234440"/>
+            <a:ext cx="7040880" cy="320040"/>
+          </a:xfrm>
+          <a:prstGeom prst="rect">
+            <a:avLst/>
+          </a:prstGeom>
+          <a:noFill/>
+          <a:ln/>
+        </p:spPr>
+        <p:txBody>
+          <a:bodyPr wrap="square" lIns="0" tIns="0" rIns="0" bIns="0" rtlCol="0" anchor="ctr"/>
+          <a:lstStyle/>
+          <a:p>
+            <a:pPr marL="0" indent="0">
+              <a:buNone/>
+            </a:pPr>
+            <a:r>
+              <a:rPr lang="en-US" sz="1600" b="1" dirty="0">
+                <a:solidFill>
+                  <a:srgbClr val="FFFFFF"/>
+                </a:solidFill>
+                <a:latin typeface="Calibri" pitchFamily="34" charset="0"/>
+                <a:ea typeface="Calibri" pitchFamily="34" charset="-122"/>
+                <a:cs typeface="Calibri" pitchFamily="34" charset="-120"/>
+              </a:rPr>
+              <a:t>LLM Adoption Causes an Increase in Citation Diversity </a:t>
+            </a:r>
+            <a:endParaRPr lang="en-US" sz="1600" dirty="0"/>
+          </a:p>
+        </p:txBody>
+      </p:sp>
+      <p:sp>
+        <p:nvSpPr>
+          <p:cNvPr id="6" name="Text 4"/>
+          <p:cNvSpPr/>
+          <p:nvPr/>
+        </p:nvSpPr>
+        <p:spPr>
+          <a:xfrm>
+            <a:off x="1371600" y="1554480"/>
+            <a:ext cx="7040880" cy="411480"/>
+          </a:xfrm>
+          <a:prstGeom prst="rect">
+            <a:avLst/>
+          </a:prstGeom>
+          <a:noFill/>
+          <a:ln/>
+        </p:spPr>
+        <p:txBody>
+          <a:bodyPr wrap="square" lIns="0" tIns="0" rIns="0" bIns="0" rtlCol="0" anchor="ctr"/>
+          <a:lstStyle/>
+          <a:p>
+            <a:r>
+              <a:rPr lang="en-US" sz="1200" dirty="0">
+                <a:solidFill>
+                  <a:srgbClr val="C8CDD0"/>
+                </a:solidFill>
+                <a:latin typeface="Calibri" pitchFamily="34" charset="0"/>
+                <a:ea typeface="Calibri" pitchFamily="34" charset="-122"/>
+                <a:cs typeface="Calibri" pitchFamily="34" charset="-120"/>
+              </a:rPr>
+              <a:t>Shannon entropy increase post ChatGPT 4o introduction is modulated by AI propensity score</a:t>
+            </a:r>
+            <a:endParaRPr lang="en-US" sz="1200" dirty="0"/>
+          </a:p>
+        </p:txBody>
+      </p:sp>
+      <p:sp>
+        <p:nvSpPr>
+          <p:cNvPr id="19" name="Text 17"/>
+          <p:cNvSpPr/>
+          <p:nvPr/>
+        </p:nvSpPr>
+        <p:spPr>
+          <a:xfrm>
+            <a:off x="731520" y="4617720"/>
+            <a:ext cx="7680960" cy="365760"/>
+          </a:xfrm>
+          <a:prstGeom prst="rect">
+            <a:avLst/>
+          </a:prstGeom>
+          <a:noFill/>
+          <a:ln/>
+        </p:spPr>
+        <p:txBody>
+          <a:bodyPr wrap="square" rtlCol="0" anchor="ctr"/>
+          <a:lstStyle/>
+          <a:p>
+            <a:pPr marL="0" indent="0" algn="ctr">
+              <a:buNone/>
+            </a:pPr>
+            <a:r>
+              <a:rPr lang="en-US" sz="1100" dirty="0">
+                <a:solidFill>
+                  <a:srgbClr val="7A8084"/>
+                </a:solidFill>
+                <a:latin typeface="Calibri" pitchFamily="34" charset="0"/>
+                <a:ea typeface="Calibri" pitchFamily="34" charset="-122"/>
+                <a:cs typeface="Calibri" pitchFamily="34" charset="-120"/>
+              </a:rPr>
+              <a:t>Ben Heim &amp; Adam Tuchler  |  University of Chicago</a:t>
+            </a:r>
+            <a:endParaRPr lang="en-US" sz="1100" dirty="0"/>
+          </a:p>
+        </p:txBody>
+      </p:sp>
+    </p:spTree>
+  </p:cSld>
+  <p:clrMapOvr>
+    <a:masterClrMapping/>
+  </p:clrMapOvr>
+</p:sld>
+</file>
+
+<file path=ppt/slides/slide21.xml><?xml version="1.0" encoding="utf-8"?>
+<p:sld xmlns:a="http://schemas.openxmlformats.org/drawingml/2006/main" xmlns:r="http://schemas.openxmlformats.org/officeDocument/2006/relationships" xmlns:p="http://schemas.openxmlformats.org/presentationml/2006/main">
   <p:cSld>
     <p:bg>
       <p:bgPr>
@@ -10041,7 +13622,7 @@
 </p:sld>
 </file>
 
-<file path=ppt/slides/slide21.xml><?xml version="1.0" encoding="utf-8"?>
+<file path=ppt/slides/slide22.xml><?xml version="1.0" encoding="utf-8"?>
 <p:sld xmlns:a="http://schemas.openxmlformats.org/drawingml/2006/main" xmlns:r="http://schemas.openxmlformats.org/officeDocument/2006/relationships" xmlns:p="http://schemas.openxmlformats.org/presentationml/2006/main">
   <p:cSld>
     <p:bg>
@@ -10679,7 +14260,7 @@
 </p:sld>
 </file>
 
-<file path=ppt/slides/slide22.xml><?xml version="1.0" encoding="utf-8"?>
+<file path=ppt/slides/slide23.xml><?xml version="1.0" encoding="utf-8"?>
 <p:sld xmlns:a="http://schemas.openxmlformats.org/drawingml/2006/main" xmlns:r="http://schemas.openxmlformats.org/officeDocument/2006/relationships" xmlns:p="http://schemas.openxmlformats.org/presentationml/2006/main">
   <p:cSld>
     <p:bg>
@@ -11482,7 +15063,7 @@
 </p:sld>
 </file>
 
-<file path=ppt/slides/slide23.xml><?xml version="1.0" encoding="utf-8"?>
+<file path=ppt/slides/slide24.xml><?xml version="1.0" encoding="utf-8"?>
 <p:sld xmlns:a="http://schemas.openxmlformats.org/drawingml/2006/main" xmlns:r="http://schemas.openxmlformats.org/officeDocument/2006/relationships" xmlns:p="http://schemas.openxmlformats.org/presentationml/2006/main">
   <p:cSld>
     <p:bg>
@@ -11838,7 +15419,7 @@
 </p:sld>
 </file>
 
-<file path=ppt/slides/slide24.xml><?xml version="1.0" encoding="utf-8"?>
+<file path=ppt/slides/slide25.xml><?xml version="1.0" encoding="utf-8"?>
 <p:sld xmlns:a="http://schemas.openxmlformats.org/drawingml/2006/main" xmlns:r="http://schemas.openxmlformats.org/officeDocument/2006/relationships" xmlns:p="http://schemas.openxmlformats.org/presentationml/2006/main">
   <p:cSld>
     <p:bg>
@@ -12247,12 +15828,14 @@
 </p:sld>
 </file>
 
-<file path=ppt/slides/slide25.xml><?xml version="1.0" encoding="utf-8"?>
+<file path=ppt/slides/slide26.xml><?xml version="1.0" encoding="utf-8"?>
 <p:sld xmlns:a="http://schemas.openxmlformats.org/drawingml/2006/main" xmlns:r="http://schemas.openxmlformats.org/officeDocument/2006/relationships" xmlns:p="http://schemas.openxmlformats.org/presentationml/2006/main">
   <p:cSld>
     <p:bg>
       <p:bgPr>
-        <a:noFill/>
+        <a:solidFill>
+          <a:srgbClr val="F2F2F2"/>
+        </a:solidFill>
         <a:effectLst/>
       </p:bgPr>
     </p:bg>
@@ -12278,48 +15861,405 @@
       </p:grpSpPr>
       <p:sp>
         <p:nvSpPr>
-          <p:cNvPr id="2" name="TextBox 1">
-            <a:extLst>
-              <a:ext uri="{FF2B5EF4-FFF2-40B4-BE49-F238E27FC236}">
-                <a16:creationId xmlns:a16="http://schemas.microsoft.com/office/drawing/2014/main" id="{4B6AA504-C4CF-FBFA-4A0E-DEEFCE2D3198}"/>
-              </a:ext>
-            </a:extLst>
-          </p:cNvPr>
+          <p:cNvPr id="2" name="TextBox 1"/>
           <p:cNvSpPr txBox="1"/>
           <p:nvPr/>
         </p:nvSpPr>
         <p:spPr>
           <a:xfrm>
             <a:off x="548640" y="274320"/>
-            <a:ext cx="8046720" cy="523220"/>
+            <a:ext cx="8046720" cy="548640"/>
           </a:xfrm>
           <a:prstGeom prst="rect">
             <a:avLst/>
           </a:prstGeom>
           <a:noFill/>
-          <a:ln/>
-        </p:spPr>
-        <p:txBody>
-          <a:bodyPr wrap="square" anchor="t">
+        </p:spPr>
+        <p:txBody>
+          <a:bodyPr wrap="square">
             <a:spAutoFit/>
           </a:bodyPr>
           <a:lstStyle/>
           <a:p>
-            <a:pPr algn="l">
-              <a:defRPr sz="2800" b="1" i="0">
+            <a:r>
+              <a:rPr sz="2800" b="1" i="0">
                 <a:solidFill>
                   <a:srgbClr val="36454F"/>
                 </a:solidFill>
                 <a:latin typeface="Georgia"/>
-              </a:defRPr>
+              </a:rPr>
+              <a:t>Policy Implications</a:t>
+            </a:r>
+          </a:p>
+        </p:txBody>
+      </p:sp>
+      <p:sp>
+        <p:nvSpPr>
+          <p:cNvPr id="3" name="Rounded Rectangle 2"/>
+          <p:cNvSpPr/>
+          <p:nvPr/>
+        </p:nvSpPr>
+        <p:spPr>
+          <a:xfrm>
+            <a:off x="548640" y="1188720"/>
+            <a:ext cx="3794760" cy="3200400"/>
+          </a:xfrm>
+          <a:prstGeom prst="roundRect">
+            <a:avLst>
+              <a:gd name="adj" fmla="val 2000"/>
+            </a:avLst>
+          </a:prstGeom>
+          <a:solidFill>
+            <a:srgbClr val="FFFFFF"/>
+          </a:solidFill>
+          <a:ln>
+            <a:noFill/>
+          </a:ln>
+        </p:spPr>
+        <p:style>
+          <a:lnRef idx="1">
+            <a:schemeClr val="accent1"/>
+          </a:lnRef>
+          <a:fillRef idx="3">
+            <a:schemeClr val="accent1"/>
+          </a:fillRef>
+          <a:effectRef idx="2">
+            <a:schemeClr val="accent1"/>
+          </a:effectRef>
+          <a:fontRef idx="minor">
+            <a:schemeClr val="lt1"/>
+          </a:fontRef>
+        </p:style>
+        <p:txBody>
+          <a:bodyPr rtlCol="0" anchor="ctr"/>
+          <a:lstStyle/>
+          <a:p>
+            <a:pPr algn="ctr"/>
+          </a:p>
+        </p:txBody>
+      </p:sp>
+      <p:sp>
+        <p:nvSpPr>
+          <p:cNvPr id="4" name="Rectangle 3"/>
+          <p:cNvSpPr/>
+          <p:nvPr/>
+        </p:nvSpPr>
+        <p:spPr>
+          <a:xfrm>
+            <a:off x="548640" y="1188720"/>
+            <a:ext cx="3794760" cy="54864"/>
+          </a:xfrm>
+          <a:prstGeom prst="rect">
+            <a:avLst/>
+          </a:prstGeom>
+          <a:solidFill>
+            <a:srgbClr val="E8963E"/>
+          </a:solidFill>
+          <a:ln>
+            <a:noFill/>
+          </a:ln>
+        </p:spPr>
+        <p:style>
+          <a:lnRef idx="1">
+            <a:schemeClr val="accent1"/>
+          </a:lnRef>
+          <a:fillRef idx="3">
+            <a:schemeClr val="accent1"/>
+          </a:fillRef>
+          <a:effectRef idx="2">
+            <a:schemeClr val="accent1"/>
+          </a:effectRef>
+          <a:fontRef idx="minor">
+            <a:schemeClr val="lt1"/>
+          </a:fontRef>
+        </p:style>
+        <p:txBody>
+          <a:bodyPr rtlCol="0" anchor="ctr"/>
+          <a:lstStyle/>
+          <a:p>
+            <a:pPr algn="ctr"/>
+          </a:p>
+        </p:txBody>
+      </p:sp>
+      <p:sp>
+        <p:nvSpPr>
+          <p:cNvPr id="5" name="TextBox 4"/>
+          <p:cNvSpPr txBox="1"/>
+          <p:nvPr/>
+        </p:nvSpPr>
+        <p:spPr>
+          <a:xfrm>
+            <a:off x="822960" y="1463040"/>
+            <a:ext cx="3246120" cy="2743200"/>
+          </a:xfrm>
+          <a:prstGeom prst="rect">
+            <a:avLst/>
+          </a:prstGeom>
+          <a:noFill/>
+        </p:spPr>
+        <p:txBody>
+          <a:bodyPr wrap="square">
+            <a:spAutoFit/>
+          </a:bodyPr>
+          <a:lstStyle/>
+          <a:p>
+            <a:r>
+              <a:rPr sz="1600" b="1" i="0">
+                <a:solidFill>
+                  <a:srgbClr val="36454F"/>
+                </a:solidFill>
+                <a:latin typeface="Calibri"/>
+              </a:rPr>
+              <a:t>The Evidence</a:t>
+            </a:r>
+          </a:p>
+          <a:p>
+            <a:pPr>
+              <a:spcBef>
+                <a:spcPts val="1000"/>
+              </a:spcBef>
             </a:pPr>
             <a:r>
-              <a:rPr lang="en-US" dirty="0">
-                <a:solidFill/>
-              </a:rPr>
-              <a:t>Policy Implications</a:t>
-            </a:r>
-            <a:endParaRPr dirty="0"/>
+              <a:rPr sz="1300" b="0" i="0">
+                <a:solidFill>
+                  <a:srgbClr val="36454F"/>
+                </a:solidFill>
+                <a:latin typeface="Calibri"/>
+              </a:rPr>
+              <a:t>LLMs increase the disciplinary breadth of citations in fields that adopt them most heavily. </a:t>
+            </a:r>
+            <a:r>
+              <a:rPr sz="1300" b="0" i="1">
+                <a:solidFill>
+                  <a:srgbClr val="36454F"/>
+                </a:solidFill>
+                <a:latin typeface="Calibri"/>
+              </a:rPr>
+              <a:t>This effect is causal, gradual, and consistent across multiple diversity measures.</a:t>
+            </a:r>
+          </a:p>
+          <a:p>
+            <a:pPr>
+              <a:spcBef>
+                <a:spcPts val="1400"/>
+              </a:spcBef>
+            </a:pPr>
+            <a:r>
+              <a:rPr sz="1300" b="0" i="0">
+                <a:solidFill>
+                  <a:srgbClr val="7A8084"/>
+                </a:solidFill>
+                <a:latin typeface="Calibri"/>
+              </a:rPr>
+              <a:t>However, whether broader citations translate into lasting impact remains an open question.</a:t>
+            </a:r>
+          </a:p>
+        </p:txBody>
+      </p:sp>
+      <p:sp>
+        <p:nvSpPr>
+          <p:cNvPr id="6" name="Rounded Rectangle 5"/>
+          <p:cNvSpPr/>
+          <p:nvPr/>
+        </p:nvSpPr>
+        <p:spPr>
+          <a:xfrm>
+            <a:off x="4800600" y="1188720"/>
+            <a:ext cx="3794760" cy="3200400"/>
+          </a:xfrm>
+          <a:prstGeom prst="roundRect">
+            <a:avLst>
+              <a:gd name="adj" fmla="val 2000"/>
+            </a:avLst>
+          </a:prstGeom>
+          <a:solidFill>
+            <a:srgbClr val="FFFFFF"/>
+          </a:solidFill>
+          <a:ln>
+            <a:noFill/>
+          </a:ln>
+        </p:spPr>
+        <p:style>
+          <a:lnRef idx="1">
+            <a:schemeClr val="accent1"/>
+          </a:lnRef>
+          <a:fillRef idx="3">
+            <a:schemeClr val="accent1"/>
+          </a:fillRef>
+          <a:effectRef idx="2">
+            <a:schemeClr val="accent1"/>
+          </a:effectRef>
+          <a:fontRef idx="minor">
+            <a:schemeClr val="lt1"/>
+          </a:fontRef>
+        </p:style>
+        <p:txBody>
+          <a:bodyPr rtlCol="0" anchor="ctr"/>
+          <a:lstStyle/>
+          <a:p>
+            <a:pPr algn="ctr"/>
+          </a:p>
+        </p:txBody>
+      </p:sp>
+      <p:sp>
+        <p:nvSpPr>
+          <p:cNvPr id="7" name="Rectangle 6"/>
+          <p:cNvSpPr/>
+          <p:nvPr/>
+        </p:nvSpPr>
+        <p:spPr>
+          <a:xfrm>
+            <a:off x="4800600" y="1188720"/>
+            <a:ext cx="3794760" cy="54864"/>
+          </a:xfrm>
+          <a:prstGeom prst="rect">
+            <a:avLst/>
+          </a:prstGeom>
+          <a:solidFill>
+            <a:srgbClr val="E8963E"/>
+          </a:solidFill>
+          <a:ln>
+            <a:noFill/>
+          </a:ln>
+        </p:spPr>
+        <p:style>
+          <a:lnRef idx="1">
+            <a:schemeClr val="accent1"/>
+          </a:lnRef>
+          <a:fillRef idx="3">
+            <a:schemeClr val="accent1"/>
+          </a:fillRef>
+          <a:effectRef idx="2">
+            <a:schemeClr val="accent1"/>
+          </a:effectRef>
+          <a:fontRef idx="minor">
+            <a:schemeClr val="lt1"/>
+          </a:fontRef>
+        </p:style>
+        <p:txBody>
+          <a:bodyPr rtlCol="0" anchor="ctr"/>
+          <a:lstStyle/>
+          <a:p>
+            <a:pPr algn="ctr"/>
+          </a:p>
+        </p:txBody>
+      </p:sp>
+      <p:sp>
+        <p:nvSpPr>
+          <p:cNvPr id="8" name="TextBox 7"/>
+          <p:cNvSpPr txBox="1"/>
+          <p:nvPr/>
+        </p:nvSpPr>
+        <p:spPr>
+          <a:xfrm>
+            <a:off x="5074920" y="1463040"/>
+            <a:ext cx="3246120" cy="2743200"/>
+          </a:xfrm>
+          <a:prstGeom prst="rect">
+            <a:avLst/>
+          </a:prstGeom>
+          <a:noFill/>
+        </p:spPr>
+        <p:txBody>
+          <a:bodyPr wrap="square">
+            <a:spAutoFit/>
+          </a:bodyPr>
+          <a:lstStyle/>
+          <a:p>
+            <a:r>
+              <a:rPr sz="1600" b="1" i="0">
+                <a:solidFill>
+                  <a:srgbClr val="36454F"/>
+                </a:solidFill>
+                <a:latin typeface="Calibri"/>
+              </a:rPr>
+              <a:t>The Recommendation</a:t>
+            </a:r>
+          </a:p>
+          <a:p>
+            <a:pPr>
+              <a:spcBef>
+                <a:spcPts val="1000"/>
+              </a:spcBef>
+            </a:pPr>
+            <a:r>
+              <a:rPr sz="1300" b="1" i="0">
+                <a:solidFill>
+                  <a:srgbClr val="36454F"/>
+                </a:solidFill>
+                <a:latin typeface="Calibri"/>
+              </a:rPr>
+              <a:t>Universities should provide researchers with frontier LLMs</a:t>
+            </a:r>
+            <a:r>
+              <a:rPr sz="1300" b="0" i="0">
+                <a:solidFill>
+                  <a:srgbClr val="36454F"/>
+                </a:solidFill>
+                <a:latin typeface="Calibri"/>
+              </a:rPr>
+              <a:t> to expose them to a wider range of sources across disciplines.</a:t>
+            </a:r>
+          </a:p>
+          <a:p>
+            <a:pPr>
+              <a:spcBef>
+                <a:spcPts val="1000"/>
+              </a:spcBef>
+            </a:pPr>
+            <a:r>
+              <a:rPr sz="1300" b="1" i="0">
+                <a:solidFill>
+                  <a:srgbClr val="36454F"/>
+                </a:solidFill>
+                <a:latin typeface="Calibri"/>
+              </a:rPr>
+              <a:t>At the same time, institutions should closely monitor impact measures</a:t>
+            </a:r>
+            <a:r>
+              <a:rPr sz="1300" b="0" i="0">
+                <a:solidFill>
+                  <a:srgbClr val="36454F"/>
+                </a:solidFill>
+                <a:latin typeface="Calibri"/>
+              </a:rPr>
+              <a:t> to determine whether LLMs are driving genuine discovery or merely broadening surface-level references.</a:t>
+            </a:r>
+          </a:p>
+        </p:txBody>
+      </p:sp>
+      <p:sp>
+        <p:nvSpPr>
+          <p:cNvPr id="9" name="TextBox 8"/>
+          <p:cNvSpPr txBox="1"/>
+          <p:nvPr/>
+        </p:nvSpPr>
+        <p:spPr>
+          <a:xfrm>
+            <a:off x="548640" y="4617720"/>
+            <a:ext cx="8046720" cy="365760"/>
+          </a:xfrm>
+          <a:prstGeom prst="rect">
+            <a:avLst/>
+          </a:prstGeom>
+          <a:noFill/>
+        </p:spPr>
+        <p:txBody>
+          <a:bodyPr wrap="square">
+            <a:spAutoFit/>
+          </a:bodyPr>
+          <a:lstStyle/>
+          <a:p>
+            <a:pPr algn="ctr"/>
+            <a:r>
+              <a:rPr sz="1100" b="0" i="0">
+                <a:solidFill>
+                  <a:srgbClr val="7A8084"/>
+                </a:solidFill>
+                <a:latin typeface="Calibri"/>
+              </a:rPr>
+              <a:t>Ben Heim &amp; Adam Tuchler  |  University of Chicago</a:t>
+            </a:r>
           </a:p>
         </p:txBody>
       </p:sp>
@@ -14069,7 +18009,7 @@
                 <a:ea typeface="Calibri" pitchFamily="34" charset="-122"/>
                 <a:cs typeface="Calibri" pitchFamily="34" charset="-120"/>
               </a:rPr>
-              <a:t>Our contribution: causal identification of how LLM availability affects cross-field citation entropy using continuous treatment intensity</a:t>
+              <a:t>Our contribution: causal identification of how LLM adoption affects cross-field citation entropy using continuous treatment intensity</a:t>
             </a:r>
             <a:endParaRPr lang="en-US" sz="1200" dirty="0"/>
           </a:p>
@@ -14513,6 +18453,225 @@
 
 <file path=ppt/slides/slide8.xml><?xml version="1.0" encoding="utf-8"?>
 <p:sld xmlns:a="http://schemas.openxmlformats.org/drawingml/2006/main" xmlns:r="http://schemas.openxmlformats.org/officeDocument/2006/relationships" xmlns:p="http://schemas.openxmlformats.org/presentationml/2006/main">
+  <p:cSld>
+    <p:bg>
+      <p:bgPr>
+        <a:solidFill>
+          <a:srgbClr val="F2F2F2"/>
+        </a:solidFill>
+        <a:effectLst/>
+      </p:bgPr>
+    </p:bg>
+    <p:spTree>
+      <p:nvGrpSpPr>
+        <p:cNvPr id="1" name="">
+          <a:extLst>
+            <a:ext uri="{FF2B5EF4-FFF2-40B4-BE49-F238E27FC236}">
+              <a16:creationId xmlns:a16="http://schemas.microsoft.com/office/drawing/2014/main" id="{94E301D7-3DCA-C81C-6A13-752472ED67DE}"/>
+            </a:ext>
+          </a:extLst>
+        </p:cNvPr>
+        <p:cNvGrpSpPr/>
+        <p:nvPr/>
+      </p:nvGrpSpPr>
+      <p:grpSpPr>
+        <a:xfrm>
+          <a:off x="0" y="0"/>
+          <a:ext cx="0" cy="0"/>
+          <a:chOff x="0" y="0"/>
+          <a:chExt cx="0" cy="0"/>
+        </a:xfrm>
+      </p:grpSpPr>
+      <p:sp>
+        <p:nvSpPr>
+          <p:cNvPr id="2" name="Text 0">
+            <a:extLst>
+              <a:ext uri="{FF2B5EF4-FFF2-40B4-BE49-F238E27FC236}">
+                <a16:creationId xmlns:a16="http://schemas.microsoft.com/office/drawing/2014/main" id="{AF8F3F68-6571-6167-2B6C-24467A9B1443}"/>
+              </a:ext>
+            </a:extLst>
+          </p:cNvPr>
+          <p:cNvSpPr/>
+          <p:nvPr/>
+        </p:nvSpPr>
+        <p:spPr>
+          <a:xfrm>
+            <a:off x="548640" y="274320"/>
+            <a:ext cx="8046720" cy="548640"/>
+          </a:xfrm>
+          <a:prstGeom prst="rect">
+            <a:avLst/>
+          </a:prstGeom>
+          <a:noFill/>
+          <a:ln/>
+        </p:spPr>
+        <p:txBody>
+          <a:bodyPr wrap="square" lIns="0" tIns="0" rIns="0" bIns="0" rtlCol="0" anchor="ctr"/>
+          <a:lstStyle/>
+          <a:p>
+            <a:pPr marL="0" indent="0">
+              <a:buNone/>
+            </a:pPr>
+            <a:r>
+              <a:rPr lang="en-US" sz="2400" b="1" dirty="0">
+                <a:solidFill>
+                  <a:srgbClr val="36454F"/>
+                </a:solidFill>
+                <a:latin typeface="Georgia" pitchFamily="34" charset="0"/>
+                <a:ea typeface="Georgia" pitchFamily="34" charset="-122"/>
+                <a:cs typeface="Georgia" pitchFamily="34" charset="-120"/>
+              </a:rPr>
+              <a:t>Measuring AI Adoption: Propensity Scores</a:t>
+            </a:r>
+            <a:endParaRPr lang="en-US" sz="2400" dirty="0"/>
+          </a:p>
+        </p:txBody>
+      </p:sp>
+      <p:sp>
+        <p:nvSpPr>
+          <p:cNvPr id="3" name="Text 1">
+            <a:extLst>
+              <a:ext uri="{FF2B5EF4-FFF2-40B4-BE49-F238E27FC236}">
+                <a16:creationId xmlns:a16="http://schemas.microsoft.com/office/drawing/2014/main" id="{7E633E5F-4FDB-E8CF-C373-568A657213B3}"/>
+              </a:ext>
+            </a:extLst>
+          </p:cNvPr>
+          <p:cNvSpPr/>
+          <p:nvPr/>
+        </p:nvSpPr>
+        <p:spPr>
+          <a:xfrm>
+            <a:off x="548640" y="777240"/>
+            <a:ext cx="8046720" cy="365760"/>
+          </a:xfrm>
+          <a:prstGeom prst="rect">
+            <a:avLst/>
+          </a:prstGeom>
+          <a:noFill/>
+          <a:ln/>
+        </p:spPr>
+        <p:txBody>
+          <a:bodyPr wrap="square" rtlCol="0" anchor="ctr"/>
+          <a:lstStyle/>
+          <a:p>
+            <a:pPr marL="0" indent="0">
+              <a:buNone/>
+            </a:pPr>
+            <a:r>
+              <a:rPr lang="en-US" sz="1200" dirty="0">
+                <a:solidFill>
+                  <a:srgbClr val="7A8084"/>
+                </a:solidFill>
+                <a:latin typeface="Calibri" pitchFamily="34" charset="0"/>
+                <a:ea typeface="Calibri" pitchFamily="34" charset="-122"/>
+                <a:cs typeface="Calibri" pitchFamily="34" charset="-120"/>
+              </a:rPr>
+              <a:t>Increase in Kobak marker word frequency from pre- to post-ChatGPT (GPT-3.5) era</a:t>
+            </a:r>
+            <a:endParaRPr lang="en-US" sz="1200" dirty="0"/>
+          </a:p>
+        </p:txBody>
+      </p:sp>
+      <p:pic>
+        <p:nvPicPr>
+          <p:cNvPr id="6" name="Picture 5" descr="A graph of a number of numbers&#10;&#10;AI-generated content may be incorrect.">
+            <a:extLst>
+              <a:ext uri="{FF2B5EF4-FFF2-40B4-BE49-F238E27FC236}">
+                <a16:creationId xmlns:a16="http://schemas.microsoft.com/office/drawing/2014/main" id="{040C6A73-6387-6CF5-0A92-859804CE1A17}"/>
+              </a:ext>
+            </a:extLst>
+          </p:cNvPr>
+          <p:cNvPicPr>
+            <a:picLocks noChangeAspect="1"/>
+          </p:cNvPicPr>
+          <p:nvPr/>
+        </p:nvPicPr>
+        <p:blipFill>
+          <a:blip r:embed="rId3"/>
+          <a:stretch>
+            <a:fillRect/>
+          </a:stretch>
+        </p:blipFill>
+        <p:spPr>
+          <a:xfrm>
+            <a:off x="548640" y="1172817"/>
+            <a:ext cx="4256418" cy="3696363"/>
+          </a:xfrm>
+          <a:prstGeom prst="rect">
+            <a:avLst/>
+          </a:prstGeom>
+          <a:ln/>
+        </p:spPr>
+      </p:pic>
+      <p:sp>
+        <p:nvSpPr>
+          <p:cNvPr id="4" name="TextBox 3">
+            <a:extLst>
+              <a:ext uri="{FF2B5EF4-FFF2-40B4-BE49-F238E27FC236}">
+                <a16:creationId xmlns:a16="http://schemas.microsoft.com/office/drawing/2014/main" id="{96F14635-9800-DE72-118A-B01CF7215FAE}"/>
+              </a:ext>
+            </a:extLst>
+          </p:cNvPr>
+          <p:cNvSpPr txBox="1"/>
+          <p:nvPr/>
+        </p:nvSpPr>
+        <p:spPr>
+          <a:xfrm>
+            <a:off x="5251269" y="1172817"/>
+            <a:ext cx="3516521" cy="1815882"/>
+          </a:xfrm>
+          <a:prstGeom prst="rect">
+            <a:avLst/>
+          </a:prstGeom>
+          <a:noFill/>
+          <a:ln/>
+        </p:spPr>
+        <p:txBody>
+          <a:bodyPr wrap="square" rtlCol="0">
+            <a:spAutoFit/>
+          </a:bodyPr>
+          <a:lstStyle/>
+          <a:p>
+            <a:pPr marL="285750" indent="-285750">
+              <a:buFont typeface="Arial" panose="020B0604020202020204" pitchFamily="34" charset="0"/>
+              <a:buChar char="•"/>
+            </a:pPr>
+            <a:r>
+              <a:rPr lang="en-US" sz="1400" dirty="0">
+                <a:solidFill/>
+              </a:rPr>
+              <a:t>Kobak measure examines frequency of style words commonly associated with LLMs</a:t>
+            </a:r>
+          </a:p>
+          <a:p>
+            <a:pPr marL="285750" indent="-285750">
+              <a:buFont typeface="Arial" panose="020B0604020202020204" pitchFamily="34" charset="0"/>
+              <a:buChar char="•"/>
+            </a:pPr>
+            <a:r>
+              <a:rPr lang="en-US" sz="1400" dirty="0">
+                <a:solidFill/>
+              </a:rPr>
+              <a:t>We measure AI propensity by using (marker words per million 6 months after GPT 3.5 release – marker words per million before GPT 3.5 release)/(marker words per million before GPT 3.5 release)</a:t>
+            </a:r>
+          </a:p>
+        </p:txBody>
+      </p:sp>
+    </p:spTree>
+    <p:extLst>
+      <p:ext uri="{BB962C8B-B14F-4D97-AF65-F5344CB8AC3E}">
+        <p14:creationId xmlns:p14="http://schemas.microsoft.com/office/powerpoint/2010/main" val="3674893146"/>
+      </p:ext>
+    </p:extLst>
+  </p:cSld>
+  <p:clrMapOvr>
+    <a:masterClrMapping/>
+  </p:clrMapOvr>
+</p:sld>
+</file>
+
+<file path=ppt/slides/slide9.xml><?xml version="1.0" encoding="utf-8"?>
+<p:sld xmlns:a="http://schemas.openxmlformats.org/drawingml/2006/main" xmlns:r="http://schemas.openxmlformats.org/officeDocument/2006/relationships" xmlns:p="http://schemas.openxmlformats.org/presentationml/2006/main">
   <p:cSld name="Slide 4">
     <p:bg>
       <p:bgPr>
@@ -14700,791 +18859,6 @@
         </p:txBody>
       </p:sp>
     </p:spTree>
-  </p:cSld>
-  <p:clrMapOvr>
-    <a:masterClrMapping/>
-  </p:clrMapOvr>
-</p:sld>
-</file>
-
-<file path=ppt/slides/slide9.xml><?xml version="1.0" encoding="utf-8"?>
-<p:sld xmlns:a="http://schemas.openxmlformats.org/drawingml/2006/main" xmlns:r="http://schemas.openxmlformats.org/officeDocument/2006/relationships" xmlns:p="http://schemas.openxmlformats.org/presentationml/2006/main">
-  <p:cSld>
-    <p:bg>
-      <p:bgPr>
-        <a:noFill/>
-        <a:effectLst/>
-      </p:bgPr>
-    </p:bg>
-    <p:spTree>
-      <p:nvGrpSpPr>
-        <p:cNvPr id="1" name="">
-          <a:extLst>
-            <a:ext uri="{FF2B5EF4-FFF2-40B4-BE49-F238E27FC236}">
-              <a16:creationId xmlns:a16="http://schemas.microsoft.com/office/drawing/2014/main" id="{69D567DB-FE2E-9260-4B18-1BB3FF3D7F08}"/>
-            </a:ext>
-          </a:extLst>
-        </p:cNvPr>
-        <p:cNvGrpSpPr/>
-        <p:nvPr/>
-      </p:nvGrpSpPr>
-      <p:grpSpPr>
-        <a:xfrm>
-          <a:off x="0" y="0"/>
-          <a:ext cx="0" cy="0"/>
-          <a:chOff x="0" y="0"/>
-          <a:chExt cx="0" cy="0"/>
-        </a:xfrm>
-      </p:grpSpPr>
-      <p:sp>
-        <p:nvSpPr>
-          <p:cNvPr id="2" name="Text 0">
-            <a:extLst>
-              <a:ext uri="{FF2B5EF4-FFF2-40B4-BE49-F238E27FC236}">
-                <a16:creationId xmlns:a16="http://schemas.microsoft.com/office/drawing/2014/main" id="{2CAF07AD-2908-26FD-6630-9C5F694A37DF}"/>
-              </a:ext>
-            </a:extLst>
-          </p:cNvPr>
-          <p:cNvSpPr/>
-          <p:nvPr/>
-        </p:nvSpPr>
-        <p:spPr>
-          <a:xfrm>
-            <a:off x="548640" y="274320"/>
-            <a:ext cx="8046720" cy="548640"/>
-          </a:xfrm>
-          <a:prstGeom prst="rect">
-            <a:avLst/>
-          </a:prstGeom>
-          <a:noFill/>
-          <a:ln/>
-        </p:spPr>
-        <p:txBody>
-          <a:bodyPr wrap="square" lIns="0" tIns="0" rIns="0" bIns="0" rtlCol="0" anchor="ctr"/>
-          <a:lstStyle/>
-          <a:p>
-            <a:pPr marL="0" indent="0">
-              <a:buNone/>
-            </a:pPr>
-            <a:r>
-              <a:rPr lang="en-US" sz="2800" b="1" dirty="0">
-                <a:solidFill>
-                  <a:srgbClr val="36454F"/>
-                </a:solidFill>
-                <a:latin typeface="Georgia" pitchFamily="34" charset="0"/>
-              </a:rPr>
-              <a:t>Regression Specification</a:t>
-            </a:r>
-            <a:endParaRPr lang="en-US" sz="2800" dirty="0"/>
-          </a:p>
-        </p:txBody>
-      </p:sp>
-      <p:sp>
-        <p:nvSpPr>
-          <p:cNvPr id="3" name="TextBox 2"/>
-          <p:cNvSpPr txBox="1"/>
-          <p:nvPr/>
-        </p:nvSpPr>
-        <p:spPr>
-          <a:xfrm>
-            <a:off x="548640" y="777240"/>
-            <a:ext cx="8046720" cy="365760"/>
-          </a:xfrm>
-          <a:prstGeom prst="rect">
-            <a:avLst/>
-          </a:prstGeom>
-          <a:noFill/>
-          <a:ln/>
-        </p:spPr>
-        <p:txBody>
-          <a:bodyPr wrap="square">
-            <a:spAutoFit/>
-          </a:bodyPr>
-          <a:lstStyle/>
-          <a:p>
-            <a:pPr algn="l">
-              <a:defRPr sz="1200" b="0" i="0">
-                <a:solidFill>
-                  <a:srgbClr val="7A8084"/>
-                </a:solidFill>
-                <a:latin typeface="Calibri"/>
-              </a:defRPr>
-            </a:pPr>
-            <a:r>
-              <a:rPr>
-                <a:solidFill/>
-              </a:rPr>
-              <a:t>Diff-in-diff with continuous treatment intensity and monthly trend</a:t>
-            </a:r>
-          </a:p>
-        </p:txBody>
-      </p:sp>
-      <p:sp>
-        <p:nvSpPr>
-          <p:cNvPr id="4" name="Rounded Rectangle 3"/>
-          <p:cNvSpPr/>
-          <p:nvPr/>
-        </p:nvSpPr>
-        <p:spPr>
-          <a:xfrm>
-            <a:off x="731520" y="1325880"/>
-            <a:ext cx="7680960" cy="777240"/>
-          </a:xfrm>
-          <a:prstGeom prst="roundRect">
-            <a:avLst>
-              <a:gd name="adj" fmla="val 2000"/>
-            </a:avLst>
-          </a:prstGeom>
-          <a:solidFill>
-            <a:srgbClr val="36454F"/>
-          </a:solidFill>
-          <a:ln>
-            <a:solidFill/>
-          </a:ln>
-        </p:spPr>
-        <p:style>
-          <a:lnRef idx="1">
-            <a:schemeClr val="accent1"/>
-          </a:lnRef>
-          <a:fillRef idx="3">
-            <a:schemeClr val="accent1"/>
-          </a:fillRef>
-          <a:effectRef idx="2">
-            <a:schemeClr val="accent1"/>
-          </a:effectRef>
-          <a:fontRef idx="minor">
-            <a:schemeClr val="lt1"/>
-          </a:fontRef>
-        </p:style>
-        <p:txBody>
-          <a:bodyPr rtlCol="0" anchor="ctr"/>
-          <a:lstStyle/>
-          <a:p>
-            <a:pPr algn="ctr"/>
-            <a:endParaRPr/>
-          </a:p>
-        </p:txBody>
-      </p:sp>
-      <p:sp>
-        <p:nvSpPr>
-          <p:cNvPr id="5" name="TextBox 4"/>
-          <p:cNvSpPr txBox="1"/>
-          <p:nvPr/>
-        </p:nvSpPr>
-        <p:spPr>
-          <a:xfrm>
-            <a:off x="731520" y="1325880"/>
-            <a:ext cx="7680960" cy="777240"/>
-          </a:xfrm>
-          <a:prstGeom prst="rect">
-            <a:avLst/>
-          </a:prstGeom>
-          <a:noFill/>
-          <a:ln/>
-        </p:spPr>
-        <p:txBody>
-          <a:bodyPr wrap="square" anchor="ctr">
-            <a:spAutoFit/>
-          </a:bodyPr>
-          <a:lstStyle/>
-          <a:p>
-            <a:pPr algn="ctr"/>
-            <a:r>
-              <a:rPr sz="2000" b="1" i="0">
-                <a:solidFill>
-                  <a:srgbClr val="FFFFFF"/>
-                </a:solidFill>
-                <a:latin typeface="Calibri"/>
-              </a:rPr>
-              <a:t>Y</a:t>
-            </a:r>
-            <a:r>
-              <a:rPr sz="1400" b="0" i="1">
-                <a:solidFill>
-                  <a:srgbClr val="C8CDD0"/>
-                </a:solidFill>
-                <a:latin typeface="Calibri"/>
-              </a:rPr>
-              <a:t>ᵢft</a:t>
-            </a:r>
-            <a:r>
-              <a:rPr sz="2000" b="1" i="0">
-                <a:solidFill>
-                  <a:srgbClr val="FFFFFF"/>
-                </a:solidFill>
-                <a:latin typeface="Calibri"/>
-              </a:rPr>
-              <a:t>  =  α  +  </a:t>
-            </a:r>
-            <a:r>
-              <a:rPr sz="2000" b="1" i="0">
-                <a:solidFill>
-                  <a:srgbClr val="FFB347"/>
-                </a:solidFill>
-                <a:latin typeface="Calibri"/>
-              </a:rPr>
-              <a:t>β₁</a:t>
-            </a:r>
-            <a:r>
-              <a:rPr sz="2000" b="1" i="0">
-                <a:solidFill>
-                  <a:srgbClr val="FFFFFF"/>
-                </a:solidFill>
-                <a:latin typeface="Calibri"/>
-              </a:rPr>
-              <a:t>(A</a:t>
-            </a:r>
-            <a:r>
-              <a:rPr sz="1400" b="0" i="1">
-                <a:solidFill>
-                  <a:srgbClr val="C8CDD0"/>
-                </a:solidFill>
-                <a:latin typeface="Calibri"/>
-              </a:rPr>
-              <a:t>f</a:t>
-            </a:r>
-            <a:r>
-              <a:rPr sz="2000" b="1" i="0">
-                <a:solidFill>
-                  <a:srgbClr val="FFFFFF"/>
-                </a:solidFill>
-                <a:latin typeface="Calibri"/>
-              </a:rPr>
-              <a:t> × D</a:t>
-            </a:r>
-            <a:r>
-              <a:rPr sz="1400" b="0" i="1">
-                <a:solidFill>
-                  <a:srgbClr val="C8CDD0"/>
-                </a:solidFill>
-                <a:latin typeface="Calibri"/>
-              </a:rPr>
-              <a:t>t</a:t>
-            </a:r>
-            <a:r>
-              <a:rPr sz="2000" b="1" i="0">
-                <a:solidFill>
-                  <a:srgbClr val="FFFFFF"/>
-                </a:solidFill>
-                <a:latin typeface="Calibri"/>
-              </a:rPr>
-              <a:t>)  +  </a:t>
-            </a:r>
-            <a:r>
-              <a:rPr sz="2000" b="1" i="0">
-                <a:solidFill>
-                  <a:srgbClr val="FFB347"/>
-                </a:solidFill>
-                <a:latin typeface="Calibri"/>
-              </a:rPr>
-              <a:t>β₂</a:t>
-            </a:r>
-            <a:r>
-              <a:rPr sz="2000" b="1" i="0">
-                <a:solidFill>
-                  <a:srgbClr val="FFFFFF"/>
-                </a:solidFill>
-                <a:latin typeface="Calibri"/>
-              </a:rPr>
-              <a:t>(A</a:t>
-            </a:r>
-            <a:r>
-              <a:rPr sz="1400" b="0" i="1">
-                <a:solidFill>
-                  <a:srgbClr val="C8CDD0"/>
-                </a:solidFill>
-                <a:latin typeface="Calibri"/>
-              </a:rPr>
-              <a:t>f</a:t>
-            </a:r>
-            <a:r>
-              <a:rPr sz="2000" b="1" i="0">
-                <a:solidFill>
-                  <a:srgbClr val="FFFFFF"/>
-                </a:solidFill>
-                <a:latin typeface="Calibri"/>
-              </a:rPr>
-              <a:t> × T</a:t>
-            </a:r>
-            <a:r>
-              <a:rPr sz="1400" b="0" i="1">
-                <a:solidFill>
-                  <a:srgbClr val="C8CDD0"/>
-                </a:solidFill>
-                <a:latin typeface="Calibri"/>
-              </a:rPr>
-              <a:t>t</a:t>
-            </a:r>
-            <a:r>
-              <a:rPr sz="2000" b="1" i="0">
-                <a:solidFill>
-                  <a:srgbClr val="FFFFFF"/>
-                </a:solidFill>
-                <a:latin typeface="Calibri"/>
-              </a:rPr>
-              <a:t>)  +  γ′X</a:t>
-            </a:r>
-            <a:r>
-              <a:rPr sz="1400" b="0" i="1">
-                <a:solidFill>
-                  <a:srgbClr val="C8CDD0"/>
-                </a:solidFill>
-                <a:latin typeface="Calibri"/>
-              </a:rPr>
-              <a:t>ᵢft</a:t>
-            </a:r>
-            <a:r>
-              <a:rPr sz="2000" b="1" i="0">
-                <a:solidFill>
-                  <a:srgbClr val="FFFFFF"/>
-                </a:solidFill>
-                <a:latin typeface="Calibri"/>
-              </a:rPr>
-              <a:t>  +  δ</a:t>
-            </a:r>
-            <a:r>
-              <a:rPr sz="1400" b="0" i="1">
-                <a:solidFill>
-                  <a:srgbClr val="C8CDD0"/>
-                </a:solidFill>
-                <a:latin typeface="Calibri"/>
-              </a:rPr>
-              <a:t>f</a:t>
-            </a:r>
-            <a:r>
-              <a:rPr sz="2000" b="1" i="0">
-                <a:solidFill>
-                  <a:srgbClr val="FFFFFF"/>
-                </a:solidFill>
-                <a:latin typeface="Calibri"/>
-              </a:rPr>
-              <a:t>  +  θ</a:t>
-            </a:r>
-            <a:r>
-              <a:rPr sz="1400" b="0" i="1">
-                <a:solidFill>
-                  <a:srgbClr val="C8CDD0"/>
-                </a:solidFill>
-                <a:latin typeface="Calibri"/>
-              </a:rPr>
-              <a:t>t</a:t>
-            </a:r>
-            <a:r>
-              <a:rPr sz="2000" b="1" i="0">
-                <a:solidFill>
-                  <a:srgbClr val="FFFFFF"/>
-                </a:solidFill>
-                <a:latin typeface="Calibri"/>
-              </a:rPr>
-              <a:t>  +  ε</a:t>
-            </a:r>
-            <a:r>
-              <a:rPr sz="1400" b="0" i="1">
-                <a:solidFill>
-                  <a:srgbClr val="C8CDD0"/>
-                </a:solidFill>
-                <a:latin typeface="Calibri"/>
-              </a:rPr>
-              <a:t>ᵢft</a:t>
-            </a:r>
-          </a:p>
-        </p:txBody>
-      </p:sp>
-      <p:sp>
-        <p:nvSpPr>
-          <p:cNvPr id="6" name="TextBox 5"/>
-          <p:cNvSpPr txBox="1"/>
-          <p:nvPr/>
-        </p:nvSpPr>
-        <p:spPr>
-          <a:xfrm>
-            <a:off x="731520" y="2377440"/>
-            <a:ext cx="3657600" cy="2377440"/>
-          </a:xfrm>
-          <a:prstGeom prst="rect">
-            <a:avLst/>
-          </a:prstGeom>
-          <a:noFill/>
-          <a:ln/>
-        </p:spPr>
-        <p:txBody>
-          <a:bodyPr wrap="square">
-            <a:spAutoFit/>
-          </a:bodyPr>
-          <a:lstStyle/>
-          <a:p>
-            <a:pPr algn="l">
-              <a:defRPr sz="1500" b="1" i="0">
-                <a:solidFill>
-                  <a:srgbClr val="36454F"/>
-                </a:solidFill>
-                <a:latin typeface="Calibri"/>
-              </a:defRPr>
-            </a:pPr>
-            <a:r>
-              <a:rPr>
-                <a:solidFill/>
-              </a:rPr>
-              <a:t>Key Variables</a:t>
-            </a:r>
-          </a:p>
-          <a:p>
-            <a:pPr>
-              <a:spcBef>
-                <a:spcPts val="600"/>
-              </a:spcBef>
-            </a:pPr>
-            <a:r>
-              <a:rPr sz="1200" b="1" i="0">
-                <a:solidFill>
-                  <a:srgbClr val="E8963E"/>
-                </a:solidFill>
-                <a:latin typeface="Calibri"/>
-              </a:rPr>
-              <a:t>Yᵢft</a:t>
-            </a:r>
-            <a:r>
-              <a:rPr sz="1200" b="0" i="0">
-                <a:solidFill>
-                  <a:srgbClr val="36454F"/>
-                </a:solidFill>
-                <a:latin typeface="Calibri"/>
-              </a:rPr>
-              <a:t>  Shannon entropy of paper i in field f at time t</a:t>
-            </a:r>
-          </a:p>
-          <a:p>
-            <a:pPr>
-              <a:spcBef>
-                <a:spcPts val="600"/>
-              </a:spcBef>
-            </a:pPr>
-            <a:r>
-              <a:rPr sz="1200" b="1" i="0">
-                <a:solidFill>
-                  <a:srgbClr val="E8963E"/>
-                </a:solidFill>
-                <a:latin typeface="Calibri"/>
-              </a:rPr>
-              <a:t>Af</a:t>
-            </a:r>
-            <a:r>
-              <a:rPr sz="1200" b="0" i="0">
-                <a:solidFill>
-                  <a:srgbClr val="36454F"/>
-                </a:solidFill>
-                <a:latin typeface="Calibri"/>
-              </a:rPr>
-              <a:t>  AI propensity score (Kobak marker word increase, field f)</a:t>
-            </a:r>
-          </a:p>
-          <a:p>
-            <a:pPr>
-              <a:spcBef>
-                <a:spcPts val="600"/>
-              </a:spcBef>
-            </a:pPr>
-            <a:r>
-              <a:rPr sz="1200" b="1" i="0">
-                <a:solidFill>
-                  <a:srgbClr val="E8963E"/>
-                </a:solidFill>
-                <a:latin typeface="Calibri"/>
-              </a:rPr>
-              <a:t>Dt</a:t>
-            </a:r>
-            <a:r>
-              <a:rPr sz="1200" b="0" i="0">
-                <a:solidFill>
-                  <a:srgbClr val="36454F"/>
-                </a:solidFill>
-                <a:latin typeface="Calibri"/>
-              </a:rPr>
-              <a:t>  = 1 if post-GPT-4o (Nov 2024+)</a:t>
-            </a:r>
-          </a:p>
-          <a:p>
-            <a:pPr>
-              <a:spcBef>
-                <a:spcPts val="600"/>
-              </a:spcBef>
-            </a:pPr>
-            <a:r>
-              <a:rPr sz="1200" b="1" i="0">
-                <a:solidFill>
-                  <a:srgbClr val="E8963E"/>
-                </a:solidFill>
-                <a:latin typeface="Calibri"/>
-              </a:rPr>
-              <a:t>Tt</a:t>
-            </a:r>
-            <a:r>
-              <a:rPr sz="1200" b="0" i="0">
-                <a:solidFill>
-                  <a:srgbClr val="36454F"/>
-                </a:solidFill>
-                <a:latin typeface="Calibri"/>
-              </a:rPr>
-              <a:t>  = max(0, months since Nov 2024)</a:t>
-            </a:r>
-          </a:p>
-        </p:txBody>
-      </p:sp>
-      <p:sp>
-        <p:nvSpPr>
-          <p:cNvPr id="7" name="TextBox 6"/>
-          <p:cNvSpPr txBox="1"/>
-          <p:nvPr/>
-        </p:nvSpPr>
-        <p:spPr>
-          <a:xfrm>
-            <a:off x="4754880" y="2377440"/>
-            <a:ext cx="3657600" cy="2377440"/>
-          </a:xfrm>
-          <a:prstGeom prst="rect">
-            <a:avLst/>
-          </a:prstGeom>
-          <a:noFill/>
-          <a:ln/>
-        </p:spPr>
-        <p:txBody>
-          <a:bodyPr wrap="square">
-            <a:spAutoFit/>
-          </a:bodyPr>
-          <a:lstStyle/>
-          <a:p>
-            <a:pPr algn="l">
-              <a:defRPr sz="1500" b="1" i="0">
-                <a:solidFill>
-                  <a:srgbClr val="36454F"/>
-                </a:solidFill>
-                <a:latin typeface="Calibri"/>
-              </a:defRPr>
-            </a:pPr>
-            <a:r>
-              <a:rPr>
-                <a:solidFill/>
-              </a:rPr>
-              <a:t>Controls &amp; Fixed Effects</a:t>
-            </a:r>
-          </a:p>
-          <a:p>
-            <a:pPr>
-              <a:spcBef>
-                <a:spcPts val="600"/>
-              </a:spcBef>
-            </a:pPr>
-            <a:r>
-              <a:rPr sz="1200" b="1" i="0">
-                <a:solidFill>
-                  <a:srgbClr val="E8963E"/>
-                </a:solidFill>
-                <a:latin typeface="Calibri"/>
-              </a:rPr>
-              <a:t>Xᵢft</a:t>
-            </a:r>
-            <a:r>
-              <a:rPr sz="1200" b="0" i="0">
-                <a:solidFill>
-                  <a:srgbClr val="36454F"/>
-                </a:solidFill>
-                <a:latin typeface="Calibri"/>
-              </a:rPr>
-              <a:t>  Num. authors, institutions, countries</a:t>
-            </a:r>
-          </a:p>
-          <a:p>
-            <a:pPr>
-              <a:spcBef>
-                <a:spcPts val="600"/>
-              </a:spcBef>
-            </a:pPr>
-            <a:r>
-              <a:rPr sz="1200" b="1" i="0">
-                <a:solidFill>
-                  <a:srgbClr val="E8963E"/>
-                </a:solidFill>
-                <a:latin typeface="Calibri"/>
-              </a:rPr>
-              <a:t>δf</a:t>
-            </a:r>
-            <a:r>
-              <a:rPr sz="1200" b="0" i="0">
-                <a:solidFill>
-                  <a:srgbClr val="36454F"/>
-                </a:solidFill>
-                <a:latin typeface="Calibri"/>
-              </a:rPr>
-              <a:t>  Field fixed effects (16 fields)</a:t>
-            </a:r>
-          </a:p>
-          <a:p>
-            <a:pPr>
-              <a:spcBef>
-                <a:spcPts val="600"/>
-              </a:spcBef>
-            </a:pPr>
-            <a:r>
-              <a:rPr sz="1200" b="1" i="0">
-                <a:solidFill>
-                  <a:srgbClr val="E8963E"/>
-                </a:solidFill>
-                <a:latin typeface="Calibri"/>
-              </a:rPr>
-              <a:t>θt</a:t>
-            </a:r>
-            <a:r>
-              <a:rPr sz="1200" b="0" i="0">
-                <a:solidFill>
-                  <a:srgbClr val="36454F"/>
-                </a:solidFill>
-                <a:latin typeface="Calibri"/>
-              </a:rPr>
-              <a:t>  Year-month fixed effects</a:t>
-            </a:r>
-          </a:p>
-          <a:p>
-            <a:pPr>
-              <a:spcBef>
-                <a:spcPts val="600"/>
-              </a:spcBef>
-            </a:pPr>
-            <a:r>
-              <a:rPr sz="1200" b="1" i="0">
-                <a:solidFill>
-                  <a:srgbClr val="E8963E"/>
-                </a:solidFill>
-                <a:latin typeface="Calibri"/>
-              </a:rPr>
-              <a:t>εᵢft</a:t>
-            </a:r>
-            <a:r>
-              <a:rPr sz="1200" b="0" i="0">
-                <a:solidFill>
-                  <a:srgbClr val="36454F"/>
-                </a:solidFill>
-                <a:latin typeface="Calibri"/>
-              </a:rPr>
-              <a:t>  HC1 robust standard errors</a:t>
-            </a:r>
-          </a:p>
-        </p:txBody>
-      </p:sp>
-      <p:sp>
-        <p:nvSpPr>
-          <p:cNvPr id="8" name="Rounded Rectangle 7"/>
-          <p:cNvSpPr/>
-          <p:nvPr/>
-        </p:nvSpPr>
-        <p:spPr>
-          <a:xfrm>
-            <a:off x="731520" y="4206240"/>
-            <a:ext cx="7680960" cy="594360"/>
-          </a:xfrm>
-          <a:prstGeom prst="roundRect">
-            <a:avLst>
-              <a:gd name="adj" fmla="val 2000"/>
-            </a:avLst>
-          </a:prstGeom>
-          <a:solidFill>
-            <a:srgbClr val="36454F"/>
-          </a:solidFill>
-          <a:ln>
-            <a:solidFill/>
-          </a:ln>
-        </p:spPr>
-        <p:style>
-          <a:lnRef idx="1">
-            <a:schemeClr val="accent1"/>
-          </a:lnRef>
-          <a:fillRef idx="3">
-            <a:schemeClr val="accent1"/>
-          </a:fillRef>
-          <a:effectRef idx="2">
-            <a:schemeClr val="accent1"/>
-          </a:effectRef>
-          <a:fontRef idx="minor">
-            <a:schemeClr val="lt1"/>
-          </a:fontRef>
-        </p:style>
-        <p:txBody>
-          <a:bodyPr rtlCol="0" anchor="ctr"/>
-          <a:lstStyle/>
-          <a:p>
-            <a:pPr algn="ctr"/>
-            <a:endParaRPr/>
-          </a:p>
-        </p:txBody>
-      </p:sp>
-      <p:sp>
-        <p:nvSpPr>
-          <p:cNvPr id="9" name="TextBox 8"/>
-          <p:cNvSpPr txBox="1"/>
-          <p:nvPr/>
-        </p:nvSpPr>
-        <p:spPr>
-          <a:xfrm>
-            <a:off x="731520" y="4206240"/>
-            <a:ext cx="7680960" cy="594360"/>
-          </a:xfrm>
-          <a:prstGeom prst="rect">
-            <a:avLst/>
-          </a:prstGeom>
-          <a:noFill/>
-          <a:ln/>
-        </p:spPr>
-        <p:txBody>
-          <a:bodyPr wrap="square" anchor="ctr">
-            <a:spAutoFit/>
-          </a:bodyPr>
-          <a:lstStyle/>
-          <a:p>
-            <a:pPr algn="ctr"/>
-            <a:r>
-              <a:rPr sz="1300" b="1" i="0">
-                <a:solidFill>
-                  <a:srgbClr val="FFB347"/>
-                </a:solidFill>
-                <a:latin typeface="Calibri"/>
-              </a:rPr>
-              <a:t>β₁</a:t>
-            </a:r>
-            <a:r>
-              <a:rPr sz="1300" b="0" i="0">
-                <a:solidFill>
-                  <a:srgbClr val="FFFFFF"/>
-                </a:solidFill>
-                <a:latin typeface="Calibri"/>
-              </a:rPr>
-              <a:t> captures the level shift at treatment.  </a:t>
-            </a:r>
-            <a:r>
-              <a:rPr sz="1300" b="1" i="0">
-                <a:solidFill>
-                  <a:srgbClr val="FFB347"/>
-                </a:solidFill>
-                <a:latin typeface="Calibri"/>
-              </a:rPr>
-              <a:t>β₂</a:t>
-            </a:r>
-            <a:r>
-              <a:rPr sz="1300" b="0" i="0">
-                <a:solidFill>
-                  <a:srgbClr val="FFFFFF"/>
-                </a:solidFill>
-                <a:latin typeface="Calibri"/>
-              </a:rPr>
-              <a:t> captures the monthly trend post-treatment — consistent with gradual LLM diffusion.</a:t>
-            </a:r>
-          </a:p>
-        </p:txBody>
-      </p:sp>
-    </p:spTree>
-    <p:extLst>
-      <p:ext uri="{BB962C8B-B14F-4D97-AF65-F5344CB8AC3E}">
-        <p14:creationId xmlns:p14="http://schemas.microsoft.com/office/powerpoint/2010/main" val="2065123730"/>
-      </p:ext>
-    </p:extLst>
   </p:cSld>
   <p:clrMapOvr>
     <a:masterClrMapping/>
